--- a/backend/mysite/04_Presentation/Software Architecture Presentation.pptx
+++ b/backend/mysite/04_Presentation/Software Architecture Presentation.pptx
@@ -2,11 +2,19 @@
 <file path=ppt/presentation.xml><?xml version="1.0" encoding="utf-8"?>
 <p:presentation xmlns:a="http://schemas.openxmlformats.org/drawingml/2006/main" xmlns:r="http://schemas.openxmlformats.org/officeDocument/2006/relationships" xmlns:p="http://schemas.openxmlformats.org/presentationml/2006/main" saveSubsetFonts="1">
   <p:sldMasterIdLst>
-    <p:sldMasterId id="2147483660" r:id="rId4"/>
+    <p:sldMasterId id="2147483678" r:id="rId4"/>
   </p:sldMasterIdLst>
   <p:sldIdLst>
     <p:sldId id="256" r:id="rId5"/>
     <p:sldId id="257" r:id="rId6"/>
+    <p:sldId id="258" r:id="rId7"/>
+    <p:sldId id="259" r:id="rId8"/>
+    <p:sldId id="260" r:id="rId9"/>
+    <p:sldId id="261" r:id="rId10"/>
+    <p:sldId id="262" r:id="rId11"/>
+    <p:sldId id="263" r:id="rId12"/>
+    <p:sldId id="264" r:id="rId13"/>
+    <p:sldId id="265" r:id="rId14"/>
   </p:sldIdLst>
   <p:sldSz cx="12192000" cy="6858000"/>
   <p:notesSz cx="6858000" cy="9144000"/>
@@ -138,249 +146,147 @@
           <a:chExt cx="0" cy="0"/>
         </a:xfrm>
       </p:grpSpPr>
-      <p:pic>
-        <p:nvPicPr>
-          <p:cNvPr id="7" name="Picture 6" descr="HD-ShadowLong.png"/>
-          <p:cNvPicPr>
-            <a:picLocks noChangeAspect="1"/>
-          </p:cNvPicPr>
-          <p:nvPr/>
-        </p:nvPicPr>
-        <p:blipFill>
-          <a:blip r:embed="rId2">
-            <a:extLst>
-              <a:ext uri="{28A0092B-C50C-407E-A947-70E740481C1C}">
-                <a14:useLocalDpi xmlns:a14="http://schemas.microsoft.com/office/drawing/2010/main" val="0"/>
-              </a:ext>
-            </a:extLst>
-          </a:blip>
-          <a:stretch>
-            <a:fillRect/>
-          </a:stretch>
-        </p:blipFill>
+      <p:sp>
+        <p:nvSpPr>
+          <p:cNvPr id="2" name="Title 1"/>
+          <p:cNvSpPr>
+            <a:spLocks noGrp="1"/>
+          </p:cNvSpPr>
+          <p:nvPr>
+            <p:ph type="ctrTitle"/>
+          </p:nvPr>
+        </p:nvSpPr>
         <p:spPr>
           <a:xfrm>
-            <a:off x="1" y="4242851"/>
-            <a:ext cx="8968084" cy="275942"/>
+            <a:off x="1154955" y="1447800"/>
+            <a:ext cx="8825658" cy="3329581"/>
           </a:xfrm>
-          <a:prstGeom prst="rect">
-            <a:avLst/>
-          </a:prstGeom>
         </p:spPr>
-      </p:pic>
-      <p:pic>
-        <p:nvPicPr>
-          <p:cNvPr id="8" name="Picture 7" descr="HD-ShadowShort.png"/>
-          <p:cNvPicPr>
-            <a:picLocks noChangeAspect="1"/>
-          </p:cNvPicPr>
-          <p:nvPr/>
-        </p:nvPicPr>
-        <p:blipFill>
-          <a:blip r:embed="rId3">
-            <a:extLst>
-              <a:ext uri="{28A0092B-C50C-407E-A947-70E740481C1C}">
-                <a14:useLocalDpi xmlns:a14="http://schemas.microsoft.com/office/drawing/2010/main" val="0"/>
-              </a:ext>
-            </a:extLst>
-          </a:blip>
-          <a:stretch>
-            <a:fillRect/>
-          </a:stretch>
-        </p:blipFill>
+        <p:txBody>
+          <a:bodyPr anchor="b"/>
+          <a:lstStyle>
+            <a:lvl1pPr>
+              <a:defRPr sz="7200"/>
+            </a:lvl1pPr>
+          </a:lstStyle>
+          <a:p>
+            <a:r>
+              <a:rPr lang="en-US"/>
+              <a:t>Click to edit Master title style</a:t>
+            </a:r>
+            <a:endParaRPr lang="en-US" dirty="0"/>
+          </a:p>
+        </p:txBody>
+      </p:sp>
+      <p:sp>
+        <p:nvSpPr>
+          <p:cNvPr id="3" name="Subtitle 2"/>
+          <p:cNvSpPr>
+            <a:spLocks noGrp="1"/>
+          </p:cNvSpPr>
+          <p:nvPr>
+            <p:ph type="subTitle" idx="1"/>
+          </p:nvPr>
+        </p:nvSpPr>
         <p:spPr>
           <a:xfrm>
-            <a:off x="9111716" y="4243845"/>
-            <a:ext cx="3077108" cy="276940"/>
-          </a:xfrm>
-          <a:prstGeom prst="rect">
-            <a:avLst/>
-          </a:prstGeom>
-        </p:spPr>
-      </p:pic>
-      <p:sp>
-        <p:nvSpPr>
-          <p:cNvPr id="9" name="Rectangle 8"/>
-          <p:cNvSpPr/>
-          <p:nvPr/>
-        </p:nvSpPr>
-        <p:spPr bwMode="ltGray">
-          <a:xfrm>
-            <a:off x="0" y="2590078"/>
-            <a:ext cx="8968085" cy="1660332"/>
-          </a:xfrm>
-          <a:prstGeom prst="rect">
-            <a:avLst/>
-          </a:prstGeom>
-          <a:solidFill>
-            <a:schemeClr val="bg1">
-              <a:lumMod val="85000"/>
-              <a:lumOff val="15000"/>
-            </a:schemeClr>
-          </a:solidFill>
-          <a:ln>
-            <a:noFill/>
-          </a:ln>
-        </p:spPr>
-        <p:style>
-          <a:lnRef idx="2">
-            <a:schemeClr val="accent1">
-              <a:shade val="50000"/>
-            </a:schemeClr>
-          </a:lnRef>
-          <a:fillRef idx="1">
-            <a:schemeClr val="accent1"/>
-          </a:fillRef>
-          <a:effectRef idx="0">
-            <a:schemeClr val="accent1"/>
-          </a:effectRef>
-          <a:fontRef idx="minor">
-            <a:schemeClr val="lt1"/>
-          </a:fontRef>
-        </p:style>
-        <p:txBody>
-          <a:bodyPr/>
-          <a:lstStyle/>
-          <a:p>
-            <a:endParaRPr lang="en-US"/>
-          </a:p>
-        </p:txBody>
-      </p:sp>
-      <p:sp>
-        <p:nvSpPr>
-          <p:cNvPr id="10" name="Rectangle 9"/>
-          <p:cNvSpPr/>
-          <p:nvPr/>
-        </p:nvSpPr>
-        <p:spPr>
-          <a:xfrm>
-            <a:off x="9111715" y="2590078"/>
-            <a:ext cx="3077109" cy="1660332"/>
-          </a:xfrm>
-          <a:prstGeom prst="rect">
-            <a:avLst/>
-          </a:prstGeom>
-          <a:solidFill>
-            <a:schemeClr val="accent1"/>
-          </a:solidFill>
-          <a:ln>
-            <a:noFill/>
-          </a:ln>
-        </p:spPr>
-        <p:style>
-          <a:lnRef idx="2">
-            <a:schemeClr val="accent1">
-              <a:shade val="50000"/>
-            </a:schemeClr>
-          </a:lnRef>
-          <a:fillRef idx="1">
-            <a:schemeClr val="accent1"/>
-          </a:fillRef>
-          <a:effectRef idx="0">
-            <a:schemeClr val="accent1"/>
-          </a:effectRef>
-          <a:fontRef idx="minor">
-            <a:schemeClr val="lt1"/>
-          </a:fontRef>
-        </p:style>
-        <p:txBody>
-          <a:bodyPr/>
-          <a:lstStyle/>
-          <a:p>
-            <a:endParaRPr lang="en-US"/>
-          </a:p>
-        </p:txBody>
-      </p:sp>
-      <p:sp>
-        <p:nvSpPr>
-          <p:cNvPr id="2" name="Title 1"/>
-          <p:cNvSpPr>
-            <a:spLocks noGrp="1"/>
-          </p:cNvSpPr>
-          <p:nvPr>
-            <p:ph type="ctrTitle"/>
-          </p:nvPr>
-        </p:nvSpPr>
-        <p:spPr>
-          <a:xfrm>
-            <a:off x="680322" y="2733709"/>
-            <a:ext cx="8144134" cy="1373070"/>
+            <a:off x="1154955" y="4777380"/>
+            <a:ext cx="8825658" cy="861420"/>
           </a:xfrm>
         </p:spPr>
         <p:txBody>
-          <a:bodyPr anchor="b">
-            <a:noAutofit/>
-          </a:bodyPr>
+          <a:bodyPr anchor="t"/>
           <a:lstStyle>
-            <a:lvl1pPr algn="r">
-              <a:defRPr sz="5400"/>
-            </a:lvl1pPr>
-          </a:lstStyle>
-          <a:p>
-            <a:r>
-              <a:rPr lang="en-US"/>
-              <a:t>Click to edit Master title style</a:t>
-            </a:r>
-            <a:endParaRPr lang="en-US" dirty="0"/>
-          </a:p>
-        </p:txBody>
-      </p:sp>
-      <p:sp>
-        <p:nvSpPr>
-          <p:cNvPr id="3" name="Subtitle 2"/>
-          <p:cNvSpPr>
-            <a:spLocks noGrp="1"/>
-          </p:cNvSpPr>
-          <p:nvPr>
-            <p:ph type="subTitle" idx="1"/>
-          </p:nvPr>
-        </p:nvSpPr>
-        <p:spPr>
-          <a:xfrm>
-            <a:off x="680322" y="4394039"/>
-            <a:ext cx="8144134" cy="1117687"/>
-          </a:xfrm>
-        </p:spPr>
-        <p:txBody>
-          <a:bodyPr>
-            <a:normAutofit/>
-          </a:bodyPr>
-          <a:lstStyle>
-            <a:lvl1pPr marL="0" indent="0" algn="r">
-              <a:buNone/>
-              <a:defRPr sz="2000"/>
+            <a:lvl1pPr marL="0" indent="0" algn="l">
+              <a:buNone/>
+              <a:defRPr cap="all">
+                <a:solidFill>
+                  <a:schemeClr val="bg2">
+                    <a:lumMod val="40000"/>
+                    <a:lumOff val="60000"/>
+                  </a:schemeClr>
+                </a:solidFill>
+              </a:defRPr>
             </a:lvl1pPr>
             <a:lvl2pPr marL="457200" indent="0" algn="ctr">
               <a:buNone/>
-              <a:defRPr sz="2000"/>
+              <a:defRPr>
+                <a:solidFill>
+                  <a:schemeClr val="tx1">
+                    <a:tint val="75000"/>
+                  </a:schemeClr>
+                </a:solidFill>
+              </a:defRPr>
             </a:lvl2pPr>
             <a:lvl3pPr marL="914400" indent="0" algn="ctr">
               <a:buNone/>
-              <a:defRPr sz="1800"/>
+              <a:defRPr>
+                <a:solidFill>
+                  <a:schemeClr val="tx1">
+                    <a:tint val="75000"/>
+                  </a:schemeClr>
+                </a:solidFill>
+              </a:defRPr>
             </a:lvl3pPr>
             <a:lvl4pPr marL="1371600" indent="0" algn="ctr">
               <a:buNone/>
-              <a:defRPr sz="1600"/>
+              <a:defRPr>
+                <a:solidFill>
+                  <a:schemeClr val="tx1">
+                    <a:tint val="75000"/>
+                  </a:schemeClr>
+                </a:solidFill>
+              </a:defRPr>
             </a:lvl4pPr>
             <a:lvl5pPr marL="1828800" indent="0" algn="ctr">
               <a:buNone/>
-              <a:defRPr sz="1600"/>
+              <a:defRPr>
+                <a:solidFill>
+                  <a:schemeClr val="tx1">
+                    <a:tint val="75000"/>
+                  </a:schemeClr>
+                </a:solidFill>
+              </a:defRPr>
             </a:lvl5pPr>
             <a:lvl6pPr marL="2286000" indent="0" algn="ctr">
               <a:buNone/>
-              <a:defRPr sz="1600"/>
+              <a:defRPr>
+                <a:solidFill>
+                  <a:schemeClr val="tx1">
+                    <a:tint val="75000"/>
+                  </a:schemeClr>
+                </a:solidFill>
+              </a:defRPr>
             </a:lvl6pPr>
             <a:lvl7pPr marL="2743200" indent="0" algn="ctr">
               <a:buNone/>
-              <a:defRPr sz="1600"/>
+              <a:defRPr>
+                <a:solidFill>
+                  <a:schemeClr val="tx1">
+                    <a:tint val="75000"/>
+                  </a:schemeClr>
+                </a:solidFill>
+              </a:defRPr>
             </a:lvl7pPr>
             <a:lvl8pPr marL="3200400" indent="0" algn="ctr">
               <a:buNone/>
-              <a:defRPr sz="1600"/>
+              <a:defRPr>
+                <a:solidFill>
+                  <a:schemeClr val="tx1">
+                    <a:tint val="75000"/>
+                  </a:schemeClr>
+                </a:solidFill>
+              </a:defRPr>
             </a:lvl8pPr>
             <a:lvl9pPr marL="3657600" indent="0" algn="ctr">
               <a:buNone/>
-              <a:defRPr sz="1600"/>
+              <a:defRPr>
+                <a:solidFill>
+                  <a:schemeClr val="tx1">
+                    <a:tint val="75000"/>
+                  </a:schemeClr>
+                </a:solidFill>
+              </a:defRPr>
             </a:lvl9pPr>
           </a:lstStyle>
           <a:p>
@@ -409,7 +315,7 @@
           <a:p>
             <a:fld id="{62D5F05B-F1CA-41F1-9D15-228D0FEFC4A2}" type="datetimeFigureOut">
               <a:rPr lang="en-US" smtClean="0"/>
-              <a:t>11/4/2025</a:t>
+              <a:t>11/11/2025</a:t>
             </a:fld>
             <a:endParaRPr lang="en-US"/>
           </a:p>
@@ -444,12 +350,7 @@
             <p:ph type="sldNum" sz="quarter" idx="12"/>
           </p:nvPr>
         </p:nvSpPr>
-        <p:spPr>
-          <a:xfrm>
-            <a:off x="9255346" y="2750337"/>
-            <a:ext cx="1171888" cy="1356442"/>
-          </a:xfrm>
-        </p:spPr>
+        <p:spPr/>
         <p:txBody>
           <a:bodyPr/>
           <a:lstStyle/>
@@ -465,7 +366,7 @@
     </p:spTree>
     <p:extLst>
       <p:ext uri="{BB962C8B-B14F-4D97-AF65-F5344CB8AC3E}">
-        <p14:creationId xmlns:p14="http://schemas.microsoft.com/office/powerpoint/2010/main" val="389015611"/>
+        <p14:creationId xmlns:p14="http://schemas.microsoft.com/office/powerpoint/2010/main" val="2606228240"/>
       </p:ext>
     </p:extLst>
   </p:cSld>
@@ -492,159 +393,20 @@
           <a:chExt cx="0" cy="0"/>
         </a:xfrm>
       </p:grpSpPr>
-      <p:pic>
-        <p:nvPicPr>
-          <p:cNvPr id="8" name="Picture 7" descr="HD-ShadowLong.png"/>
-          <p:cNvPicPr>
-            <a:picLocks noChangeAspect="1"/>
-          </p:cNvPicPr>
-          <p:nvPr/>
-        </p:nvPicPr>
-        <p:blipFill>
-          <a:blip r:embed="rId2">
-            <a:extLst>
-              <a:ext uri="{28A0092B-C50C-407E-A947-70E740481C1C}">
-                <a14:useLocalDpi xmlns:a14="http://schemas.microsoft.com/office/drawing/2010/main" val="0"/>
-              </a:ext>
-            </a:extLst>
-          </a:blip>
-          <a:stretch>
-            <a:fillRect/>
-          </a:stretch>
-        </p:blipFill>
+      <p:sp>
+        <p:nvSpPr>
+          <p:cNvPr id="2" name="Title 1"/>
+          <p:cNvSpPr>
+            <a:spLocks noGrp="1"/>
+          </p:cNvSpPr>
+          <p:nvPr>
+            <p:ph type="title"/>
+          </p:nvPr>
+        </p:nvSpPr>
         <p:spPr>
           <a:xfrm>
-            <a:off x="1" y="5928628"/>
-            <a:ext cx="10437812" cy="321164"/>
-          </a:xfrm>
-          <a:prstGeom prst="rect">
-            <a:avLst/>
-          </a:prstGeom>
-        </p:spPr>
-      </p:pic>
-      <p:pic>
-        <p:nvPicPr>
-          <p:cNvPr id="9" name="Picture 8" descr="HD-ShadowShort.png"/>
-          <p:cNvPicPr>
-            <a:picLocks noChangeAspect="1"/>
-          </p:cNvPicPr>
-          <p:nvPr/>
-        </p:nvPicPr>
-        <p:blipFill>
-          <a:blip r:embed="rId3">
-            <a:extLst>
-              <a:ext uri="{28A0092B-C50C-407E-A947-70E740481C1C}">
-                <a14:useLocalDpi xmlns:a14="http://schemas.microsoft.com/office/drawing/2010/main" val="0"/>
-              </a:ext>
-            </a:extLst>
-          </a:blip>
-          <a:stretch>
-            <a:fillRect/>
-          </a:stretch>
-        </p:blipFill>
-        <p:spPr>
-          <a:xfrm>
-            <a:off x="10585826" y="5929622"/>
-            <a:ext cx="1602997" cy="144270"/>
-          </a:xfrm>
-          <a:prstGeom prst="rect">
-            <a:avLst/>
-          </a:prstGeom>
-        </p:spPr>
-      </p:pic>
-      <p:sp>
-        <p:nvSpPr>
-          <p:cNvPr id="10" name="Rectangle 9"/>
-          <p:cNvSpPr/>
-          <p:nvPr/>
-        </p:nvSpPr>
-        <p:spPr bwMode="ltGray">
-          <a:xfrm>
-            <a:off x="0" y="4567988"/>
-            <a:ext cx="10437812" cy="1368198"/>
-          </a:xfrm>
-          <a:prstGeom prst="rect">
-            <a:avLst/>
-          </a:prstGeom>
-          <a:solidFill>
-            <a:schemeClr val="bg1">
-              <a:lumMod val="85000"/>
-              <a:lumOff val="15000"/>
-            </a:schemeClr>
-          </a:solidFill>
-          <a:ln>
-            <a:noFill/>
-          </a:ln>
-        </p:spPr>
-        <p:style>
-          <a:lnRef idx="2">
-            <a:schemeClr val="accent1">
-              <a:shade val="50000"/>
-            </a:schemeClr>
-          </a:lnRef>
-          <a:fillRef idx="1">
-            <a:schemeClr val="accent1"/>
-          </a:fillRef>
-          <a:effectRef idx="0">
-            <a:schemeClr val="accent1"/>
-          </a:effectRef>
-          <a:fontRef idx="minor">
-            <a:schemeClr val="lt1"/>
-          </a:fontRef>
-        </p:style>
-      </p:sp>
-      <p:sp>
-        <p:nvSpPr>
-          <p:cNvPr id="11" name="Rectangle 10"/>
-          <p:cNvSpPr/>
-          <p:nvPr/>
-        </p:nvSpPr>
-        <p:spPr>
-          <a:xfrm>
-            <a:off x="10585827" y="4567988"/>
-            <a:ext cx="1602997" cy="1368198"/>
-          </a:xfrm>
-          <a:prstGeom prst="rect">
-            <a:avLst/>
-          </a:prstGeom>
-          <a:solidFill>
-            <a:schemeClr val="accent1"/>
-          </a:solidFill>
-          <a:ln>
-            <a:noFill/>
-          </a:ln>
-        </p:spPr>
-        <p:style>
-          <a:lnRef idx="2">
-            <a:schemeClr val="accent1">
-              <a:shade val="50000"/>
-            </a:schemeClr>
-          </a:lnRef>
-          <a:fillRef idx="1">
-            <a:schemeClr val="accent1"/>
-          </a:fillRef>
-          <a:effectRef idx="0">
-            <a:schemeClr val="accent1"/>
-          </a:effectRef>
-          <a:fontRef idx="minor">
-            <a:schemeClr val="lt1"/>
-          </a:fontRef>
-        </p:style>
-      </p:sp>
-      <p:sp>
-        <p:nvSpPr>
-          <p:cNvPr id="2" name="Title 1"/>
-          <p:cNvSpPr>
-            <a:spLocks noGrp="1"/>
-          </p:cNvSpPr>
-          <p:nvPr>
-            <p:ph type="title"/>
-          </p:nvPr>
-        </p:nvSpPr>
-        <p:spPr>
-          <a:xfrm>
-            <a:off x="680322" y="4711616"/>
-            <a:ext cx="9613859" cy="453051"/>
+            <a:off x="1154956" y="4800587"/>
+            <a:ext cx="8825657" cy="566738"/>
           </a:xfrm>
         </p:spPr>
         <p:txBody>
@@ -652,8 +414,8 @@
             <a:normAutofit/>
           </a:bodyPr>
           <a:lstStyle>
-            <a:lvl1pPr>
-              <a:defRPr sz="2400"/>
+            <a:lvl1pPr algn="l">
+              <a:defRPr sz="2400" b="0"/>
             </a:lvl1pPr>
           </a:lstStyle>
           <a:p>
@@ -677,127 +439,132 @@
         </p:nvSpPr>
         <p:spPr>
           <a:xfrm>
-            <a:off x="680322" y="609597"/>
-            <a:ext cx="9613859" cy="3589575"/>
+            <a:off x="1154955" y="685800"/>
+            <a:ext cx="8825658" cy="3640666"/>
           </a:xfrm>
-          <a:noFill/>
-          <a:ln>
-            <a:noFill/>
-          </a:ln>
+          <a:prstGeom prst="roundRect">
+            <a:avLst>
+              <a:gd name="adj" fmla="val 1858"/>
+            </a:avLst>
+          </a:prstGeom>
           <a:effectLst>
-            <a:outerShdw blurRad="76200" dist="63500" dir="5040000" algn="tl" rotWithShape="0">
+            <a:outerShdw blurRad="50800" dist="50800" dir="5400000" algn="tl" rotWithShape="0">
               <a:srgbClr val="000000">
-                <a:alpha val="41000"/>
+                <a:alpha val="43000"/>
               </a:srgbClr>
             </a:outerShdw>
           </a:effectLst>
         </p:spPr>
         <p:txBody>
-          <a:bodyPr anchor="t"/>
+          <a:bodyPr anchor="t">
+            <a:normAutofit/>
+          </a:bodyPr>
           <a:lstStyle>
-            <a:lvl1pPr marL="0" indent="0">
-              <a:buNone/>
-              <a:defRPr sz="3200"/>
-            </a:lvl1pPr>
-            <a:lvl2pPr marL="457200" indent="0">
-              <a:buNone/>
-              <a:defRPr sz="2800"/>
-            </a:lvl2pPr>
-            <a:lvl3pPr marL="914400" indent="0">
-              <a:buNone/>
-              <a:defRPr sz="2400"/>
-            </a:lvl3pPr>
-            <a:lvl4pPr marL="1371600" indent="0">
-              <a:buNone/>
-              <a:defRPr sz="2000"/>
-            </a:lvl4pPr>
-            <a:lvl5pPr marL="1828800" indent="0">
-              <a:buNone/>
-              <a:defRPr sz="2000"/>
-            </a:lvl5pPr>
-            <a:lvl6pPr marL="2286000" indent="0">
-              <a:buNone/>
-              <a:defRPr sz="2000"/>
-            </a:lvl6pPr>
-            <a:lvl7pPr marL="2743200" indent="0">
-              <a:buNone/>
-              <a:defRPr sz="2000"/>
-            </a:lvl7pPr>
-            <a:lvl8pPr marL="3200400" indent="0">
-              <a:buNone/>
-              <a:defRPr sz="2000"/>
-            </a:lvl8pPr>
-            <a:lvl9pPr marL="3657600" indent="0">
-              <a:buNone/>
-              <a:defRPr sz="2000"/>
-            </a:lvl9pPr>
-          </a:lstStyle>
-          <a:p>
-            <a:r>
-              <a:rPr lang="en-US"/>
-              <a:t>Click icon to add picture</a:t>
-            </a:r>
-            <a:endParaRPr lang="en-US" dirty="0"/>
-          </a:p>
-        </p:txBody>
-      </p:sp>
-      <p:sp>
-        <p:nvSpPr>
-          <p:cNvPr id="4" name="Text Placeholder 3"/>
-          <p:cNvSpPr>
-            <a:spLocks noGrp="1"/>
-          </p:cNvSpPr>
-          <p:nvPr>
-            <p:ph type="body" sz="half" idx="2"/>
-          </p:nvPr>
-        </p:nvSpPr>
-        <p:spPr>
-          <a:xfrm>
-            <a:off x="680319" y="5169583"/>
-            <a:ext cx="9613862" cy="622971"/>
-          </a:xfrm>
-        </p:spPr>
-        <p:txBody>
-          <a:bodyPr/>
-          <a:lstStyle>
-            <a:lvl1pPr marL="0" indent="0">
+            <a:lvl1pPr marL="0" indent="0" algn="ctr">
               <a:buNone/>
               <a:defRPr sz="1600"/>
             </a:lvl1pPr>
             <a:lvl2pPr marL="457200" indent="0">
               <a:buNone/>
-              <a:defRPr sz="1400"/>
+              <a:defRPr sz="1600"/>
             </a:lvl2pPr>
             <a:lvl3pPr marL="914400" indent="0">
               <a:buNone/>
-              <a:defRPr sz="1200"/>
+              <a:defRPr sz="1600"/>
             </a:lvl3pPr>
             <a:lvl4pPr marL="1371600" indent="0">
               <a:buNone/>
-              <a:defRPr sz="1000"/>
+              <a:defRPr sz="1600"/>
             </a:lvl4pPr>
             <a:lvl5pPr marL="1828800" indent="0">
               <a:buNone/>
-              <a:defRPr sz="1000"/>
+              <a:defRPr sz="1600"/>
             </a:lvl5pPr>
             <a:lvl6pPr marL="2286000" indent="0">
               <a:buNone/>
-              <a:defRPr sz="1000"/>
+              <a:defRPr sz="1600"/>
             </a:lvl6pPr>
             <a:lvl7pPr marL="2743200" indent="0">
               <a:buNone/>
-              <a:defRPr sz="1000"/>
+              <a:defRPr sz="1600"/>
             </a:lvl7pPr>
             <a:lvl8pPr marL="3200400" indent="0">
               <a:buNone/>
-              <a:defRPr sz="1000"/>
+              <a:defRPr sz="1600"/>
             </a:lvl8pPr>
             <a:lvl9pPr marL="3657600" indent="0">
               <a:buNone/>
-              <a:defRPr sz="1000"/>
+              <a:defRPr sz="1600"/>
             </a:lvl9pPr>
           </a:lstStyle>
           <a:p>
+            <a:r>
+              <a:rPr lang="en-US"/>
+              <a:t>Click icon to add picture</a:t>
+            </a:r>
+            <a:endParaRPr lang="en-US" dirty="0"/>
+          </a:p>
+        </p:txBody>
+      </p:sp>
+      <p:sp>
+        <p:nvSpPr>
+          <p:cNvPr id="4" name="Text Placeholder 3"/>
+          <p:cNvSpPr>
+            <a:spLocks noGrp="1"/>
+          </p:cNvSpPr>
+          <p:nvPr>
+            <p:ph type="body" sz="half" idx="2"/>
+          </p:nvPr>
+        </p:nvSpPr>
+        <p:spPr>
+          <a:xfrm>
+            <a:off x="1154956" y="5367325"/>
+            <a:ext cx="8825656" cy="493712"/>
+          </a:xfrm>
+        </p:spPr>
+        <p:txBody>
+          <a:bodyPr>
+            <a:normAutofit/>
+          </a:bodyPr>
+          <a:lstStyle>
+            <a:lvl1pPr marL="0" indent="0">
+              <a:buNone/>
+              <a:defRPr sz="1200"/>
+            </a:lvl1pPr>
+            <a:lvl2pPr marL="457200" indent="0">
+              <a:buNone/>
+              <a:defRPr sz="1200"/>
+            </a:lvl2pPr>
+            <a:lvl3pPr marL="914400" indent="0">
+              <a:buNone/>
+              <a:defRPr sz="1000"/>
+            </a:lvl3pPr>
+            <a:lvl4pPr marL="1371600" indent="0">
+              <a:buNone/>
+              <a:defRPr sz="900"/>
+            </a:lvl4pPr>
+            <a:lvl5pPr marL="1828800" indent="0">
+              <a:buNone/>
+              <a:defRPr sz="900"/>
+            </a:lvl5pPr>
+            <a:lvl6pPr marL="2286000" indent="0">
+              <a:buNone/>
+              <a:defRPr sz="900"/>
+            </a:lvl6pPr>
+            <a:lvl7pPr marL="2743200" indent="0">
+              <a:buNone/>
+              <a:defRPr sz="900"/>
+            </a:lvl7pPr>
+            <a:lvl8pPr marL="3200400" indent="0">
+              <a:buNone/>
+              <a:defRPr sz="900"/>
+            </a:lvl8pPr>
+            <a:lvl9pPr marL="3657600" indent="0">
+              <a:buNone/>
+              <a:defRPr sz="900"/>
+            </a:lvl9pPr>
+          </a:lstStyle>
+          <a:p>
             <a:pPr lvl="0"/>
             <a:r>
               <a:rPr lang="en-US"/>
@@ -823,7 +590,7 @@
           <a:p>
             <a:fld id="{62D5F05B-F1CA-41F1-9D15-228D0FEFC4A2}" type="datetimeFigureOut">
               <a:rPr lang="en-US" smtClean="0"/>
-              <a:t>11/4/2025</a:t>
+              <a:t>11/11/2025</a:t>
             </a:fld>
             <a:endParaRPr lang="en-US"/>
           </a:p>
@@ -858,12 +625,7 @@
             <p:ph type="sldNum" sz="quarter" idx="12"/>
           </p:nvPr>
         </p:nvSpPr>
-        <p:spPr>
-          <a:xfrm>
-            <a:off x="10729455" y="4711309"/>
-            <a:ext cx="1154151" cy="1090789"/>
-          </a:xfrm>
-        </p:spPr>
+        <p:spPr/>
         <p:txBody>
           <a:bodyPr/>
           <a:lstStyle/>
@@ -879,7 +641,7 @@
     </p:spTree>
     <p:extLst>
       <p:ext uri="{BB962C8B-B14F-4D97-AF65-F5344CB8AC3E}">
-        <p14:creationId xmlns:p14="http://schemas.microsoft.com/office/powerpoint/2010/main" val="3369883235"/>
+        <p14:creationId xmlns:p14="http://schemas.microsoft.com/office/powerpoint/2010/main" val="3327785068"/>
       </p:ext>
     </p:extLst>
   </p:cSld>
@@ -906,231 +668,94 @@
           <a:chExt cx="0" cy="0"/>
         </a:xfrm>
       </p:grpSpPr>
-      <p:pic>
-        <p:nvPicPr>
-          <p:cNvPr id="8" name="Picture 7" descr="HD-ShadowLong.png"/>
-          <p:cNvPicPr>
-            <a:picLocks noChangeAspect="1"/>
-          </p:cNvPicPr>
-          <p:nvPr/>
-        </p:nvPicPr>
-        <p:blipFill>
-          <a:blip r:embed="rId2">
-            <a:extLst>
-              <a:ext uri="{28A0092B-C50C-407E-A947-70E740481C1C}">
-                <a14:useLocalDpi xmlns:a14="http://schemas.microsoft.com/office/drawing/2010/main" val="0"/>
-              </a:ext>
-            </a:extLst>
-          </a:blip>
-          <a:stretch>
-            <a:fillRect/>
-          </a:stretch>
-        </p:blipFill>
+      <p:sp>
+        <p:nvSpPr>
+          <p:cNvPr id="2" name="Title 1"/>
+          <p:cNvSpPr>
+            <a:spLocks noGrp="1"/>
+          </p:cNvSpPr>
+          <p:nvPr>
+            <p:ph type="title"/>
+          </p:nvPr>
+        </p:nvSpPr>
         <p:spPr>
           <a:xfrm>
-            <a:off x="1" y="5928628"/>
-            <a:ext cx="10437812" cy="321164"/>
+            <a:off x="1154954" y="1447800"/>
+            <a:ext cx="8825659" cy="1981200"/>
           </a:xfrm>
-          <a:prstGeom prst="rect">
-            <a:avLst/>
-          </a:prstGeom>
         </p:spPr>
-      </p:pic>
-      <p:pic>
-        <p:nvPicPr>
-          <p:cNvPr id="9" name="Picture 8" descr="HD-ShadowShort.png"/>
-          <p:cNvPicPr>
-            <a:picLocks noChangeAspect="1"/>
-          </p:cNvPicPr>
-          <p:nvPr/>
-        </p:nvPicPr>
-        <p:blipFill>
-          <a:blip r:embed="rId3">
-            <a:extLst>
-              <a:ext uri="{28A0092B-C50C-407E-A947-70E740481C1C}">
-                <a14:useLocalDpi xmlns:a14="http://schemas.microsoft.com/office/drawing/2010/main" val="0"/>
-              </a:ext>
-            </a:extLst>
-          </a:blip>
-          <a:stretch>
-            <a:fillRect/>
-          </a:stretch>
-        </p:blipFill>
+        <p:txBody>
+          <a:bodyPr/>
+          <a:lstStyle>
+            <a:lvl1pPr>
+              <a:defRPr sz="4800"/>
+            </a:lvl1pPr>
+          </a:lstStyle>
+          <a:p>
+            <a:r>
+              <a:rPr lang="en-US"/>
+              <a:t>Click to edit Master title style</a:t>
+            </a:r>
+            <a:endParaRPr lang="en-US" dirty="0"/>
+          </a:p>
+        </p:txBody>
+      </p:sp>
+      <p:sp>
+        <p:nvSpPr>
+          <p:cNvPr id="8" name="Text Placeholder 3"/>
+          <p:cNvSpPr>
+            <a:spLocks noGrp="1"/>
+          </p:cNvSpPr>
+          <p:nvPr>
+            <p:ph type="body" sz="half" idx="2"/>
+          </p:nvPr>
+        </p:nvSpPr>
         <p:spPr>
           <a:xfrm>
-            <a:off x="10585826" y="5929622"/>
-            <a:ext cx="1602997" cy="144270"/>
-          </a:xfrm>
-          <a:prstGeom prst="rect">
-            <a:avLst/>
-          </a:prstGeom>
-        </p:spPr>
-      </p:pic>
-      <p:sp>
-        <p:nvSpPr>
-          <p:cNvPr id="10" name="Rectangle 9"/>
-          <p:cNvSpPr/>
-          <p:nvPr/>
-        </p:nvSpPr>
-        <p:spPr bwMode="ltGray">
-          <a:xfrm>
-            <a:off x="0" y="4567988"/>
-            <a:ext cx="10437812" cy="1368198"/>
-          </a:xfrm>
-          <a:prstGeom prst="rect">
-            <a:avLst/>
-          </a:prstGeom>
-          <a:solidFill>
-            <a:schemeClr val="bg1">
-              <a:lumMod val="85000"/>
-              <a:lumOff val="15000"/>
-            </a:schemeClr>
-          </a:solidFill>
-          <a:ln>
-            <a:noFill/>
-          </a:ln>
-        </p:spPr>
-        <p:style>
-          <a:lnRef idx="2">
-            <a:schemeClr val="accent1">
-              <a:shade val="50000"/>
-            </a:schemeClr>
-          </a:lnRef>
-          <a:fillRef idx="1">
-            <a:schemeClr val="accent1"/>
-          </a:fillRef>
-          <a:effectRef idx="0">
-            <a:schemeClr val="accent1"/>
-          </a:effectRef>
-          <a:fontRef idx="minor">
-            <a:schemeClr val="lt1"/>
-          </a:fontRef>
-        </p:style>
-      </p:sp>
-      <p:sp>
-        <p:nvSpPr>
-          <p:cNvPr id="11" name="Rectangle 10"/>
-          <p:cNvSpPr/>
-          <p:nvPr/>
-        </p:nvSpPr>
-        <p:spPr>
-          <a:xfrm>
-            <a:off x="10585827" y="4567988"/>
-            <a:ext cx="1602997" cy="1368198"/>
-          </a:xfrm>
-          <a:prstGeom prst="rect">
-            <a:avLst/>
-          </a:prstGeom>
-          <a:solidFill>
-            <a:schemeClr val="accent1"/>
-          </a:solidFill>
-          <a:ln>
-            <a:noFill/>
-          </a:ln>
-        </p:spPr>
-        <p:style>
-          <a:lnRef idx="2">
-            <a:schemeClr val="accent1">
-              <a:shade val="50000"/>
-            </a:schemeClr>
-          </a:lnRef>
-          <a:fillRef idx="1">
-            <a:schemeClr val="accent1"/>
-          </a:fillRef>
-          <a:effectRef idx="0">
-            <a:schemeClr val="accent1"/>
-          </a:effectRef>
-          <a:fontRef idx="minor">
-            <a:schemeClr val="lt1"/>
-          </a:fontRef>
-        </p:style>
-      </p:sp>
-      <p:sp>
-        <p:nvSpPr>
-          <p:cNvPr id="2" name="Title 1"/>
-          <p:cNvSpPr>
-            <a:spLocks noGrp="1"/>
-          </p:cNvSpPr>
-          <p:nvPr>
-            <p:ph type="title"/>
-          </p:nvPr>
-        </p:nvSpPr>
-        <p:spPr>
-          <a:xfrm>
-            <a:off x="680322" y="609597"/>
-            <a:ext cx="9613858" cy="3592750"/>
+            <a:off x="1154954" y="3657600"/>
+            <a:ext cx="8825659" cy="2362200"/>
           </a:xfrm>
         </p:spPr>
         <p:txBody>
-          <a:bodyPr anchor="ctr"/>
-          <a:lstStyle>
-            <a:lvl1pPr>
-              <a:defRPr sz="3200"/>
-            </a:lvl1pPr>
-          </a:lstStyle>
-          <a:p>
-            <a:r>
-              <a:rPr lang="en-US"/>
-              <a:t>Click to edit Master title style</a:t>
-            </a:r>
-            <a:endParaRPr lang="en-US" dirty="0"/>
-          </a:p>
-        </p:txBody>
-      </p:sp>
-      <p:sp>
-        <p:nvSpPr>
-          <p:cNvPr id="4" name="Text Placeholder 3"/>
-          <p:cNvSpPr>
-            <a:spLocks noGrp="1"/>
-          </p:cNvSpPr>
-          <p:nvPr>
-            <p:ph type="body" sz="half" idx="2"/>
-          </p:nvPr>
-        </p:nvSpPr>
-        <p:spPr>
-          <a:xfrm>
-            <a:off x="680322" y="4711615"/>
-            <a:ext cx="9613859" cy="1090789"/>
-          </a:xfrm>
-        </p:spPr>
-        <p:txBody>
-          <a:bodyPr anchor="ctr"/>
+          <a:bodyPr anchor="ctr">
+            <a:normAutofit/>
+          </a:bodyPr>
           <a:lstStyle>
             <a:lvl1pPr marL="0" indent="0">
               <a:buNone/>
-              <a:defRPr sz="1600"/>
+              <a:defRPr sz="1800"/>
             </a:lvl1pPr>
             <a:lvl2pPr marL="457200" indent="0">
               <a:buNone/>
-              <a:defRPr sz="1400"/>
+              <a:defRPr sz="1200"/>
             </a:lvl2pPr>
             <a:lvl3pPr marL="914400" indent="0">
               <a:buNone/>
-              <a:defRPr sz="1200"/>
+              <a:defRPr sz="1000"/>
             </a:lvl3pPr>
             <a:lvl4pPr marL="1371600" indent="0">
               <a:buNone/>
-              <a:defRPr sz="1000"/>
+              <a:defRPr sz="900"/>
             </a:lvl4pPr>
             <a:lvl5pPr marL="1828800" indent="0">
               <a:buNone/>
-              <a:defRPr sz="1000"/>
+              <a:defRPr sz="900"/>
             </a:lvl5pPr>
             <a:lvl6pPr marL="2286000" indent="0">
               <a:buNone/>
-              <a:defRPr sz="1000"/>
+              <a:defRPr sz="900"/>
             </a:lvl6pPr>
             <a:lvl7pPr marL="2743200" indent="0">
               <a:buNone/>
-              <a:defRPr sz="1000"/>
+              <a:defRPr sz="900"/>
             </a:lvl7pPr>
             <a:lvl8pPr marL="3200400" indent="0">
               <a:buNone/>
-              <a:defRPr sz="1000"/>
+              <a:defRPr sz="900"/>
             </a:lvl8pPr>
             <a:lvl9pPr marL="3657600" indent="0">
               <a:buNone/>
-              <a:defRPr sz="1000"/>
+              <a:defRPr sz="900"/>
             </a:lvl9pPr>
           </a:lstStyle>
           <a:p>
@@ -1144,7 +769,7 @@
       </p:sp>
       <p:sp>
         <p:nvSpPr>
-          <p:cNvPr id="5" name="Date Placeholder 4"/>
+          <p:cNvPr id="4" name="Date Placeholder 3"/>
           <p:cNvSpPr>
             <a:spLocks noGrp="1"/>
           </p:cNvSpPr>
@@ -1159,7 +784,7 @@
           <a:p>
             <a:fld id="{62D5F05B-F1CA-41F1-9D15-228D0FEFC4A2}" type="datetimeFigureOut">
               <a:rPr lang="en-US" smtClean="0"/>
-              <a:t>11/4/2025</a:t>
+              <a:t>11/11/2025</a:t>
             </a:fld>
             <a:endParaRPr lang="en-US"/>
           </a:p>
@@ -1167,7 +792,7 @@
       </p:sp>
       <p:sp>
         <p:nvSpPr>
-          <p:cNvPr id="6" name="Footer Placeholder 5"/>
+          <p:cNvPr id="5" name="Footer Placeholder 4"/>
           <p:cNvSpPr>
             <a:spLocks noGrp="1"/>
           </p:cNvSpPr>
@@ -1186,7 +811,7 @@
       </p:sp>
       <p:sp>
         <p:nvSpPr>
-          <p:cNvPr id="7" name="Slide Number Placeholder 6"/>
+          <p:cNvPr id="6" name="Slide Number Placeholder 5"/>
           <p:cNvSpPr>
             <a:spLocks noGrp="1"/>
           </p:cNvSpPr>
@@ -1194,12 +819,7 @@
             <p:ph type="sldNum" sz="quarter" idx="12"/>
           </p:nvPr>
         </p:nvSpPr>
-        <p:spPr>
-          <a:xfrm>
-            <a:off x="10729455" y="4711615"/>
-            <a:ext cx="1154151" cy="1090789"/>
-          </a:xfrm>
-        </p:spPr>
+        <p:spPr/>
         <p:txBody>
           <a:bodyPr/>
           <a:lstStyle/>
@@ -1215,7 +835,7 @@
     </p:spTree>
     <p:extLst>
       <p:ext uri="{BB962C8B-B14F-4D97-AF65-F5344CB8AC3E}">
-        <p14:creationId xmlns:p14="http://schemas.microsoft.com/office/powerpoint/2010/main" val="4046344723"/>
+        <p14:creationId xmlns:p14="http://schemas.microsoft.com/office/powerpoint/2010/main" val="339248398"/>
       </p:ext>
     </p:extLst>
   </p:cSld>
@@ -1242,237 +862,110 @@
           <a:chExt cx="0" cy="0"/>
         </a:xfrm>
       </p:grpSpPr>
-      <p:pic>
-        <p:nvPicPr>
-          <p:cNvPr id="11" name="Picture 10" descr="HD-ShadowLong.png"/>
-          <p:cNvPicPr>
-            <a:picLocks noChangeAspect="1"/>
-          </p:cNvPicPr>
-          <p:nvPr/>
-        </p:nvPicPr>
-        <p:blipFill>
-          <a:blip r:embed="rId2">
-            <a:extLst>
-              <a:ext uri="{28A0092B-C50C-407E-A947-70E740481C1C}">
-                <a14:useLocalDpi xmlns:a14="http://schemas.microsoft.com/office/drawing/2010/main" val="0"/>
-              </a:ext>
-            </a:extLst>
-          </a:blip>
-          <a:stretch>
-            <a:fillRect/>
-          </a:stretch>
-        </p:blipFill>
+      <p:sp>
+        <p:nvSpPr>
+          <p:cNvPr id="2" name="Title 1"/>
+          <p:cNvSpPr>
+            <a:spLocks noGrp="1"/>
+          </p:cNvSpPr>
+          <p:nvPr>
+            <p:ph type="title"/>
+          </p:nvPr>
+        </p:nvSpPr>
         <p:spPr>
           <a:xfrm>
-            <a:off x="1" y="5928628"/>
-            <a:ext cx="10437812" cy="321164"/>
+            <a:off x="1574801" y="1447800"/>
+            <a:ext cx="7999315" cy="2323374"/>
           </a:xfrm>
-          <a:prstGeom prst="rect">
-            <a:avLst/>
-          </a:prstGeom>
         </p:spPr>
-      </p:pic>
-      <p:pic>
-        <p:nvPicPr>
-          <p:cNvPr id="13" name="Picture 12" descr="HD-ShadowShort.png"/>
-          <p:cNvPicPr>
-            <a:picLocks noChangeAspect="1"/>
-          </p:cNvPicPr>
-          <p:nvPr/>
-        </p:nvPicPr>
-        <p:blipFill>
-          <a:blip r:embed="rId3">
-            <a:extLst>
-              <a:ext uri="{28A0092B-C50C-407E-A947-70E740481C1C}">
-                <a14:useLocalDpi xmlns:a14="http://schemas.microsoft.com/office/drawing/2010/main" val="0"/>
-              </a:ext>
-            </a:extLst>
-          </a:blip>
-          <a:stretch>
-            <a:fillRect/>
-          </a:stretch>
-        </p:blipFill>
+        <p:txBody>
+          <a:bodyPr/>
+          <a:lstStyle>
+            <a:lvl1pPr>
+              <a:defRPr sz="4800"/>
+            </a:lvl1pPr>
+          </a:lstStyle>
+          <a:p>
+            <a:r>
+              <a:rPr lang="en-US"/>
+              <a:t>Click to edit Master title style</a:t>
+            </a:r>
+            <a:endParaRPr lang="en-US" dirty="0"/>
+          </a:p>
+        </p:txBody>
+      </p:sp>
+      <p:sp>
+        <p:nvSpPr>
+          <p:cNvPr id="11" name="Text Placeholder 3"/>
+          <p:cNvSpPr>
+            <a:spLocks noGrp="1"/>
+          </p:cNvSpPr>
+          <p:nvPr>
+            <p:ph type="body" sz="half" idx="14"/>
+          </p:nvPr>
+        </p:nvSpPr>
         <p:spPr>
           <a:xfrm>
-            <a:off x="10585826" y="5929622"/>
-            <a:ext cx="1602997" cy="144270"/>
-          </a:xfrm>
-          <a:prstGeom prst="rect">
-            <a:avLst/>
-          </a:prstGeom>
-        </p:spPr>
-      </p:pic>
-      <p:sp>
-        <p:nvSpPr>
-          <p:cNvPr id="14" name="Rectangle 13"/>
-          <p:cNvSpPr/>
-          <p:nvPr/>
-        </p:nvSpPr>
-        <p:spPr bwMode="ltGray">
-          <a:xfrm>
-            <a:off x="0" y="4567988"/>
-            <a:ext cx="10437812" cy="1368198"/>
-          </a:xfrm>
-          <a:prstGeom prst="rect">
-            <a:avLst/>
-          </a:prstGeom>
-          <a:solidFill>
-            <a:schemeClr val="bg1">
-              <a:lumMod val="85000"/>
-              <a:lumOff val="15000"/>
-            </a:schemeClr>
-          </a:solidFill>
-          <a:ln>
-            <a:noFill/>
-          </a:ln>
-        </p:spPr>
-        <p:style>
-          <a:lnRef idx="2">
-            <a:schemeClr val="accent1">
-              <a:shade val="50000"/>
-            </a:schemeClr>
-          </a:lnRef>
-          <a:fillRef idx="1">
-            <a:schemeClr val="accent1"/>
-          </a:fillRef>
-          <a:effectRef idx="0">
-            <a:schemeClr val="accent1"/>
-          </a:effectRef>
-          <a:fontRef idx="minor">
-            <a:schemeClr val="lt1"/>
-          </a:fontRef>
-        </p:style>
-      </p:sp>
-      <p:sp>
-        <p:nvSpPr>
-          <p:cNvPr id="15" name="Rectangle 14"/>
-          <p:cNvSpPr/>
-          <p:nvPr/>
-        </p:nvSpPr>
-        <p:spPr>
-          <a:xfrm>
-            <a:off x="10585827" y="4567988"/>
-            <a:ext cx="1602997" cy="1368198"/>
-          </a:xfrm>
-          <a:prstGeom prst="rect">
-            <a:avLst/>
-          </a:prstGeom>
-          <a:solidFill>
-            <a:schemeClr val="accent1"/>
-          </a:solidFill>
-          <a:ln>
-            <a:noFill/>
-          </a:ln>
-        </p:spPr>
-        <p:style>
-          <a:lnRef idx="2">
-            <a:schemeClr val="accent1">
-              <a:shade val="50000"/>
-            </a:schemeClr>
-          </a:lnRef>
-          <a:fillRef idx="1">
-            <a:schemeClr val="accent1"/>
-          </a:fillRef>
-          <a:effectRef idx="0">
-            <a:schemeClr val="accent1"/>
-          </a:effectRef>
-          <a:fontRef idx="minor">
-            <a:schemeClr val="lt1"/>
-          </a:fontRef>
-        </p:style>
-      </p:sp>
-      <p:sp>
-        <p:nvSpPr>
-          <p:cNvPr id="2" name="Title 1"/>
-          <p:cNvSpPr>
-            <a:spLocks noGrp="1"/>
-          </p:cNvSpPr>
-          <p:nvPr>
-            <p:ph type="title"/>
-          </p:nvPr>
-        </p:nvSpPr>
-        <p:spPr>
-          <a:xfrm>
-            <a:off x="1127856" y="609598"/>
-            <a:ext cx="8718877" cy="3036061"/>
+            <a:off x="1930400" y="3771174"/>
+            <a:ext cx="7279649" cy="342174"/>
           </a:xfrm>
         </p:spPr>
         <p:txBody>
-          <a:bodyPr anchor="ctr"/>
-          <a:lstStyle>
-            <a:lvl1pPr>
-              <a:defRPr sz="3200"/>
-            </a:lvl1pPr>
-          </a:lstStyle>
-          <a:p>
-            <a:r>
-              <a:rPr lang="en-US"/>
-              <a:t>Click to edit Master title style</a:t>
-            </a:r>
-            <a:endParaRPr lang="en-US" dirty="0"/>
-          </a:p>
-        </p:txBody>
-      </p:sp>
-      <p:sp>
-        <p:nvSpPr>
-          <p:cNvPr id="12" name="Text Placeholder 3"/>
-          <p:cNvSpPr>
-            <a:spLocks noGrp="1"/>
-          </p:cNvSpPr>
-          <p:nvPr>
-            <p:ph type="body" sz="half" idx="13"/>
-          </p:nvPr>
-        </p:nvSpPr>
-        <p:spPr>
-          <a:xfrm>
-            <a:off x="1402288" y="3653379"/>
-            <a:ext cx="8156579" cy="548968"/>
-          </a:xfrm>
-        </p:spPr>
-        <p:txBody>
-          <a:bodyPr anchor="t">
+          <a:bodyPr vert="horz" lIns="91440" tIns="45720" rIns="91440" bIns="45720" rtlCol="0" anchor="t">
             <a:normAutofit/>
           </a:bodyPr>
           <a:lstStyle>
             <a:lvl1pPr marL="0" indent="0">
               <a:buNone/>
-              <a:defRPr sz="1400"/>
+              <a:defRPr lang="en-US" sz="1400" b="0" i="0" kern="1200" cap="small" dirty="0">
+                <a:solidFill>
+                  <a:schemeClr val="bg2">
+                    <a:lumMod val="40000"/>
+                    <a:lumOff val="60000"/>
+                  </a:schemeClr>
+                </a:solidFill>
+                <a:latin typeface="+mj-lt"/>
+                <a:ea typeface="+mj-ea"/>
+                <a:cs typeface="+mj-cs"/>
+              </a:defRPr>
             </a:lvl1pPr>
             <a:lvl2pPr marL="457200" indent="0">
               <a:buNone/>
-              <a:defRPr sz="1400"/>
+              <a:defRPr sz="1200"/>
             </a:lvl2pPr>
             <a:lvl3pPr marL="914400" indent="0">
               <a:buNone/>
-              <a:defRPr sz="1200"/>
+              <a:defRPr sz="1000"/>
             </a:lvl3pPr>
             <a:lvl4pPr marL="1371600" indent="0">
               <a:buNone/>
-              <a:defRPr sz="1000"/>
+              <a:defRPr sz="900"/>
             </a:lvl4pPr>
             <a:lvl5pPr marL="1828800" indent="0">
               <a:buNone/>
-              <a:defRPr sz="1000"/>
+              <a:defRPr sz="900"/>
             </a:lvl5pPr>
             <a:lvl6pPr marL="2286000" indent="0">
               <a:buNone/>
-              <a:defRPr sz="1000"/>
+              <a:defRPr sz="900"/>
             </a:lvl6pPr>
             <a:lvl7pPr marL="2743200" indent="0">
               <a:buNone/>
-              <a:defRPr sz="1000"/>
+              <a:defRPr sz="900"/>
             </a:lvl7pPr>
             <a:lvl8pPr marL="3200400" indent="0">
               <a:buNone/>
-              <a:defRPr sz="1000"/>
+              <a:defRPr sz="900"/>
             </a:lvl8pPr>
             <a:lvl9pPr marL="3657600" indent="0">
               <a:buNone/>
-              <a:defRPr sz="1000"/>
+              <a:defRPr sz="900"/>
             </a:lvl9pPr>
           </a:lstStyle>
           <a:p>
-            <a:pPr lvl="0"/>
+            <a:pPr marL="0" lvl="0" indent="0">
+              <a:buNone/>
+            </a:pPr>
             <a:r>
               <a:rPr lang="en-US"/>
               <a:t>Click to edit Master text styles</a:t>
@@ -1482,7 +975,7 @@
       </p:sp>
       <p:sp>
         <p:nvSpPr>
-          <p:cNvPr id="4" name="Text Placeholder 3"/>
+          <p:cNvPr id="10" name="Text Placeholder 3"/>
           <p:cNvSpPr>
             <a:spLocks noGrp="1"/>
           </p:cNvSpPr>
@@ -1492,8 +985,8 @@
         </p:nvSpPr>
         <p:spPr>
           <a:xfrm>
-            <a:off x="680322" y="4711615"/>
-            <a:ext cx="9613859" cy="1090789"/>
+            <a:off x="1154954" y="4350657"/>
+            <a:ext cx="8825659" cy="1676400"/>
           </a:xfrm>
         </p:spPr>
         <p:txBody>
@@ -1503,39 +996,39 @@
           <a:lstStyle>
             <a:lvl1pPr marL="0" indent="0">
               <a:buNone/>
-              <a:defRPr sz="1600"/>
+              <a:defRPr sz="1800"/>
             </a:lvl1pPr>
             <a:lvl2pPr marL="457200" indent="0">
               <a:buNone/>
-              <a:defRPr sz="1400"/>
+              <a:defRPr sz="1200"/>
             </a:lvl2pPr>
             <a:lvl3pPr marL="914400" indent="0">
               <a:buNone/>
-              <a:defRPr sz="1200"/>
+              <a:defRPr sz="1000"/>
             </a:lvl3pPr>
             <a:lvl4pPr marL="1371600" indent="0">
               <a:buNone/>
-              <a:defRPr sz="1000"/>
+              <a:defRPr sz="900"/>
             </a:lvl4pPr>
             <a:lvl5pPr marL="1828800" indent="0">
               <a:buNone/>
-              <a:defRPr sz="1000"/>
+              <a:defRPr sz="900"/>
             </a:lvl5pPr>
             <a:lvl6pPr marL="2286000" indent="0">
               <a:buNone/>
-              <a:defRPr sz="1000"/>
+              <a:defRPr sz="900"/>
             </a:lvl6pPr>
             <a:lvl7pPr marL="2743200" indent="0">
               <a:buNone/>
-              <a:defRPr sz="1000"/>
+              <a:defRPr sz="900"/>
             </a:lvl7pPr>
             <a:lvl8pPr marL="3200400" indent="0">
               <a:buNone/>
-              <a:defRPr sz="1000"/>
+              <a:defRPr sz="900"/>
             </a:lvl8pPr>
             <a:lvl9pPr marL="3657600" indent="0">
               <a:buNone/>
-              <a:defRPr sz="1000"/>
+              <a:defRPr sz="900"/>
             </a:lvl9pPr>
           </a:lstStyle>
           <a:p>
@@ -1549,7 +1042,7 @@
       </p:sp>
       <p:sp>
         <p:nvSpPr>
-          <p:cNvPr id="5" name="Date Placeholder 4"/>
+          <p:cNvPr id="4" name="Date Placeholder 3"/>
           <p:cNvSpPr>
             <a:spLocks noGrp="1"/>
           </p:cNvSpPr>
@@ -1564,7 +1057,7 @@
           <a:p>
             <a:fld id="{62D5F05B-F1CA-41F1-9D15-228D0FEFC4A2}" type="datetimeFigureOut">
               <a:rPr lang="en-US" smtClean="0"/>
-              <a:t>11/4/2025</a:t>
+              <a:t>11/11/2025</a:t>
             </a:fld>
             <a:endParaRPr lang="en-US"/>
           </a:p>
@@ -1572,7 +1065,7 @@
       </p:sp>
       <p:sp>
         <p:nvSpPr>
-          <p:cNvPr id="6" name="Footer Placeholder 5"/>
+          <p:cNvPr id="5" name="Footer Placeholder 4"/>
           <p:cNvSpPr>
             <a:spLocks noGrp="1"/>
           </p:cNvSpPr>
@@ -1591,7 +1084,7 @@
       </p:sp>
       <p:sp>
         <p:nvSpPr>
-          <p:cNvPr id="7" name="Slide Number Placeholder 6"/>
+          <p:cNvPr id="6" name="Slide Number Placeholder 5"/>
           <p:cNvSpPr>
             <a:spLocks noGrp="1"/>
           </p:cNvSpPr>
@@ -1599,12 +1092,7 @@
             <p:ph type="sldNum" sz="quarter" idx="12"/>
           </p:nvPr>
         </p:nvSpPr>
-        <p:spPr>
-          <a:xfrm>
-            <a:off x="10729455" y="4709925"/>
-            <a:ext cx="1154151" cy="1090789"/>
-          </a:xfrm>
-        </p:spPr>
+        <p:spPr/>
         <p:txBody>
           <a:bodyPr/>
           <a:lstStyle/>
@@ -1619,115 +1107,46 @@
       </p:sp>
       <p:sp>
         <p:nvSpPr>
-          <p:cNvPr id="16" name="TextBox 15"/>
+          <p:cNvPr id="12" name="TextBox 11"/>
           <p:cNvSpPr txBox="1"/>
           <p:nvPr/>
         </p:nvSpPr>
         <p:spPr>
           <a:xfrm>
-            <a:off x="583572" y="748116"/>
-            <a:ext cx="609600" cy="584776"/>
+            <a:off x="898295" y="971253"/>
+            <a:ext cx="801912" cy="1969770"/>
           </a:xfrm>
           <a:prstGeom prst="rect">
             <a:avLst/>
           </a:prstGeom>
+          <a:noFill/>
         </p:spPr>
         <p:txBody>
-          <a:bodyPr vert="horz" lIns="91440" tIns="45720" rIns="91440" bIns="45720" rtlCol="0" anchor="ctr">
-            <a:noAutofit/>
+          <a:bodyPr wrap="square" rtlCol="0">
+            <a:spAutoFit/>
           </a:bodyPr>
           <a:lstStyle>
-            <a:lvl1pPr>
-              <a:spcBef>
-                <a:spcPct val="0"/>
-              </a:spcBef>
-              <a:buNone/>
-              <a:defRPr sz="3200" b="0" cap="all">
-                <a:ln w="3175" cmpd="sng">
-                  <a:noFill/>
-                </a:ln>
-                <a:effectLst>
-                  <a:glow rad="38100">
-                    <a:schemeClr val="bg1">
-                      <a:lumMod val="65000"/>
-                      <a:lumOff val="35000"/>
-                      <a:alpha val="40000"/>
-                    </a:schemeClr>
-                  </a:glow>
-                  <a:outerShdw blurRad="28575" dist="38100" dir="14040000" algn="tl" rotWithShape="0">
-                    <a:srgbClr val="000000">
-                      <a:alpha val="25000"/>
-                    </a:srgbClr>
-                  </a:outerShdw>
-                </a:effectLst>
+            <a:defPPr>
+              <a:defRPr lang="en-US"/>
+            </a:defPPr>
+            <a:lvl1pPr algn="r">
+              <a:defRPr sz="12200" b="0" i="0">
+                <a:solidFill>
+                  <a:schemeClr val="bg2">
+                    <a:lumMod val="40000"/>
+                    <a:lumOff val="60000"/>
+                  </a:schemeClr>
+                </a:solidFill>
+                <a:latin typeface="Arial"/>
+                <a:ea typeface="+mj-ea"/>
+                <a:cs typeface="+mj-cs"/>
               </a:defRPr>
             </a:lvl1pPr>
-            <a:lvl2pPr>
-              <a:defRPr>
-                <a:solidFill>
-                  <a:schemeClr val="tx2"/>
-                </a:solidFill>
-              </a:defRPr>
-            </a:lvl2pPr>
-            <a:lvl3pPr>
-              <a:defRPr>
-                <a:solidFill>
-                  <a:schemeClr val="tx2"/>
-                </a:solidFill>
-              </a:defRPr>
-            </a:lvl3pPr>
-            <a:lvl4pPr>
-              <a:defRPr>
-                <a:solidFill>
-                  <a:schemeClr val="tx2"/>
-                </a:solidFill>
-              </a:defRPr>
-            </a:lvl4pPr>
-            <a:lvl5pPr>
-              <a:defRPr>
-                <a:solidFill>
-                  <a:schemeClr val="tx2"/>
-                </a:solidFill>
-              </a:defRPr>
-            </a:lvl5pPr>
-            <a:lvl6pPr>
-              <a:defRPr>
-                <a:solidFill>
-                  <a:schemeClr val="tx2"/>
-                </a:solidFill>
-              </a:defRPr>
-            </a:lvl6pPr>
-            <a:lvl7pPr>
-              <a:defRPr>
-                <a:solidFill>
-                  <a:schemeClr val="tx2"/>
-                </a:solidFill>
-              </a:defRPr>
-            </a:lvl7pPr>
-            <a:lvl8pPr>
-              <a:defRPr>
-                <a:solidFill>
-                  <a:schemeClr val="tx2"/>
-                </a:solidFill>
-              </a:defRPr>
-            </a:lvl8pPr>
-            <a:lvl9pPr>
-              <a:defRPr>
-                <a:solidFill>
-                  <a:schemeClr val="tx2"/>
-                </a:solidFill>
-              </a:defRPr>
-            </a:lvl9pPr>
           </a:lstStyle>
           <a:p>
             <a:pPr lvl="0"/>
             <a:r>
-              <a:rPr lang="en-US" sz="7200" dirty="0">
-                <a:solidFill>
-                  <a:schemeClr val="tx1"/>
-                </a:solidFill>
-                <a:effectLst/>
-              </a:rPr>
+              <a:rPr lang="en-US" dirty="0"/>
               <a:t>“</a:t>
             </a:r>
           </a:p>
@@ -1735,115 +1154,46 @@
       </p:sp>
       <p:sp>
         <p:nvSpPr>
-          <p:cNvPr id="17" name="TextBox 16"/>
+          <p:cNvPr id="15" name="TextBox 14"/>
           <p:cNvSpPr txBox="1"/>
           <p:nvPr/>
         </p:nvSpPr>
         <p:spPr>
           <a:xfrm>
-            <a:off x="9662809" y="3033524"/>
-            <a:ext cx="609600" cy="584776"/>
+            <a:off x="9330490" y="2613787"/>
+            <a:ext cx="801912" cy="1969770"/>
           </a:xfrm>
           <a:prstGeom prst="rect">
             <a:avLst/>
           </a:prstGeom>
+          <a:noFill/>
         </p:spPr>
         <p:txBody>
-          <a:bodyPr vert="horz" lIns="91440" tIns="45720" rIns="91440" bIns="45720" rtlCol="0" anchor="ctr">
-            <a:noAutofit/>
+          <a:bodyPr wrap="square" rtlCol="0">
+            <a:spAutoFit/>
           </a:bodyPr>
           <a:lstStyle>
-            <a:lvl1pPr>
-              <a:spcBef>
-                <a:spcPct val="0"/>
-              </a:spcBef>
-              <a:buNone/>
-              <a:defRPr sz="3200" b="0" cap="all">
-                <a:ln w="3175" cmpd="sng">
-                  <a:noFill/>
-                </a:ln>
-                <a:effectLst>
-                  <a:glow rad="38100">
-                    <a:schemeClr val="bg1">
-                      <a:lumMod val="65000"/>
-                      <a:lumOff val="35000"/>
-                      <a:alpha val="40000"/>
-                    </a:schemeClr>
-                  </a:glow>
-                  <a:outerShdw blurRad="28575" dist="38100" dir="14040000" algn="tl" rotWithShape="0">
-                    <a:srgbClr val="000000">
-                      <a:alpha val="25000"/>
-                    </a:srgbClr>
-                  </a:outerShdw>
-                </a:effectLst>
+            <a:defPPr>
+              <a:defRPr lang="en-US"/>
+            </a:defPPr>
+            <a:lvl1pPr algn="r">
+              <a:defRPr sz="12200" b="0" i="0">
+                <a:solidFill>
+                  <a:schemeClr val="bg2">
+                    <a:lumMod val="40000"/>
+                    <a:lumOff val="60000"/>
+                  </a:schemeClr>
+                </a:solidFill>
+                <a:latin typeface="Arial"/>
+                <a:ea typeface="+mj-ea"/>
+                <a:cs typeface="+mj-cs"/>
               </a:defRPr>
             </a:lvl1pPr>
-            <a:lvl2pPr>
-              <a:defRPr>
-                <a:solidFill>
-                  <a:schemeClr val="tx2"/>
-                </a:solidFill>
-              </a:defRPr>
-            </a:lvl2pPr>
-            <a:lvl3pPr>
-              <a:defRPr>
-                <a:solidFill>
-                  <a:schemeClr val="tx2"/>
-                </a:solidFill>
-              </a:defRPr>
-            </a:lvl3pPr>
-            <a:lvl4pPr>
-              <a:defRPr>
-                <a:solidFill>
-                  <a:schemeClr val="tx2"/>
-                </a:solidFill>
-              </a:defRPr>
-            </a:lvl4pPr>
-            <a:lvl5pPr>
-              <a:defRPr>
-                <a:solidFill>
-                  <a:schemeClr val="tx2"/>
-                </a:solidFill>
-              </a:defRPr>
-            </a:lvl5pPr>
-            <a:lvl6pPr>
-              <a:defRPr>
-                <a:solidFill>
-                  <a:schemeClr val="tx2"/>
-                </a:solidFill>
-              </a:defRPr>
-            </a:lvl6pPr>
-            <a:lvl7pPr>
-              <a:defRPr>
-                <a:solidFill>
-                  <a:schemeClr val="tx2"/>
-                </a:solidFill>
-              </a:defRPr>
-            </a:lvl7pPr>
-            <a:lvl8pPr>
-              <a:defRPr>
-                <a:solidFill>
-                  <a:schemeClr val="tx2"/>
-                </a:solidFill>
-              </a:defRPr>
-            </a:lvl8pPr>
-            <a:lvl9pPr>
-              <a:defRPr>
-                <a:solidFill>
-                  <a:schemeClr val="tx2"/>
-                </a:solidFill>
-              </a:defRPr>
-            </a:lvl9pPr>
           </a:lstStyle>
           <a:p>
-            <a:pPr lvl="0" algn="r"/>
-            <a:r>
-              <a:rPr lang="en-US" sz="7200" dirty="0">
-                <a:solidFill>
-                  <a:schemeClr val="tx1"/>
-                </a:solidFill>
-                <a:effectLst/>
-              </a:rPr>
+            <a:pPr lvl="0"/>
+            <a:r>
+              <a:rPr lang="en-US" dirty="0"/>
               <a:t>”</a:t>
             </a:r>
           </a:p>
@@ -1852,7 +1202,7 @@
     </p:spTree>
     <p:extLst>
       <p:ext uri="{BB962C8B-B14F-4D97-AF65-F5344CB8AC3E}">
-        <p14:creationId xmlns:p14="http://schemas.microsoft.com/office/powerpoint/2010/main" val="1704744217"/>
+        <p14:creationId xmlns:p14="http://schemas.microsoft.com/office/powerpoint/2010/main" val="1251313584"/>
       </p:ext>
     </p:extLst>
   </p:cSld>
@@ -1879,231 +1229,147 @@
           <a:chExt cx="0" cy="0"/>
         </a:xfrm>
       </p:grpSpPr>
-      <p:pic>
-        <p:nvPicPr>
-          <p:cNvPr id="9" name="Picture 8" descr="HD-ShadowLong.png"/>
-          <p:cNvPicPr>
-            <a:picLocks noChangeAspect="1"/>
-          </p:cNvPicPr>
-          <p:nvPr/>
-        </p:nvPicPr>
-        <p:blipFill>
-          <a:blip r:embed="rId2">
-            <a:extLst>
-              <a:ext uri="{28A0092B-C50C-407E-A947-70E740481C1C}">
-                <a14:useLocalDpi xmlns:a14="http://schemas.microsoft.com/office/drawing/2010/main" val="0"/>
-              </a:ext>
-            </a:extLst>
-          </a:blip>
-          <a:stretch>
-            <a:fillRect/>
-          </a:stretch>
-        </p:blipFill>
+      <p:sp>
+        <p:nvSpPr>
+          <p:cNvPr id="2" name="Title 1"/>
+          <p:cNvSpPr>
+            <a:spLocks noGrp="1"/>
+          </p:cNvSpPr>
+          <p:nvPr>
+            <p:ph type="title"/>
+          </p:nvPr>
+        </p:nvSpPr>
         <p:spPr>
           <a:xfrm>
-            <a:off x="1" y="5928628"/>
-            <a:ext cx="10437812" cy="321164"/>
+            <a:off x="1154954" y="3124201"/>
+            <a:ext cx="8825660" cy="1653180"/>
           </a:xfrm>
-          <a:prstGeom prst="rect">
-            <a:avLst/>
-          </a:prstGeom>
         </p:spPr>
-      </p:pic>
-      <p:pic>
-        <p:nvPicPr>
-          <p:cNvPr id="10" name="Picture 9" descr="HD-ShadowShort.png"/>
-          <p:cNvPicPr>
-            <a:picLocks noChangeAspect="1"/>
-          </p:cNvPicPr>
-          <p:nvPr/>
-        </p:nvPicPr>
-        <p:blipFill>
-          <a:blip r:embed="rId3">
-            <a:extLst>
-              <a:ext uri="{28A0092B-C50C-407E-A947-70E740481C1C}">
-                <a14:useLocalDpi xmlns:a14="http://schemas.microsoft.com/office/drawing/2010/main" val="0"/>
-              </a:ext>
-            </a:extLst>
-          </a:blip>
-          <a:stretch>
-            <a:fillRect/>
-          </a:stretch>
-        </p:blipFill>
+        <p:txBody>
+          <a:bodyPr anchor="b"/>
+          <a:lstStyle>
+            <a:lvl1pPr algn="l">
+              <a:defRPr sz="4000" b="0" cap="none"/>
+            </a:lvl1pPr>
+          </a:lstStyle>
+          <a:p>
+            <a:r>
+              <a:rPr lang="en-US"/>
+              <a:t>Click to edit Master title style</a:t>
+            </a:r>
+            <a:endParaRPr lang="en-US" dirty="0"/>
+          </a:p>
+        </p:txBody>
+      </p:sp>
+      <p:sp>
+        <p:nvSpPr>
+          <p:cNvPr id="3" name="Text Placeholder 2"/>
+          <p:cNvSpPr>
+            <a:spLocks noGrp="1"/>
+          </p:cNvSpPr>
+          <p:nvPr>
+            <p:ph type="body" idx="1"/>
+          </p:nvPr>
+        </p:nvSpPr>
         <p:spPr>
           <a:xfrm>
-            <a:off x="10585826" y="5929622"/>
-            <a:ext cx="1602997" cy="144270"/>
-          </a:xfrm>
-          <a:prstGeom prst="rect">
-            <a:avLst/>
-          </a:prstGeom>
-        </p:spPr>
-      </p:pic>
-      <p:sp>
-        <p:nvSpPr>
-          <p:cNvPr id="11" name="Rectangle 10"/>
-          <p:cNvSpPr/>
-          <p:nvPr/>
-        </p:nvSpPr>
-        <p:spPr bwMode="ltGray">
-          <a:xfrm>
-            <a:off x="0" y="4567988"/>
-            <a:ext cx="10437812" cy="1368198"/>
-          </a:xfrm>
-          <a:prstGeom prst="rect">
-            <a:avLst/>
-          </a:prstGeom>
-          <a:solidFill>
-            <a:schemeClr val="bg1">
-              <a:lumMod val="85000"/>
-              <a:lumOff val="15000"/>
-            </a:schemeClr>
-          </a:solidFill>
-          <a:ln>
-            <a:noFill/>
-          </a:ln>
-        </p:spPr>
-        <p:style>
-          <a:lnRef idx="2">
-            <a:schemeClr val="accent1">
-              <a:shade val="50000"/>
-            </a:schemeClr>
-          </a:lnRef>
-          <a:fillRef idx="1">
-            <a:schemeClr val="accent1"/>
-          </a:fillRef>
-          <a:effectRef idx="0">
-            <a:schemeClr val="accent1"/>
-          </a:effectRef>
-          <a:fontRef idx="minor">
-            <a:schemeClr val="lt1"/>
-          </a:fontRef>
-        </p:style>
-      </p:sp>
-      <p:sp>
-        <p:nvSpPr>
-          <p:cNvPr id="12" name="Rectangle 11"/>
-          <p:cNvSpPr/>
-          <p:nvPr/>
-        </p:nvSpPr>
-        <p:spPr>
-          <a:xfrm>
-            <a:off x="10585827" y="4567988"/>
-            <a:ext cx="1602997" cy="1368198"/>
-          </a:xfrm>
-          <a:prstGeom prst="rect">
-            <a:avLst/>
-          </a:prstGeom>
-          <a:solidFill>
-            <a:schemeClr val="accent1"/>
-          </a:solidFill>
-          <a:ln>
-            <a:noFill/>
-          </a:ln>
-        </p:spPr>
-        <p:style>
-          <a:lnRef idx="2">
-            <a:schemeClr val="accent1">
-              <a:shade val="50000"/>
-            </a:schemeClr>
-          </a:lnRef>
-          <a:fillRef idx="1">
-            <a:schemeClr val="accent1"/>
-          </a:fillRef>
-          <a:effectRef idx="0">
-            <a:schemeClr val="accent1"/>
-          </a:effectRef>
-          <a:fontRef idx="minor">
-            <a:schemeClr val="lt1"/>
-          </a:fontRef>
-        </p:style>
-      </p:sp>
-      <p:sp>
-        <p:nvSpPr>
-          <p:cNvPr id="2" name="Title 1"/>
-          <p:cNvSpPr>
-            <a:spLocks noGrp="1"/>
-          </p:cNvSpPr>
-          <p:nvPr>
-            <p:ph type="title"/>
-          </p:nvPr>
-        </p:nvSpPr>
-        <p:spPr>
-          <a:xfrm>
-            <a:off x="680319" y="4711615"/>
-            <a:ext cx="9613862" cy="588535"/>
+            <a:off x="1154954" y="4777381"/>
+            <a:ext cx="8825659" cy="860400"/>
           </a:xfrm>
         </p:spPr>
         <p:txBody>
-          <a:bodyPr anchor="b"/>
-          <a:lstStyle>
-            <a:lvl1pPr>
-              <a:defRPr sz="3200"/>
-            </a:lvl1pPr>
-          </a:lstStyle>
-          <a:p>
-            <a:r>
-              <a:rPr lang="en-US"/>
-              <a:t>Click to edit Master title style</a:t>
-            </a:r>
-            <a:endParaRPr lang="en-US" dirty="0"/>
-          </a:p>
-        </p:txBody>
-      </p:sp>
-      <p:sp>
-        <p:nvSpPr>
-          <p:cNvPr id="4" name="Text Placeholder 3"/>
-          <p:cNvSpPr>
-            <a:spLocks noGrp="1"/>
-          </p:cNvSpPr>
-          <p:nvPr>
-            <p:ph type="body" sz="half" idx="2"/>
-          </p:nvPr>
-        </p:nvSpPr>
-        <p:spPr>
-          <a:xfrm>
-            <a:off x="680320" y="5300149"/>
-            <a:ext cx="9613862" cy="502255"/>
-          </a:xfrm>
-        </p:spPr>
-        <p:txBody>
           <a:bodyPr anchor="t"/>
           <a:lstStyle>
-            <a:lvl1pPr marL="0" indent="0">
-              <a:buNone/>
-              <a:defRPr sz="1600"/>
+            <a:lvl1pPr marL="0" indent="0" algn="l">
+              <a:buNone/>
+              <a:defRPr sz="2000" cap="none">
+                <a:solidFill>
+                  <a:schemeClr val="bg2">
+                    <a:lumMod val="40000"/>
+                    <a:lumOff val="60000"/>
+                  </a:schemeClr>
+                </a:solidFill>
+              </a:defRPr>
             </a:lvl1pPr>
             <a:lvl2pPr marL="457200" indent="0">
               <a:buNone/>
-              <a:defRPr sz="1400"/>
+              <a:defRPr sz="1800">
+                <a:solidFill>
+                  <a:schemeClr val="tx1">
+                    <a:tint val="75000"/>
+                  </a:schemeClr>
+                </a:solidFill>
+              </a:defRPr>
             </a:lvl2pPr>
             <a:lvl3pPr marL="914400" indent="0">
               <a:buNone/>
-              <a:defRPr sz="1200"/>
+              <a:defRPr sz="1600">
+                <a:solidFill>
+                  <a:schemeClr val="tx1">
+                    <a:tint val="75000"/>
+                  </a:schemeClr>
+                </a:solidFill>
+              </a:defRPr>
             </a:lvl3pPr>
             <a:lvl4pPr marL="1371600" indent="0">
               <a:buNone/>
-              <a:defRPr sz="1000"/>
+              <a:defRPr sz="1400">
+                <a:solidFill>
+                  <a:schemeClr val="tx1">
+                    <a:tint val="75000"/>
+                  </a:schemeClr>
+                </a:solidFill>
+              </a:defRPr>
             </a:lvl4pPr>
             <a:lvl5pPr marL="1828800" indent="0">
               <a:buNone/>
-              <a:defRPr sz="1000"/>
+              <a:defRPr sz="1400">
+                <a:solidFill>
+                  <a:schemeClr val="tx1">
+                    <a:tint val="75000"/>
+                  </a:schemeClr>
+                </a:solidFill>
+              </a:defRPr>
             </a:lvl5pPr>
             <a:lvl6pPr marL="2286000" indent="0">
               <a:buNone/>
-              <a:defRPr sz="1000"/>
+              <a:defRPr sz="1400">
+                <a:solidFill>
+                  <a:schemeClr val="tx1">
+                    <a:tint val="75000"/>
+                  </a:schemeClr>
+                </a:solidFill>
+              </a:defRPr>
             </a:lvl6pPr>
             <a:lvl7pPr marL="2743200" indent="0">
               <a:buNone/>
-              <a:defRPr sz="1000"/>
+              <a:defRPr sz="1400">
+                <a:solidFill>
+                  <a:schemeClr val="tx1">
+                    <a:tint val="75000"/>
+                  </a:schemeClr>
+                </a:solidFill>
+              </a:defRPr>
             </a:lvl7pPr>
             <a:lvl8pPr marL="3200400" indent="0">
               <a:buNone/>
-              <a:defRPr sz="1000"/>
+              <a:defRPr sz="1400">
+                <a:solidFill>
+                  <a:schemeClr val="tx1">
+                    <a:tint val="75000"/>
+                  </a:schemeClr>
+                </a:solidFill>
+              </a:defRPr>
             </a:lvl8pPr>
             <a:lvl9pPr marL="3657600" indent="0">
               <a:buNone/>
-              <a:defRPr sz="1000"/>
+              <a:defRPr sz="1400">
+                <a:solidFill>
+                  <a:schemeClr val="tx1">
+                    <a:tint val="75000"/>
+                  </a:schemeClr>
+                </a:solidFill>
+              </a:defRPr>
             </a:lvl9pPr>
           </a:lstStyle>
           <a:p>
@@ -2117,7 +1383,7 @@
       </p:sp>
       <p:sp>
         <p:nvSpPr>
-          <p:cNvPr id="5" name="Date Placeholder 4"/>
+          <p:cNvPr id="4" name="Date Placeholder 3"/>
           <p:cNvSpPr>
             <a:spLocks noGrp="1"/>
           </p:cNvSpPr>
@@ -2132,7 +1398,7 @@
           <a:p>
             <a:fld id="{62D5F05B-F1CA-41F1-9D15-228D0FEFC4A2}" type="datetimeFigureOut">
               <a:rPr lang="en-US" smtClean="0"/>
-              <a:t>11/4/2025</a:t>
+              <a:t>11/11/2025</a:t>
             </a:fld>
             <a:endParaRPr lang="en-US"/>
           </a:p>
@@ -2140,7 +1406,7 @@
       </p:sp>
       <p:sp>
         <p:nvSpPr>
-          <p:cNvPr id="6" name="Footer Placeholder 5"/>
+          <p:cNvPr id="5" name="Footer Placeholder 4"/>
           <p:cNvSpPr>
             <a:spLocks noGrp="1"/>
           </p:cNvSpPr>
@@ -2159,7 +1425,7 @@
       </p:sp>
       <p:sp>
         <p:nvSpPr>
-          <p:cNvPr id="7" name="Slide Number Placeholder 6"/>
+          <p:cNvPr id="6" name="Slide Number Placeholder 5"/>
           <p:cNvSpPr>
             <a:spLocks noGrp="1"/>
           </p:cNvSpPr>
@@ -2167,12 +1433,7 @@
             <p:ph type="sldNum" sz="quarter" idx="12"/>
           </p:nvPr>
         </p:nvSpPr>
-        <p:spPr>
-          <a:xfrm>
-            <a:off x="10729455" y="4709925"/>
-            <a:ext cx="1154151" cy="1090789"/>
-          </a:xfrm>
-        </p:spPr>
+        <p:spPr/>
         <p:txBody>
           <a:bodyPr/>
           <a:lstStyle/>
@@ -2188,7 +1449,7 @@
     </p:spTree>
     <p:extLst>
       <p:ext uri="{BB962C8B-B14F-4D97-AF65-F5344CB8AC3E}">
-        <p14:creationId xmlns:p14="http://schemas.microsoft.com/office/powerpoint/2010/main" val="1134789735"/>
+        <p14:creationId xmlns:p14="http://schemas.microsoft.com/office/powerpoint/2010/main" val="3396778587"/>
       </p:ext>
     </p:extLst>
   </p:cSld>
@@ -2215,187 +1476,47 @@
           <a:chExt cx="0" cy="0"/>
         </a:xfrm>
       </p:grpSpPr>
-      <p:pic>
-        <p:nvPicPr>
-          <p:cNvPr id="13" name="Picture 12" descr="HD-ShadowLong.png"/>
-          <p:cNvPicPr>
-            <a:picLocks noChangeAspect="1"/>
-          </p:cNvPicPr>
-          <p:nvPr/>
-        </p:nvPicPr>
-        <p:blipFill>
-          <a:blip r:embed="rId2">
-            <a:extLst>
-              <a:ext uri="{28A0092B-C50C-407E-A947-70E740481C1C}">
-                <a14:useLocalDpi xmlns:a14="http://schemas.microsoft.com/office/drawing/2010/main" val="0"/>
-              </a:ext>
-            </a:extLst>
-          </a:blip>
-          <a:stretch>
-            <a:fillRect/>
-          </a:stretch>
-        </p:blipFill>
+      <p:sp>
+        <p:nvSpPr>
+          <p:cNvPr id="2" name="Title 1"/>
+          <p:cNvSpPr>
+            <a:spLocks noGrp="1"/>
+          </p:cNvSpPr>
+          <p:nvPr>
+            <p:ph type="title"/>
+          </p:nvPr>
+        </p:nvSpPr>
+        <p:spPr/>
+        <p:txBody>
+          <a:bodyPr/>
+          <a:lstStyle>
+            <a:lvl1pPr>
+              <a:defRPr sz="4200"/>
+            </a:lvl1pPr>
+          </a:lstStyle>
+          <a:p>
+            <a:r>
+              <a:rPr lang="en-US"/>
+              <a:t>Click to edit Master title style</a:t>
+            </a:r>
+            <a:endParaRPr lang="en-US" dirty="0"/>
+          </a:p>
+        </p:txBody>
+      </p:sp>
+      <p:sp>
+        <p:nvSpPr>
+          <p:cNvPr id="3" name="Text Placeholder 2"/>
+          <p:cNvSpPr>
+            <a:spLocks noGrp="1"/>
+          </p:cNvSpPr>
+          <p:nvPr>
+            <p:ph type="body" idx="1"/>
+          </p:nvPr>
+        </p:nvSpPr>
         <p:spPr>
           <a:xfrm>
-            <a:off x="1" y="1970240"/>
-            <a:ext cx="10437812" cy="321164"/>
-          </a:xfrm>
-          <a:prstGeom prst="rect">
-            <a:avLst/>
-          </a:prstGeom>
-        </p:spPr>
-      </p:pic>
-      <p:pic>
-        <p:nvPicPr>
-          <p:cNvPr id="14" name="Picture 13" descr="HD-ShadowShort.png"/>
-          <p:cNvPicPr>
-            <a:picLocks noChangeAspect="1"/>
-          </p:cNvPicPr>
-          <p:nvPr/>
-        </p:nvPicPr>
-        <p:blipFill>
-          <a:blip r:embed="rId3">
-            <a:extLst>
-              <a:ext uri="{28A0092B-C50C-407E-A947-70E740481C1C}">
-                <a14:useLocalDpi xmlns:a14="http://schemas.microsoft.com/office/drawing/2010/main" val="0"/>
-              </a:ext>
-            </a:extLst>
-          </a:blip>
-          <a:stretch>
-            <a:fillRect/>
-          </a:stretch>
-        </p:blipFill>
-        <p:spPr>
-          <a:xfrm>
-            <a:off x="10585826" y="1971234"/>
-            <a:ext cx="1602997" cy="144270"/>
-          </a:xfrm>
-          <a:prstGeom prst="rect">
-            <a:avLst/>
-          </a:prstGeom>
-        </p:spPr>
-      </p:pic>
-      <p:sp>
-        <p:nvSpPr>
-          <p:cNvPr id="16" name="Rectangle 15"/>
-          <p:cNvSpPr/>
-          <p:nvPr/>
-        </p:nvSpPr>
-        <p:spPr bwMode="ltGray">
-          <a:xfrm>
-            <a:off x="0" y="609600"/>
-            <a:ext cx="10437812" cy="1368198"/>
-          </a:xfrm>
-          <a:prstGeom prst="rect">
-            <a:avLst/>
-          </a:prstGeom>
-          <a:solidFill>
-            <a:schemeClr val="bg1">
-              <a:lumMod val="85000"/>
-              <a:lumOff val="15000"/>
-            </a:schemeClr>
-          </a:solidFill>
-          <a:ln>
-            <a:noFill/>
-          </a:ln>
-        </p:spPr>
-        <p:style>
-          <a:lnRef idx="2">
-            <a:schemeClr val="accent1">
-              <a:shade val="50000"/>
-            </a:schemeClr>
-          </a:lnRef>
-          <a:fillRef idx="1">
-            <a:schemeClr val="accent1"/>
-          </a:fillRef>
-          <a:effectRef idx="0">
-            <a:schemeClr val="accent1"/>
-          </a:effectRef>
-          <a:fontRef idx="minor">
-            <a:schemeClr val="lt1"/>
-          </a:fontRef>
-        </p:style>
-      </p:sp>
-      <p:sp>
-        <p:nvSpPr>
-          <p:cNvPr id="17" name="Rectangle 16"/>
-          <p:cNvSpPr/>
-          <p:nvPr/>
-        </p:nvSpPr>
-        <p:spPr>
-          <a:xfrm>
-            <a:off x="10585827" y="609600"/>
-            <a:ext cx="1602997" cy="1368198"/>
-          </a:xfrm>
-          <a:prstGeom prst="rect">
-            <a:avLst/>
-          </a:prstGeom>
-          <a:solidFill>
-            <a:schemeClr val="accent1"/>
-          </a:solidFill>
-          <a:ln>
-            <a:noFill/>
-          </a:ln>
-        </p:spPr>
-        <p:style>
-          <a:lnRef idx="2">
-            <a:schemeClr val="accent1">
-              <a:shade val="50000"/>
-            </a:schemeClr>
-          </a:lnRef>
-          <a:fillRef idx="1">
-            <a:schemeClr val="accent1"/>
-          </a:fillRef>
-          <a:effectRef idx="0">
-            <a:schemeClr val="accent1"/>
-          </a:effectRef>
-          <a:fontRef idx="minor">
-            <a:schemeClr val="lt1"/>
-          </a:fontRef>
-        </p:style>
-      </p:sp>
-      <p:sp>
-        <p:nvSpPr>
-          <p:cNvPr id="15" name="Title 1"/>
-          <p:cNvSpPr>
-            <a:spLocks noGrp="1"/>
-          </p:cNvSpPr>
-          <p:nvPr>
-            <p:ph type="title"/>
-          </p:nvPr>
-        </p:nvSpPr>
-        <p:spPr>
-          <a:xfrm>
-            <a:off x="669222" y="753228"/>
-            <a:ext cx="9624960" cy="1080938"/>
-          </a:xfrm>
-        </p:spPr>
-        <p:txBody>
-          <a:bodyPr/>
-          <a:lstStyle/>
-          <a:p>
-            <a:r>
-              <a:rPr lang="en-US"/>
-              <a:t>Click to edit Master title style</a:t>
-            </a:r>
-            <a:endParaRPr lang="en-US" dirty="0"/>
-          </a:p>
-        </p:txBody>
-      </p:sp>
-      <p:sp>
-        <p:nvSpPr>
-          <p:cNvPr id="7" name="Text Placeholder 2"/>
-          <p:cNvSpPr>
-            <a:spLocks noGrp="1"/>
-          </p:cNvSpPr>
-          <p:nvPr>
-            <p:ph type="body" idx="1"/>
-          </p:nvPr>
-        </p:nvSpPr>
-        <p:spPr>
-          <a:xfrm>
-            <a:off x="660946" y="2336873"/>
-            <a:ext cx="3070034" cy="576262"/>
+            <a:off x="632947" y="1981200"/>
+            <a:ext cx="2946866" cy="576262"/>
           </a:xfrm>
         </p:spPr>
         <p:txBody>
@@ -2407,7 +1528,10 @@
               <a:buNone/>
               <a:defRPr sz="2400" b="0">
                 <a:solidFill>
-                  <a:schemeClr val="tx1"/>
+                  <a:schemeClr val="bg2">
+                    <a:lumMod val="40000"/>
+                    <a:lumOff val="60000"/>
+                  </a:schemeClr>
                 </a:solidFill>
               </a:defRPr>
             </a:lvl1pPr>
@@ -2455,7 +1579,7 @@
       </p:sp>
       <p:sp>
         <p:nvSpPr>
-          <p:cNvPr id="8" name="Text Placeholder 3"/>
+          <p:cNvPr id="16" name="Text Placeholder 3"/>
           <p:cNvSpPr>
             <a:spLocks noGrp="1"/>
           </p:cNvSpPr>
@@ -2465,8 +1589,8 @@
         </p:nvSpPr>
         <p:spPr>
           <a:xfrm>
-            <a:off x="680322" y="3022673"/>
-            <a:ext cx="3049702" cy="2913513"/>
+            <a:off x="652463" y="2667000"/>
+            <a:ext cx="2927350" cy="3589338"/>
           </a:xfrm>
         </p:spPr>
         <p:txBody>
@@ -2522,7 +1646,7 @@
       </p:sp>
       <p:sp>
         <p:nvSpPr>
-          <p:cNvPr id="9" name="Text Placeholder 4"/>
+          <p:cNvPr id="5" name="Text Placeholder 4"/>
           <p:cNvSpPr>
             <a:spLocks noGrp="1"/>
           </p:cNvSpPr>
@@ -2532,8 +1656,8 @@
         </p:nvSpPr>
         <p:spPr>
           <a:xfrm>
-            <a:off x="3956025" y="2336873"/>
-            <a:ext cx="3063240" cy="576262"/>
+            <a:off x="3883659" y="1981200"/>
+            <a:ext cx="2936241" cy="576262"/>
           </a:xfrm>
         </p:spPr>
         <p:txBody>
@@ -2545,7 +1669,10 @@
               <a:buNone/>
               <a:defRPr sz="2400" b="0">
                 <a:solidFill>
-                  <a:schemeClr val="tx1"/>
+                  <a:schemeClr val="bg2">
+                    <a:lumMod val="40000"/>
+                    <a:lumOff val="60000"/>
+                  </a:schemeClr>
                 </a:solidFill>
               </a:defRPr>
             </a:lvl1pPr>
@@ -2593,7 +1720,7 @@
       </p:sp>
       <p:sp>
         <p:nvSpPr>
-          <p:cNvPr id="10" name="Text Placeholder 3"/>
+          <p:cNvPr id="19" name="Text Placeholder 3"/>
           <p:cNvSpPr>
             <a:spLocks noGrp="1"/>
           </p:cNvSpPr>
@@ -2603,8 +1730,8 @@
         </p:nvSpPr>
         <p:spPr>
           <a:xfrm>
-            <a:off x="3945470" y="3022673"/>
-            <a:ext cx="3063240" cy="2913513"/>
+            <a:off x="3873106" y="2667000"/>
+            <a:ext cx="2946794" cy="3589338"/>
           </a:xfrm>
         </p:spPr>
         <p:txBody>
@@ -2660,7 +1787,7 @@
       </p:sp>
       <p:sp>
         <p:nvSpPr>
-          <p:cNvPr id="11" name="Text Placeholder 4"/>
+          <p:cNvPr id="14" name="Text Placeholder 4"/>
           <p:cNvSpPr>
             <a:spLocks noGrp="1"/>
           </p:cNvSpPr>
@@ -2670,8 +1797,8 @@
         </p:nvSpPr>
         <p:spPr>
           <a:xfrm>
-            <a:off x="7224156" y="2336873"/>
-            <a:ext cx="3070025" cy="576262"/>
+            <a:off x="7124700" y="1981200"/>
+            <a:ext cx="2932113" cy="576262"/>
           </a:xfrm>
         </p:spPr>
         <p:txBody>
@@ -2683,7 +1810,10 @@
               <a:buNone/>
               <a:defRPr sz="2400" b="0">
                 <a:solidFill>
-                  <a:schemeClr val="tx1"/>
+                  <a:schemeClr val="bg2">
+                    <a:lumMod val="40000"/>
+                    <a:lumOff val="60000"/>
+                  </a:schemeClr>
                 </a:solidFill>
               </a:defRPr>
             </a:lvl1pPr>
@@ -2731,7 +1861,7 @@
       </p:sp>
       <p:sp>
         <p:nvSpPr>
-          <p:cNvPr id="12" name="Text Placeholder 3"/>
+          <p:cNvPr id="20" name="Text Placeholder 3"/>
           <p:cNvSpPr>
             <a:spLocks noGrp="1"/>
           </p:cNvSpPr>
@@ -2741,8 +1871,8 @@
         </p:nvSpPr>
         <p:spPr>
           <a:xfrm>
-            <a:off x="7224156" y="3022673"/>
-            <a:ext cx="3070025" cy="2913513"/>
+            <a:off x="7124700" y="2667000"/>
+            <a:ext cx="2932113" cy="3589338"/>
           </a:xfrm>
         </p:spPr>
         <p:txBody>
@@ -2796,9 +1926,87 @@
           </a:p>
         </p:txBody>
       </p:sp>
-      <p:sp>
-        <p:nvSpPr>
-          <p:cNvPr id="3" name="Date Placeholder 2"/>
+      <p:cxnSp>
+        <p:nvCxnSpPr>
+          <p:cNvPr id="17" name="Straight Connector 16"/>
+          <p:cNvCxnSpPr/>
+          <p:nvPr/>
+        </p:nvCxnSpPr>
+        <p:spPr>
+          <a:xfrm>
+            <a:off x="3726142" y="2133600"/>
+            <a:ext cx="0" cy="3962400"/>
+          </a:xfrm>
+          <a:prstGeom prst="line">
+            <a:avLst/>
+          </a:prstGeom>
+          <a:ln w="12700" cmpd="sng">
+            <a:solidFill>
+              <a:schemeClr val="bg2">
+                <a:lumMod val="40000"/>
+                <a:lumOff val="60000"/>
+                <a:alpha val="40000"/>
+              </a:schemeClr>
+            </a:solidFill>
+          </a:ln>
+        </p:spPr>
+        <p:style>
+          <a:lnRef idx="2">
+            <a:schemeClr val="accent1"/>
+          </a:lnRef>
+          <a:fillRef idx="0">
+            <a:schemeClr val="accent1"/>
+          </a:fillRef>
+          <a:effectRef idx="1">
+            <a:schemeClr val="accent1"/>
+          </a:effectRef>
+          <a:fontRef idx="minor">
+            <a:schemeClr val="tx1"/>
+          </a:fontRef>
+        </p:style>
+      </p:cxnSp>
+      <p:cxnSp>
+        <p:nvCxnSpPr>
+          <p:cNvPr id="18" name="Straight Connector 17"/>
+          <p:cNvCxnSpPr/>
+          <p:nvPr/>
+        </p:nvCxnSpPr>
+        <p:spPr>
+          <a:xfrm>
+            <a:off x="6962227" y="2133600"/>
+            <a:ext cx="0" cy="3966882"/>
+          </a:xfrm>
+          <a:prstGeom prst="line">
+            <a:avLst/>
+          </a:prstGeom>
+          <a:ln w="12700" cmpd="sng">
+            <a:solidFill>
+              <a:schemeClr val="bg2">
+                <a:lumMod val="40000"/>
+                <a:lumOff val="60000"/>
+                <a:alpha val="40000"/>
+              </a:schemeClr>
+            </a:solidFill>
+          </a:ln>
+        </p:spPr>
+        <p:style>
+          <a:lnRef idx="2">
+            <a:schemeClr val="accent1"/>
+          </a:lnRef>
+          <a:fillRef idx="0">
+            <a:schemeClr val="accent1"/>
+          </a:fillRef>
+          <a:effectRef idx="1">
+            <a:schemeClr val="accent1"/>
+          </a:effectRef>
+          <a:fontRef idx="minor">
+            <a:schemeClr val="tx1"/>
+          </a:fontRef>
+        </p:style>
+      </p:cxnSp>
+      <p:sp>
+        <p:nvSpPr>
+          <p:cNvPr id="7" name="Date Placeholder 3"/>
           <p:cNvSpPr>
             <a:spLocks noGrp="1"/>
           </p:cNvSpPr>
@@ -2813,7 +2021,7 @@
           <a:p>
             <a:fld id="{62D5F05B-F1CA-41F1-9D15-228D0FEFC4A2}" type="datetimeFigureOut">
               <a:rPr lang="en-US" smtClean="0"/>
-              <a:t>11/4/2025</a:t>
+              <a:t>11/11/2025</a:t>
             </a:fld>
             <a:endParaRPr lang="en-US"/>
           </a:p>
@@ -2821,7 +2029,7 @@
       </p:sp>
       <p:sp>
         <p:nvSpPr>
-          <p:cNvPr id="4" name="Footer Placeholder 3"/>
+          <p:cNvPr id="4" name="Footer Placeholder 4"/>
           <p:cNvSpPr>
             <a:spLocks noGrp="1"/>
           </p:cNvSpPr>
@@ -2840,7 +2048,7 @@
       </p:sp>
       <p:sp>
         <p:nvSpPr>
-          <p:cNvPr id="5" name="Slide Number Placeholder 4"/>
+          <p:cNvPr id="6" name="Slide Number Placeholder 5"/>
           <p:cNvSpPr>
             <a:spLocks noGrp="1"/>
           </p:cNvSpPr>
@@ -2864,7 +2072,7 @@
     </p:spTree>
     <p:extLst>
       <p:ext uri="{BB962C8B-B14F-4D97-AF65-F5344CB8AC3E}">
-        <p14:creationId xmlns:p14="http://schemas.microsoft.com/office/powerpoint/2010/main" val="443934075"/>
+        <p14:creationId xmlns:p14="http://schemas.microsoft.com/office/powerpoint/2010/main" val="2685856125"/>
       </p:ext>
     </p:extLst>
   </p:cSld>
@@ -2891,187 +2099,47 @@
           <a:chExt cx="0" cy="0"/>
         </a:xfrm>
       </p:grpSpPr>
-      <p:pic>
-        <p:nvPicPr>
-          <p:cNvPr id="15" name="Picture 14" descr="HD-ShadowLong.png"/>
-          <p:cNvPicPr>
-            <a:picLocks noChangeAspect="1"/>
-          </p:cNvPicPr>
-          <p:nvPr/>
-        </p:nvPicPr>
-        <p:blipFill>
-          <a:blip r:embed="rId2">
-            <a:extLst>
-              <a:ext uri="{28A0092B-C50C-407E-A947-70E740481C1C}">
-                <a14:useLocalDpi xmlns:a14="http://schemas.microsoft.com/office/drawing/2010/main" val="0"/>
-              </a:ext>
-            </a:extLst>
-          </a:blip>
-          <a:stretch>
-            <a:fillRect/>
-          </a:stretch>
-        </p:blipFill>
+      <p:sp>
+        <p:nvSpPr>
+          <p:cNvPr id="2" name="Title 1"/>
+          <p:cNvSpPr>
+            <a:spLocks noGrp="1"/>
+          </p:cNvSpPr>
+          <p:nvPr>
+            <p:ph type="title"/>
+          </p:nvPr>
+        </p:nvSpPr>
+        <p:spPr/>
+        <p:txBody>
+          <a:bodyPr/>
+          <a:lstStyle>
+            <a:lvl1pPr>
+              <a:defRPr sz="4200"/>
+            </a:lvl1pPr>
+          </a:lstStyle>
+          <a:p>
+            <a:r>
+              <a:rPr lang="en-US"/>
+              <a:t>Click to edit Master title style</a:t>
+            </a:r>
+            <a:endParaRPr lang="en-US" dirty="0"/>
+          </a:p>
+        </p:txBody>
+      </p:sp>
+      <p:sp>
+        <p:nvSpPr>
+          <p:cNvPr id="3" name="Text Placeholder 2"/>
+          <p:cNvSpPr>
+            <a:spLocks noGrp="1"/>
+          </p:cNvSpPr>
+          <p:nvPr>
+            <p:ph type="body" idx="1"/>
+          </p:nvPr>
+        </p:nvSpPr>
         <p:spPr>
           <a:xfrm>
-            <a:off x="1" y="1970240"/>
-            <a:ext cx="10437812" cy="321164"/>
-          </a:xfrm>
-          <a:prstGeom prst="rect">
-            <a:avLst/>
-          </a:prstGeom>
-        </p:spPr>
-      </p:pic>
-      <p:pic>
-        <p:nvPicPr>
-          <p:cNvPr id="16" name="Picture 15" descr="HD-ShadowShort.png"/>
-          <p:cNvPicPr>
-            <a:picLocks noChangeAspect="1"/>
-          </p:cNvPicPr>
-          <p:nvPr/>
-        </p:nvPicPr>
-        <p:blipFill>
-          <a:blip r:embed="rId3">
-            <a:extLst>
-              <a:ext uri="{28A0092B-C50C-407E-A947-70E740481C1C}">
-                <a14:useLocalDpi xmlns:a14="http://schemas.microsoft.com/office/drawing/2010/main" val="0"/>
-              </a:ext>
-            </a:extLst>
-          </a:blip>
-          <a:stretch>
-            <a:fillRect/>
-          </a:stretch>
-        </p:blipFill>
-        <p:spPr>
-          <a:xfrm>
-            <a:off x="10585826" y="1971234"/>
-            <a:ext cx="1602997" cy="144270"/>
-          </a:xfrm>
-          <a:prstGeom prst="rect">
-            <a:avLst/>
-          </a:prstGeom>
-        </p:spPr>
-      </p:pic>
-      <p:sp>
-        <p:nvSpPr>
-          <p:cNvPr id="17" name="Rectangle 16"/>
-          <p:cNvSpPr/>
-          <p:nvPr/>
-        </p:nvSpPr>
-        <p:spPr bwMode="ltGray">
-          <a:xfrm>
-            <a:off x="0" y="609600"/>
-            <a:ext cx="10437812" cy="1368198"/>
-          </a:xfrm>
-          <a:prstGeom prst="rect">
-            <a:avLst/>
-          </a:prstGeom>
-          <a:solidFill>
-            <a:schemeClr val="bg1">
-              <a:lumMod val="85000"/>
-              <a:lumOff val="15000"/>
-            </a:schemeClr>
-          </a:solidFill>
-          <a:ln>
-            <a:noFill/>
-          </a:ln>
-        </p:spPr>
-        <p:style>
-          <a:lnRef idx="2">
-            <a:schemeClr val="accent1">
-              <a:shade val="50000"/>
-            </a:schemeClr>
-          </a:lnRef>
-          <a:fillRef idx="1">
-            <a:schemeClr val="accent1"/>
-          </a:fillRef>
-          <a:effectRef idx="0">
-            <a:schemeClr val="accent1"/>
-          </a:effectRef>
-          <a:fontRef idx="minor">
-            <a:schemeClr val="lt1"/>
-          </a:fontRef>
-        </p:style>
-      </p:sp>
-      <p:sp>
-        <p:nvSpPr>
-          <p:cNvPr id="18" name="Rectangle 17"/>
-          <p:cNvSpPr/>
-          <p:nvPr/>
-        </p:nvSpPr>
-        <p:spPr>
-          <a:xfrm>
-            <a:off x="10585827" y="609600"/>
-            <a:ext cx="1602997" cy="1368198"/>
-          </a:xfrm>
-          <a:prstGeom prst="rect">
-            <a:avLst/>
-          </a:prstGeom>
-          <a:solidFill>
-            <a:schemeClr val="accent1"/>
-          </a:solidFill>
-          <a:ln>
-            <a:noFill/>
-          </a:ln>
-        </p:spPr>
-        <p:style>
-          <a:lnRef idx="2">
-            <a:schemeClr val="accent1">
-              <a:shade val="50000"/>
-            </a:schemeClr>
-          </a:lnRef>
-          <a:fillRef idx="1">
-            <a:schemeClr val="accent1"/>
-          </a:fillRef>
-          <a:effectRef idx="0">
-            <a:schemeClr val="accent1"/>
-          </a:effectRef>
-          <a:fontRef idx="minor">
-            <a:schemeClr val="lt1"/>
-          </a:fontRef>
-        </p:style>
-      </p:sp>
-      <p:sp>
-        <p:nvSpPr>
-          <p:cNvPr id="30" name="Title 1"/>
-          <p:cNvSpPr>
-            <a:spLocks noGrp="1"/>
-          </p:cNvSpPr>
-          <p:nvPr>
-            <p:ph type="title"/>
-          </p:nvPr>
-        </p:nvSpPr>
-        <p:spPr>
-          <a:xfrm>
-            <a:off x="680322" y="753228"/>
-            <a:ext cx="9613860" cy="1080938"/>
-          </a:xfrm>
-        </p:spPr>
-        <p:txBody>
-          <a:bodyPr/>
-          <a:lstStyle/>
-          <a:p>
-            <a:r>
-              <a:rPr lang="en-US"/>
-              <a:t>Click to edit Master title style</a:t>
-            </a:r>
-            <a:endParaRPr lang="en-US" dirty="0"/>
-          </a:p>
-        </p:txBody>
-      </p:sp>
-      <p:sp>
-        <p:nvSpPr>
-          <p:cNvPr id="19" name="Text Placeholder 2"/>
-          <p:cNvSpPr>
-            <a:spLocks noGrp="1"/>
-          </p:cNvSpPr>
-          <p:nvPr>
-            <p:ph type="body" idx="1"/>
-          </p:nvPr>
-        </p:nvSpPr>
-        <p:spPr>
-          <a:xfrm>
-            <a:off x="680318" y="4297503"/>
-            <a:ext cx="3049705" cy="576262"/>
+            <a:off x="652463" y="4250949"/>
+            <a:ext cx="2940050" cy="576262"/>
           </a:xfrm>
         </p:spPr>
         <p:txBody>
@@ -3083,7 +2151,10 @@
               <a:buNone/>
               <a:defRPr sz="2400" b="0">
                 <a:solidFill>
-                  <a:schemeClr val="tx1"/>
+                  <a:schemeClr val="bg2">
+                    <a:lumMod val="40000"/>
+                    <a:lumOff val="60000"/>
+                  </a:schemeClr>
                 </a:solidFill>
               </a:defRPr>
             </a:lvl1pPr>
@@ -3131,7 +2202,7 @@
       </p:sp>
       <p:sp>
         <p:nvSpPr>
-          <p:cNvPr id="20" name="Picture Placeholder 2"/>
+          <p:cNvPr id="29" name="Picture Placeholder 2"/>
           <p:cNvSpPr>
             <a:spLocks noGrp="1" noChangeAspect="1"/>
           </p:cNvSpPr>
@@ -3141,12 +2212,12 @@
         </p:nvSpPr>
         <p:spPr>
           <a:xfrm>
-            <a:off x="680318" y="2336873"/>
-            <a:ext cx="3049705" cy="1524000"/>
+            <a:off x="652463" y="2209800"/>
+            <a:ext cx="2940050" cy="1524000"/>
           </a:xfrm>
           <a:prstGeom prst="roundRect">
             <a:avLst>
-              <a:gd name="adj" fmla="val 0"/>
+              <a:gd name="adj" fmla="val 1858"/>
             </a:avLst>
           </a:prstGeom>
           <a:effectLst>
@@ -3210,7 +2281,7 @@
       </p:sp>
       <p:sp>
         <p:nvSpPr>
-          <p:cNvPr id="21" name="Text Placeholder 3"/>
+          <p:cNvPr id="22" name="Text Placeholder 3"/>
           <p:cNvSpPr>
             <a:spLocks noGrp="1"/>
           </p:cNvSpPr>
@@ -3220,8 +2291,8 @@
         </p:nvSpPr>
         <p:spPr>
           <a:xfrm>
-            <a:off x="680318" y="4873765"/>
-            <a:ext cx="3049705" cy="1062422"/>
+            <a:off x="652463" y="4827211"/>
+            <a:ext cx="2940050" cy="659189"/>
           </a:xfrm>
         </p:spPr>
         <p:txBody>
@@ -3277,7 +2348,7 @@
       </p:sp>
       <p:sp>
         <p:nvSpPr>
-          <p:cNvPr id="22" name="Text Placeholder 4"/>
+          <p:cNvPr id="5" name="Text Placeholder 4"/>
           <p:cNvSpPr>
             <a:spLocks noGrp="1"/>
           </p:cNvSpPr>
@@ -3287,8 +2358,8 @@
         </p:nvSpPr>
         <p:spPr>
           <a:xfrm>
-            <a:off x="3945471" y="4297503"/>
-            <a:ext cx="3063240" cy="576262"/>
+            <a:off x="3889375" y="4250949"/>
+            <a:ext cx="2930525" cy="576262"/>
           </a:xfrm>
         </p:spPr>
         <p:txBody>
@@ -3300,7 +2371,10 @@
               <a:buNone/>
               <a:defRPr sz="2400" b="0">
                 <a:solidFill>
-                  <a:schemeClr val="tx1"/>
+                  <a:schemeClr val="bg2">
+                    <a:lumMod val="40000"/>
+                    <a:lumOff val="60000"/>
+                  </a:schemeClr>
                 </a:solidFill>
               </a:defRPr>
             </a:lvl1pPr>
@@ -3348,7 +2422,7 @@
       </p:sp>
       <p:sp>
         <p:nvSpPr>
-          <p:cNvPr id="23" name="Picture Placeholder 2"/>
+          <p:cNvPr id="30" name="Picture Placeholder 2"/>
           <p:cNvSpPr>
             <a:spLocks noGrp="1" noChangeAspect="1"/>
           </p:cNvSpPr>
@@ -3358,12 +2432,12 @@
         </p:nvSpPr>
         <p:spPr>
           <a:xfrm>
-            <a:off x="3945470" y="2336873"/>
-            <a:ext cx="3063240" cy="1524000"/>
+            <a:off x="3889374" y="2209800"/>
+            <a:ext cx="2930525" cy="1524000"/>
           </a:xfrm>
           <a:prstGeom prst="roundRect">
             <a:avLst>
-              <a:gd name="adj" fmla="val 0"/>
+              <a:gd name="adj" fmla="val 1858"/>
             </a:avLst>
           </a:prstGeom>
           <a:effectLst>
@@ -3427,7 +2501,7 @@
       </p:sp>
       <p:sp>
         <p:nvSpPr>
-          <p:cNvPr id="24" name="Text Placeholder 3"/>
+          <p:cNvPr id="23" name="Text Placeholder 3"/>
           <p:cNvSpPr>
             <a:spLocks noGrp="1"/>
           </p:cNvSpPr>
@@ -3437,8 +2511,8 @@
         </p:nvSpPr>
         <p:spPr>
           <a:xfrm>
-            <a:off x="3944117" y="4873764"/>
-            <a:ext cx="3067297" cy="1062422"/>
+            <a:off x="3888022" y="4827210"/>
+            <a:ext cx="2934406" cy="659189"/>
           </a:xfrm>
         </p:spPr>
         <p:txBody>
@@ -3494,7 +2568,7 @@
       </p:sp>
       <p:sp>
         <p:nvSpPr>
-          <p:cNvPr id="25" name="Text Placeholder 4"/>
+          <p:cNvPr id="14" name="Text Placeholder 4"/>
           <p:cNvSpPr>
             <a:spLocks noGrp="1"/>
           </p:cNvSpPr>
@@ -3504,8 +2578,8 @@
         </p:nvSpPr>
         <p:spPr>
           <a:xfrm>
-            <a:off x="7230678" y="4297503"/>
-            <a:ext cx="3063505" cy="576262"/>
+            <a:off x="7124700" y="4250949"/>
+            <a:ext cx="2932113" cy="576262"/>
           </a:xfrm>
         </p:spPr>
         <p:txBody>
@@ -3517,7 +2591,10 @@
               <a:buNone/>
               <a:defRPr sz="2400" b="0">
                 <a:solidFill>
-                  <a:schemeClr val="tx1"/>
+                  <a:schemeClr val="bg2">
+                    <a:lumMod val="40000"/>
+                    <a:lumOff val="60000"/>
+                  </a:schemeClr>
                 </a:solidFill>
               </a:defRPr>
             </a:lvl1pPr>
@@ -3565,7 +2642,7 @@
       </p:sp>
       <p:sp>
         <p:nvSpPr>
-          <p:cNvPr id="26" name="Picture Placeholder 2"/>
+          <p:cNvPr id="31" name="Picture Placeholder 2"/>
           <p:cNvSpPr>
             <a:spLocks noGrp="1" noChangeAspect="1"/>
           </p:cNvSpPr>
@@ -3575,12 +2652,12 @@
         </p:nvSpPr>
         <p:spPr>
           <a:xfrm>
-            <a:off x="7230677" y="2336873"/>
-            <a:ext cx="3063505" cy="1524000"/>
+            <a:off x="7124699" y="2209800"/>
+            <a:ext cx="2932113" cy="1524000"/>
           </a:xfrm>
           <a:prstGeom prst="roundRect">
             <a:avLst>
-              <a:gd name="adj" fmla="val 0"/>
+              <a:gd name="adj" fmla="val 1858"/>
             </a:avLst>
           </a:prstGeom>
           <a:effectLst>
@@ -3644,7 +2721,7 @@
       </p:sp>
       <p:sp>
         <p:nvSpPr>
-          <p:cNvPr id="27" name="Text Placeholder 3"/>
+          <p:cNvPr id="24" name="Text Placeholder 3"/>
           <p:cNvSpPr>
             <a:spLocks noGrp="1"/>
           </p:cNvSpPr>
@@ -3654,8 +2731,8 @@
         </p:nvSpPr>
         <p:spPr>
           <a:xfrm>
-            <a:off x="7230553" y="4873762"/>
-            <a:ext cx="3067563" cy="1062422"/>
+            <a:off x="7124575" y="4827208"/>
+            <a:ext cx="2935997" cy="659189"/>
           </a:xfrm>
         </p:spPr>
         <p:txBody>
@@ -3709,9 +2786,87 @@
           </a:p>
         </p:txBody>
       </p:sp>
-      <p:sp>
-        <p:nvSpPr>
-          <p:cNvPr id="3" name="Date Placeholder 2"/>
+      <p:cxnSp>
+        <p:nvCxnSpPr>
+          <p:cNvPr id="19" name="Straight Connector 18"/>
+          <p:cNvCxnSpPr/>
+          <p:nvPr/>
+        </p:nvCxnSpPr>
+        <p:spPr>
+          <a:xfrm>
+            <a:off x="3726142" y="2133600"/>
+            <a:ext cx="0" cy="3962400"/>
+          </a:xfrm>
+          <a:prstGeom prst="line">
+            <a:avLst/>
+          </a:prstGeom>
+          <a:ln w="12700" cmpd="sng">
+            <a:solidFill>
+              <a:schemeClr val="bg2">
+                <a:lumMod val="40000"/>
+                <a:lumOff val="60000"/>
+                <a:alpha val="40000"/>
+              </a:schemeClr>
+            </a:solidFill>
+          </a:ln>
+        </p:spPr>
+        <p:style>
+          <a:lnRef idx="2">
+            <a:schemeClr val="accent1"/>
+          </a:lnRef>
+          <a:fillRef idx="0">
+            <a:schemeClr val="accent1"/>
+          </a:fillRef>
+          <a:effectRef idx="1">
+            <a:schemeClr val="accent1"/>
+          </a:effectRef>
+          <a:fontRef idx="minor">
+            <a:schemeClr val="tx1"/>
+          </a:fontRef>
+        </p:style>
+      </p:cxnSp>
+      <p:cxnSp>
+        <p:nvCxnSpPr>
+          <p:cNvPr id="20" name="Straight Connector 19"/>
+          <p:cNvCxnSpPr/>
+          <p:nvPr/>
+        </p:nvCxnSpPr>
+        <p:spPr>
+          <a:xfrm>
+            <a:off x="6962227" y="2133600"/>
+            <a:ext cx="0" cy="3966882"/>
+          </a:xfrm>
+          <a:prstGeom prst="line">
+            <a:avLst/>
+          </a:prstGeom>
+          <a:ln w="12700" cmpd="sng">
+            <a:solidFill>
+              <a:schemeClr val="bg2">
+                <a:lumMod val="40000"/>
+                <a:lumOff val="60000"/>
+                <a:alpha val="40000"/>
+              </a:schemeClr>
+            </a:solidFill>
+          </a:ln>
+        </p:spPr>
+        <p:style>
+          <a:lnRef idx="2">
+            <a:schemeClr val="accent1"/>
+          </a:lnRef>
+          <a:fillRef idx="0">
+            <a:schemeClr val="accent1"/>
+          </a:fillRef>
+          <a:effectRef idx="1">
+            <a:schemeClr val="accent1"/>
+          </a:effectRef>
+          <a:fontRef idx="minor">
+            <a:schemeClr val="tx1"/>
+          </a:fontRef>
+        </p:style>
+      </p:cxnSp>
+      <p:sp>
+        <p:nvSpPr>
+          <p:cNvPr id="7" name="Date Placeholder 3"/>
           <p:cNvSpPr>
             <a:spLocks noGrp="1"/>
           </p:cNvSpPr>
@@ -3726,7 +2881,7 @@
           <a:p>
             <a:fld id="{62D5F05B-F1CA-41F1-9D15-228D0FEFC4A2}" type="datetimeFigureOut">
               <a:rPr lang="en-US" smtClean="0"/>
-              <a:t>11/4/2025</a:t>
+              <a:t>11/11/2025</a:t>
             </a:fld>
             <a:endParaRPr lang="en-US"/>
           </a:p>
@@ -3734,7 +2889,7 @@
       </p:sp>
       <p:sp>
         <p:nvSpPr>
-          <p:cNvPr id="4" name="Footer Placeholder 3"/>
+          <p:cNvPr id="4" name="Footer Placeholder 4"/>
           <p:cNvSpPr>
             <a:spLocks noGrp="1"/>
           </p:cNvSpPr>
@@ -3753,7 +2908,7 @@
       </p:sp>
       <p:sp>
         <p:nvSpPr>
-          <p:cNvPr id="5" name="Slide Number Placeholder 4"/>
+          <p:cNvPr id="6" name="Slide Number Placeholder 5"/>
           <p:cNvSpPr>
             <a:spLocks noGrp="1"/>
           </p:cNvSpPr>
@@ -3777,7 +2932,7 @@
     </p:spTree>
     <p:extLst>
       <p:ext uri="{BB962C8B-B14F-4D97-AF65-F5344CB8AC3E}">
-        <p14:creationId xmlns:p14="http://schemas.microsoft.com/office/powerpoint/2010/main" val="1180565394"/>
+        <p14:creationId xmlns:p14="http://schemas.microsoft.com/office/powerpoint/2010/main" val="4257703113"/>
       </p:ext>
     </p:extLst>
   </p:cSld>
@@ -3804,145 +2959,6 @@
           <a:chExt cx="0" cy="0"/>
         </a:xfrm>
       </p:grpSpPr>
-      <p:pic>
-        <p:nvPicPr>
-          <p:cNvPr id="7" name="Picture 6" descr="HD-ShadowLong.png"/>
-          <p:cNvPicPr>
-            <a:picLocks noChangeAspect="1"/>
-          </p:cNvPicPr>
-          <p:nvPr/>
-        </p:nvPicPr>
-        <p:blipFill>
-          <a:blip r:embed="rId2">
-            <a:extLst>
-              <a:ext uri="{28A0092B-C50C-407E-A947-70E740481C1C}">
-                <a14:useLocalDpi xmlns:a14="http://schemas.microsoft.com/office/drawing/2010/main" val="0"/>
-              </a:ext>
-            </a:extLst>
-          </a:blip>
-          <a:stretch>
-            <a:fillRect/>
-          </a:stretch>
-        </p:blipFill>
-        <p:spPr>
-          <a:xfrm>
-            <a:off x="1" y="1970240"/>
-            <a:ext cx="10437812" cy="321164"/>
-          </a:xfrm>
-          <a:prstGeom prst="rect">
-            <a:avLst/>
-          </a:prstGeom>
-        </p:spPr>
-      </p:pic>
-      <p:pic>
-        <p:nvPicPr>
-          <p:cNvPr id="8" name="Picture 7" descr="HD-ShadowShort.png"/>
-          <p:cNvPicPr>
-            <a:picLocks noChangeAspect="1"/>
-          </p:cNvPicPr>
-          <p:nvPr/>
-        </p:nvPicPr>
-        <p:blipFill>
-          <a:blip r:embed="rId3">
-            <a:extLst>
-              <a:ext uri="{28A0092B-C50C-407E-A947-70E740481C1C}">
-                <a14:useLocalDpi xmlns:a14="http://schemas.microsoft.com/office/drawing/2010/main" val="0"/>
-              </a:ext>
-            </a:extLst>
-          </a:blip>
-          <a:stretch>
-            <a:fillRect/>
-          </a:stretch>
-        </p:blipFill>
-        <p:spPr>
-          <a:xfrm>
-            <a:off x="10585826" y="1971234"/>
-            <a:ext cx="1602997" cy="144270"/>
-          </a:xfrm>
-          <a:prstGeom prst="rect">
-            <a:avLst/>
-          </a:prstGeom>
-        </p:spPr>
-      </p:pic>
-      <p:sp>
-        <p:nvSpPr>
-          <p:cNvPr id="9" name="Rectangle 8"/>
-          <p:cNvSpPr/>
-          <p:nvPr/>
-        </p:nvSpPr>
-        <p:spPr bwMode="ltGray">
-          <a:xfrm>
-            <a:off x="0" y="609600"/>
-            <a:ext cx="10437812" cy="1368198"/>
-          </a:xfrm>
-          <a:prstGeom prst="rect">
-            <a:avLst/>
-          </a:prstGeom>
-          <a:solidFill>
-            <a:schemeClr val="bg1">
-              <a:lumMod val="85000"/>
-              <a:lumOff val="15000"/>
-            </a:schemeClr>
-          </a:solidFill>
-          <a:ln>
-            <a:noFill/>
-          </a:ln>
-        </p:spPr>
-        <p:style>
-          <a:lnRef idx="2">
-            <a:schemeClr val="accent1">
-              <a:shade val="50000"/>
-            </a:schemeClr>
-          </a:lnRef>
-          <a:fillRef idx="1">
-            <a:schemeClr val="accent1"/>
-          </a:fillRef>
-          <a:effectRef idx="0">
-            <a:schemeClr val="accent1"/>
-          </a:effectRef>
-          <a:fontRef idx="minor">
-            <a:schemeClr val="lt1"/>
-          </a:fontRef>
-        </p:style>
-      </p:sp>
-      <p:sp>
-        <p:nvSpPr>
-          <p:cNvPr id="10" name="Rectangle 9"/>
-          <p:cNvSpPr/>
-          <p:nvPr/>
-        </p:nvSpPr>
-        <p:spPr>
-          <a:xfrm>
-            <a:off x="10585827" y="609600"/>
-            <a:ext cx="1602997" cy="1368198"/>
-          </a:xfrm>
-          <a:prstGeom prst="rect">
-            <a:avLst/>
-          </a:prstGeom>
-          <a:solidFill>
-            <a:schemeClr val="accent1"/>
-          </a:solidFill>
-          <a:ln>
-            <a:noFill/>
-          </a:ln>
-        </p:spPr>
-        <p:style>
-          <a:lnRef idx="2">
-            <a:schemeClr val="accent1">
-              <a:shade val="50000"/>
-            </a:schemeClr>
-          </a:lnRef>
-          <a:fillRef idx="1">
-            <a:schemeClr val="accent1"/>
-          </a:fillRef>
-          <a:effectRef idx="0">
-            <a:schemeClr val="accent1"/>
-          </a:effectRef>
-          <a:fontRef idx="minor">
-            <a:schemeClr val="lt1"/>
-          </a:fontRef>
-        </p:style>
-      </p:sp>
       <p:sp>
         <p:nvSpPr>
           <p:cNvPr id="2" name="Title 1"/>
@@ -3956,11 +2972,7 @@
         <p:spPr/>
         <p:txBody>
           <a:bodyPr/>
-          <a:lstStyle>
-            <a:lvl1pPr algn="r">
-              <a:defRPr/>
-            </a:lvl1pPr>
-          </a:lstStyle>
+          <a:lstStyle/>
           <a:p>
             <a:r>
               <a:rPr lang="en-US"/>
@@ -3982,7 +2994,7 @@
         </p:nvSpPr>
         <p:spPr/>
         <p:txBody>
-          <a:bodyPr vert="eaVert"/>
+          <a:bodyPr vert="eaVert" anchor="t" anchorCtr="0"/>
           <a:lstStyle/>
           <a:p>
             <a:pPr lvl="0"/>
@@ -4039,7 +3051,7 @@
           <a:p>
             <a:fld id="{62D5F05B-F1CA-41F1-9D15-228D0FEFC4A2}" type="datetimeFigureOut">
               <a:rPr lang="en-US" smtClean="0"/>
-              <a:t>11/4/2025</a:t>
+              <a:t>11/11/2025</a:t>
             </a:fld>
             <a:endParaRPr lang="en-US"/>
           </a:p>
@@ -4090,7 +3102,7 @@
     </p:spTree>
     <p:extLst>
       <p:ext uri="{BB962C8B-B14F-4D97-AF65-F5344CB8AC3E}">
-        <p14:creationId xmlns:p14="http://schemas.microsoft.com/office/powerpoint/2010/main" val="3357898306"/>
+        <p14:creationId xmlns:p14="http://schemas.microsoft.com/office/powerpoint/2010/main" val="1036406142"/>
       </p:ext>
     </p:extLst>
   </p:cSld>
@@ -4119,85 +3131,6 @@
       </p:grpSpPr>
       <p:sp>
         <p:nvSpPr>
-          <p:cNvPr id="7" name="Rectangle 6"/>
-          <p:cNvSpPr/>
-          <p:nvPr/>
-        </p:nvSpPr>
-        <p:spPr bwMode="ltGray">
-          <a:xfrm rot="5400000">
-            <a:off x="8116207" y="1869395"/>
-            <a:ext cx="5106988" cy="1368198"/>
-          </a:xfrm>
-          <a:prstGeom prst="rect">
-            <a:avLst/>
-          </a:prstGeom>
-          <a:solidFill>
-            <a:schemeClr val="bg1">
-              <a:lumMod val="85000"/>
-              <a:lumOff val="15000"/>
-            </a:schemeClr>
-          </a:solidFill>
-          <a:ln>
-            <a:noFill/>
-          </a:ln>
-        </p:spPr>
-        <p:style>
-          <a:lnRef idx="2">
-            <a:schemeClr val="accent1">
-              <a:shade val="50000"/>
-            </a:schemeClr>
-          </a:lnRef>
-          <a:fillRef idx="1">
-            <a:schemeClr val="accent1"/>
-          </a:fillRef>
-          <a:effectRef idx="0">
-            <a:schemeClr val="accent1"/>
-          </a:effectRef>
-          <a:fontRef idx="minor">
-            <a:schemeClr val="lt1"/>
-          </a:fontRef>
-        </p:style>
-      </p:sp>
-      <p:sp>
-        <p:nvSpPr>
-          <p:cNvPr id="8" name="Rectangle 7"/>
-          <p:cNvSpPr/>
-          <p:nvPr/>
-        </p:nvSpPr>
-        <p:spPr>
-          <a:xfrm rot="5400000">
-            <a:off x="9868202" y="5372403"/>
-            <a:ext cx="1602997" cy="1368198"/>
-          </a:xfrm>
-          <a:prstGeom prst="rect">
-            <a:avLst/>
-          </a:prstGeom>
-          <a:solidFill>
-            <a:schemeClr val="accent1"/>
-          </a:solidFill>
-          <a:ln>
-            <a:noFill/>
-          </a:ln>
-        </p:spPr>
-        <p:style>
-          <a:lnRef idx="2">
-            <a:schemeClr val="accent1">
-              <a:shade val="50000"/>
-            </a:schemeClr>
-          </a:lnRef>
-          <a:fillRef idx="1">
-            <a:schemeClr val="accent1"/>
-          </a:fillRef>
-          <a:effectRef idx="0">
-            <a:schemeClr val="accent1"/>
-          </a:effectRef>
-          <a:fontRef idx="minor">
-            <a:schemeClr val="lt1"/>
-          </a:fontRef>
-        </p:style>
-      </p:sp>
-      <p:sp>
-        <p:nvSpPr>
           <p:cNvPr id="2" name="Vertical Title 1"/>
           <p:cNvSpPr>
             <a:spLocks noGrp="1"/>
@@ -4208,12 +3141,12 @@
         </p:nvSpPr>
         <p:spPr>
           <a:xfrm>
-            <a:off x="10129231" y="609597"/>
-            <a:ext cx="1073802" cy="4353760"/>
+            <a:off x="8304212" y="430213"/>
+            <a:ext cx="1752601" cy="5826125"/>
           </a:xfrm>
         </p:spPr>
         <p:txBody>
-          <a:bodyPr vert="eaVert"/>
+          <a:bodyPr vert="eaVert" anchor="b" anchorCtr="0"/>
           <a:lstStyle/>
           <a:p>
             <a:r>
@@ -4236,8 +3169,8 @@
         </p:nvSpPr>
         <p:spPr>
           <a:xfrm>
-            <a:off x="680322" y="609597"/>
-            <a:ext cx="8870004" cy="5326589"/>
+            <a:off x="652463" y="887414"/>
+            <a:ext cx="7423149" cy="5368924"/>
           </a:xfrm>
         </p:spPr>
         <p:txBody>
@@ -4291,19 +3224,14 @@
             <p:ph type="dt" sz="half" idx="10"/>
           </p:nvPr>
         </p:nvSpPr>
-        <p:spPr>
-          <a:xfrm>
-            <a:off x="6807126" y="5936187"/>
-            <a:ext cx="2743200" cy="365125"/>
-          </a:xfrm>
-        </p:spPr>
+        <p:spPr/>
         <p:txBody>
           <a:bodyPr/>
           <a:lstStyle/>
           <a:p>
             <a:fld id="{62D5F05B-F1CA-41F1-9D15-228D0FEFC4A2}" type="datetimeFigureOut">
               <a:rPr lang="en-US" smtClean="0"/>
-              <a:t>11/4/2025</a:t>
+              <a:t>11/11/2025</a:t>
             </a:fld>
             <a:endParaRPr lang="en-US"/>
           </a:p>
@@ -4319,12 +3247,7 @@
             <p:ph type="ftr" sz="quarter" idx="11"/>
           </p:nvPr>
         </p:nvSpPr>
-        <p:spPr>
-          <a:xfrm>
-            <a:off x="680321" y="5936188"/>
-            <a:ext cx="6126805" cy="365125"/>
-          </a:xfrm>
-        </p:spPr>
+        <p:spPr/>
         <p:txBody>
           <a:bodyPr/>
           <a:lstStyle/>
@@ -4343,19 +3266,10 @@
             <p:ph type="sldNum" sz="quarter" idx="12"/>
           </p:nvPr>
         </p:nvSpPr>
-        <p:spPr>
-          <a:xfrm>
-            <a:off x="10097550" y="5398633"/>
-            <a:ext cx="1154151" cy="1090789"/>
-          </a:xfrm>
-        </p:spPr>
-        <p:txBody>
-          <a:bodyPr anchor="t"/>
-          <a:lstStyle>
-            <a:lvl1pPr algn="ctr">
-              <a:defRPr/>
-            </a:lvl1pPr>
-          </a:lstStyle>
+        <p:spPr/>
+        <p:txBody>
+          <a:bodyPr/>
+          <a:lstStyle/>
           <a:p>
             <a:fld id="{9D8583BA-196A-4CCB-B8E2-286CC463FAC2}" type="slidenum">
               <a:rPr lang="en-US" smtClean="0"/>
@@ -4368,7 +3282,7 @@
     </p:spTree>
     <p:extLst>
       <p:ext uri="{BB962C8B-B14F-4D97-AF65-F5344CB8AC3E}">
-        <p14:creationId xmlns:p14="http://schemas.microsoft.com/office/powerpoint/2010/main" val="3052305081"/>
+        <p14:creationId xmlns:p14="http://schemas.microsoft.com/office/powerpoint/2010/main" val="1974047493"/>
       </p:ext>
     </p:extLst>
   </p:cSld>
@@ -4395,145 +3309,6 @@
           <a:chExt cx="0" cy="0"/>
         </a:xfrm>
       </p:grpSpPr>
-      <p:pic>
-        <p:nvPicPr>
-          <p:cNvPr id="15" name="Picture 14" descr="HD-ShadowLong.png"/>
-          <p:cNvPicPr>
-            <a:picLocks noChangeAspect="1"/>
-          </p:cNvPicPr>
-          <p:nvPr/>
-        </p:nvPicPr>
-        <p:blipFill>
-          <a:blip r:embed="rId2">
-            <a:extLst>
-              <a:ext uri="{28A0092B-C50C-407E-A947-70E740481C1C}">
-                <a14:useLocalDpi xmlns:a14="http://schemas.microsoft.com/office/drawing/2010/main" val="0"/>
-              </a:ext>
-            </a:extLst>
-          </a:blip>
-          <a:stretch>
-            <a:fillRect/>
-          </a:stretch>
-        </p:blipFill>
-        <p:spPr>
-          <a:xfrm>
-            <a:off x="1" y="1970240"/>
-            <a:ext cx="10437812" cy="321164"/>
-          </a:xfrm>
-          <a:prstGeom prst="rect">
-            <a:avLst/>
-          </a:prstGeom>
-        </p:spPr>
-      </p:pic>
-      <p:pic>
-        <p:nvPicPr>
-          <p:cNvPr id="16" name="Picture 15" descr="HD-ShadowShort.png"/>
-          <p:cNvPicPr>
-            <a:picLocks noChangeAspect="1"/>
-          </p:cNvPicPr>
-          <p:nvPr/>
-        </p:nvPicPr>
-        <p:blipFill>
-          <a:blip r:embed="rId3">
-            <a:extLst>
-              <a:ext uri="{28A0092B-C50C-407E-A947-70E740481C1C}">
-                <a14:useLocalDpi xmlns:a14="http://schemas.microsoft.com/office/drawing/2010/main" val="0"/>
-              </a:ext>
-            </a:extLst>
-          </a:blip>
-          <a:stretch>
-            <a:fillRect/>
-          </a:stretch>
-        </p:blipFill>
-        <p:spPr>
-          <a:xfrm>
-            <a:off x="10585826" y="1971234"/>
-            <a:ext cx="1602997" cy="144270"/>
-          </a:xfrm>
-          <a:prstGeom prst="rect">
-            <a:avLst/>
-          </a:prstGeom>
-        </p:spPr>
-      </p:pic>
-      <p:sp>
-        <p:nvSpPr>
-          <p:cNvPr id="17" name="Rectangle 16"/>
-          <p:cNvSpPr/>
-          <p:nvPr/>
-        </p:nvSpPr>
-        <p:spPr bwMode="ltGray">
-          <a:xfrm>
-            <a:off x="0" y="609600"/>
-            <a:ext cx="10437812" cy="1368198"/>
-          </a:xfrm>
-          <a:prstGeom prst="rect">
-            <a:avLst/>
-          </a:prstGeom>
-          <a:solidFill>
-            <a:schemeClr val="bg1">
-              <a:lumMod val="85000"/>
-              <a:lumOff val="15000"/>
-            </a:schemeClr>
-          </a:solidFill>
-          <a:ln>
-            <a:noFill/>
-          </a:ln>
-        </p:spPr>
-        <p:style>
-          <a:lnRef idx="2">
-            <a:schemeClr val="accent1">
-              <a:shade val="50000"/>
-            </a:schemeClr>
-          </a:lnRef>
-          <a:fillRef idx="1">
-            <a:schemeClr val="accent1"/>
-          </a:fillRef>
-          <a:effectRef idx="0">
-            <a:schemeClr val="accent1"/>
-          </a:effectRef>
-          <a:fontRef idx="minor">
-            <a:schemeClr val="lt1"/>
-          </a:fontRef>
-        </p:style>
-      </p:sp>
-      <p:sp>
-        <p:nvSpPr>
-          <p:cNvPr id="18" name="Rectangle 17"/>
-          <p:cNvSpPr/>
-          <p:nvPr/>
-        </p:nvSpPr>
-        <p:spPr>
-          <a:xfrm>
-            <a:off x="10585827" y="609600"/>
-            <a:ext cx="1602997" cy="1368198"/>
-          </a:xfrm>
-          <a:prstGeom prst="rect">
-            <a:avLst/>
-          </a:prstGeom>
-          <a:solidFill>
-            <a:schemeClr val="accent1"/>
-          </a:solidFill>
-          <a:ln>
-            <a:noFill/>
-          </a:ln>
-        </p:spPr>
-        <p:style>
-          <a:lnRef idx="2">
-            <a:schemeClr val="accent1">
-              <a:shade val="50000"/>
-            </a:schemeClr>
-          </a:lnRef>
-          <a:fillRef idx="1">
-            <a:schemeClr val="accent1"/>
-          </a:fillRef>
-          <a:effectRef idx="0">
-            <a:schemeClr val="accent1"/>
-          </a:effectRef>
-          <a:fontRef idx="minor">
-            <a:schemeClr val="lt1"/>
-          </a:fontRef>
-        </p:style>
-      </p:sp>
       <p:sp>
         <p:nvSpPr>
           <p:cNvPr id="2" name="Title 1"/>
@@ -4611,7 +3386,7 @@
       </p:sp>
       <p:sp>
         <p:nvSpPr>
-          <p:cNvPr id="4" name="Date Placeholder 3"/>
+          <p:cNvPr id="7" name="Date Placeholder 3"/>
           <p:cNvSpPr>
             <a:spLocks noGrp="1"/>
           </p:cNvSpPr>
@@ -4626,7 +3401,7 @@
           <a:p>
             <a:fld id="{62D5F05B-F1CA-41F1-9D15-228D0FEFC4A2}" type="datetimeFigureOut">
               <a:rPr lang="en-US" smtClean="0"/>
-              <a:t>11/4/2025</a:t>
+              <a:t>11/11/2025</a:t>
             </a:fld>
             <a:endParaRPr lang="en-US"/>
           </a:p>
@@ -4677,7 +3452,7 @@
     </p:spTree>
     <p:extLst>
       <p:ext uri="{BB962C8B-B14F-4D97-AF65-F5344CB8AC3E}">
-        <p14:creationId xmlns:p14="http://schemas.microsoft.com/office/powerpoint/2010/main" val="571314699"/>
+        <p14:creationId xmlns:p14="http://schemas.microsoft.com/office/powerpoint/2010/main" val="1908762866"/>
       </p:ext>
     </p:extLst>
   </p:cSld>
@@ -4704,213 +3479,71 @@
           <a:chExt cx="0" cy="0"/>
         </a:xfrm>
       </p:grpSpPr>
-      <p:pic>
-        <p:nvPicPr>
-          <p:cNvPr id="7" name="Picture 6" descr="HD-ShadowLong.png"/>
-          <p:cNvPicPr>
-            <a:picLocks noChangeAspect="1"/>
-          </p:cNvPicPr>
-          <p:nvPr/>
-        </p:nvPicPr>
-        <p:blipFill>
-          <a:blip r:embed="rId2">
-            <a:extLst>
-              <a:ext uri="{28A0092B-C50C-407E-A947-70E740481C1C}">
-                <a14:useLocalDpi xmlns:a14="http://schemas.microsoft.com/office/drawing/2010/main" val="0"/>
-              </a:ext>
-            </a:extLst>
-          </a:blip>
-          <a:stretch>
-            <a:fillRect/>
-          </a:stretch>
-        </p:blipFill>
+      <p:sp>
+        <p:nvSpPr>
+          <p:cNvPr id="2" name="Title 1"/>
+          <p:cNvSpPr>
+            <a:spLocks noGrp="1"/>
+          </p:cNvSpPr>
+          <p:nvPr>
+            <p:ph type="title"/>
+          </p:nvPr>
+        </p:nvSpPr>
         <p:spPr>
           <a:xfrm>
-            <a:off x="-1" y="4086907"/>
-            <a:ext cx="10437812" cy="321164"/>
+            <a:off x="1154956" y="2861733"/>
+            <a:ext cx="8825657" cy="1915647"/>
           </a:xfrm>
-          <a:prstGeom prst="rect">
-            <a:avLst/>
-          </a:prstGeom>
         </p:spPr>
-      </p:pic>
-      <p:pic>
-        <p:nvPicPr>
-          <p:cNvPr id="8" name="Picture 7" descr="HD-ShadowShort.png"/>
-          <p:cNvPicPr>
-            <a:picLocks noChangeAspect="1"/>
-          </p:cNvPicPr>
-          <p:nvPr/>
-        </p:nvPicPr>
-        <p:blipFill>
-          <a:blip r:embed="rId3">
-            <a:extLst>
-              <a:ext uri="{28A0092B-C50C-407E-A947-70E740481C1C}">
-                <a14:useLocalDpi xmlns:a14="http://schemas.microsoft.com/office/drawing/2010/main" val="0"/>
-              </a:ext>
-            </a:extLst>
-          </a:blip>
-          <a:stretch>
-            <a:fillRect/>
-          </a:stretch>
-        </p:blipFill>
+        <p:txBody>
+          <a:bodyPr anchor="b"/>
+          <a:lstStyle>
+            <a:lvl1pPr algn="l">
+              <a:defRPr sz="4000" b="0" cap="none"/>
+            </a:lvl1pPr>
+          </a:lstStyle>
+          <a:p>
+            <a:r>
+              <a:rPr lang="en-US"/>
+              <a:t>Click to edit Master title style</a:t>
+            </a:r>
+            <a:endParaRPr lang="en-US" dirty="0"/>
+          </a:p>
+        </p:txBody>
+      </p:sp>
+      <p:sp>
+        <p:nvSpPr>
+          <p:cNvPr id="3" name="Text Placeholder 2"/>
+          <p:cNvSpPr>
+            <a:spLocks noGrp="1"/>
+          </p:cNvSpPr>
+          <p:nvPr>
+            <p:ph type="body" idx="1"/>
+          </p:nvPr>
+        </p:nvSpPr>
         <p:spPr>
           <a:xfrm>
-            <a:off x="10585824" y="4087901"/>
-            <a:ext cx="1602997" cy="144270"/>
-          </a:xfrm>
-          <a:prstGeom prst="rect">
-            <a:avLst/>
-          </a:prstGeom>
-        </p:spPr>
-      </p:pic>
-      <p:sp>
-        <p:nvSpPr>
-          <p:cNvPr id="9" name="Rectangle 8"/>
-          <p:cNvSpPr/>
-          <p:nvPr/>
-        </p:nvSpPr>
-        <p:spPr bwMode="ltGray">
-          <a:xfrm>
-            <a:off x="-2" y="2726267"/>
-            <a:ext cx="10437812" cy="1368198"/>
-          </a:xfrm>
-          <a:prstGeom prst="rect">
-            <a:avLst/>
-          </a:prstGeom>
-          <a:solidFill>
-            <a:schemeClr val="bg1">
-              <a:lumMod val="85000"/>
-              <a:lumOff val="15000"/>
-            </a:schemeClr>
-          </a:solidFill>
-          <a:ln>
-            <a:noFill/>
-          </a:ln>
-        </p:spPr>
-        <p:style>
-          <a:lnRef idx="2">
-            <a:schemeClr val="accent1">
-              <a:shade val="50000"/>
-            </a:schemeClr>
-          </a:lnRef>
-          <a:fillRef idx="1">
-            <a:schemeClr val="accent1"/>
-          </a:fillRef>
-          <a:effectRef idx="0">
-            <a:schemeClr val="accent1"/>
-          </a:effectRef>
-          <a:fontRef idx="minor">
-            <a:schemeClr val="lt1"/>
-          </a:fontRef>
-        </p:style>
-      </p:sp>
-      <p:sp>
-        <p:nvSpPr>
-          <p:cNvPr id="10" name="Rectangle 9"/>
-          <p:cNvSpPr/>
-          <p:nvPr/>
-        </p:nvSpPr>
-        <p:spPr>
-          <a:xfrm>
-            <a:off x="10585825" y="2726267"/>
-            <a:ext cx="1602997" cy="1368198"/>
-          </a:xfrm>
-          <a:prstGeom prst="rect">
-            <a:avLst/>
-          </a:prstGeom>
-          <a:solidFill>
-            <a:schemeClr val="accent1"/>
-          </a:solidFill>
-          <a:ln>
-            <a:noFill/>
-          </a:ln>
-        </p:spPr>
-        <p:style>
-          <a:lnRef idx="2">
-            <a:schemeClr val="accent1">
-              <a:shade val="50000"/>
-            </a:schemeClr>
-          </a:lnRef>
-          <a:fillRef idx="1">
-            <a:schemeClr val="accent1"/>
-          </a:fillRef>
-          <a:effectRef idx="0">
-            <a:schemeClr val="accent1"/>
-          </a:effectRef>
-          <a:fontRef idx="minor">
-            <a:schemeClr val="lt1"/>
-          </a:fontRef>
-        </p:style>
-      </p:sp>
-      <p:sp>
-        <p:nvSpPr>
-          <p:cNvPr id="2" name="Title 1"/>
-          <p:cNvSpPr>
-            <a:spLocks noGrp="1"/>
-          </p:cNvSpPr>
-          <p:nvPr>
-            <p:ph type="title"/>
-          </p:nvPr>
-        </p:nvSpPr>
-        <p:spPr>
-          <a:xfrm>
-            <a:off x="680322" y="2869895"/>
-            <a:ext cx="9613860" cy="1090788"/>
+            <a:off x="1154955" y="4777381"/>
+            <a:ext cx="8825658" cy="860400"/>
           </a:xfrm>
         </p:spPr>
         <p:txBody>
-          <a:bodyPr anchor="ctr">
-            <a:normAutofit/>
-          </a:bodyPr>
+          <a:bodyPr anchor="t"/>
           <a:lstStyle>
-            <a:lvl1pPr algn="r">
-              <a:defRPr sz="3600"/>
-            </a:lvl1pPr>
-          </a:lstStyle>
-          <a:p>
-            <a:r>
-              <a:rPr lang="en-US"/>
-              <a:t>Click to edit Master title style</a:t>
-            </a:r>
-            <a:endParaRPr lang="en-US" dirty="0"/>
-          </a:p>
-        </p:txBody>
-      </p:sp>
-      <p:sp>
-        <p:nvSpPr>
-          <p:cNvPr id="3" name="Text Placeholder 2"/>
-          <p:cNvSpPr>
-            <a:spLocks noGrp="1"/>
-          </p:cNvSpPr>
-          <p:nvPr>
-            <p:ph type="body" idx="1"/>
-          </p:nvPr>
-        </p:nvSpPr>
-        <p:spPr>
-          <a:xfrm>
-            <a:off x="680322" y="4232171"/>
-            <a:ext cx="9613860" cy="1704017"/>
-          </a:xfrm>
-        </p:spPr>
-        <p:txBody>
-          <a:bodyPr>
-            <a:normAutofit/>
-          </a:bodyPr>
-          <a:lstStyle>
-            <a:lvl1pPr marL="0" indent="0" algn="r">
-              <a:buNone/>
-              <a:defRPr sz="2000">
+            <a:lvl1pPr marL="0" indent="0" algn="l">
+              <a:buNone/>
+              <a:defRPr sz="2000" cap="all">
                 <a:solidFill>
-                  <a:schemeClr val="tx1">
-                    <a:tint val="75000"/>
+                  <a:schemeClr val="bg2">
+                    <a:lumMod val="40000"/>
+                    <a:lumOff val="60000"/>
                   </a:schemeClr>
                 </a:solidFill>
               </a:defRPr>
             </a:lvl1pPr>
             <a:lvl2pPr marL="457200" indent="0">
               <a:buNone/>
-              <a:defRPr sz="2000">
+              <a:defRPr sz="1800">
                 <a:solidFill>
                   <a:schemeClr val="tx1">
                     <a:tint val="75000"/>
@@ -4920,7 +3553,7 @@
             </a:lvl2pPr>
             <a:lvl3pPr marL="914400" indent="0">
               <a:buNone/>
-              <a:defRPr sz="1800">
+              <a:defRPr sz="1600">
                 <a:solidFill>
                   <a:schemeClr val="tx1">
                     <a:tint val="75000"/>
@@ -4930,7 +3563,7 @@
             </a:lvl3pPr>
             <a:lvl4pPr marL="1371600" indent="0">
               <a:buNone/>
-              <a:defRPr sz="1600">
+              <a:defRPr sz="1400">
                 <a:solidFill>
                   <a:schemeClr val="tx1">
                     <a:tint val="75000"/>
@@ -4940,7 +3573,7 @@
             </a:lvl4pPr>
             <a:lvl5pPr marL="1828800" indent="0">
               <a:buNone/>
-              <a:defRPr sz="1600">
+              <a:defRPr sz="1400">
                 <a:solidFill>
                   <a:schemeClr val="tx1">
                     <a:tint val="75000"/>
@@ -4950,7 +3583,7 @@
             </a:lvl5pPr>
             <a:lvl6pPr marL="2286000" indent="0">
               <a:buNone/>
-              <a:defRPr sz="1600">
+              <a:defRPr sz="1400">
                 <a:solidFill>
                   <a:schemeClr val="tx1">
                     <a:tint val="75000"/>
@@ -4960,7 +3593,7 @@
             </a:lvl6pPr>
             <a:lvl7pPr marL="2743200" indent="0">
               <a:buNone/>
-              <a:defRPr sz="1600">
+              <a:defRPr sz="1400">
                 <a:solidFill>
                   <a:schemeClr val="tx1">
                     <a:tint val="75000"/>
@@ -4970,7 +3603,7 @@
             </a:lvl7pPr>
             <a:lvl8pPr marL="3200400" indent="0">
               <a:buNone/>
-              <a:defRPr sz="1600">
+              <a:defRPr sz="1400">
                 <a:solidFill>
                   <a:schemeClr val="tx1">
                     <a:tint val="75000"/>
@@ -4980,7 +3613,7 @@
             </a:lvl8pPr>
             <a:lvl9pPr marL="3657600" indent="0">
               <a:buNone/>
-              <a:defRPr sz="1600">
+              <a:defRPr sz="1400">
                 <a:solidFill>
                   <a:schemeClr val="tx1">
                     <a:tint val="75000"/>
@@ -5015,7 +3648,7 @@
           <a:p>
             <a:fld id="{62D5F05B-F1CA-41F1-9D15-228D0FEFC4A2}" type="datetimeFigureOut">
               <a:rPr lang="en-US" smtClean="0"/>
-              <a:t>11/4/2025</a:t>
+              <a:t>11/11/2025</a:t>
             </a:fld>
             <a:endParaRPr lang="en-US"/>
           </a:p>
@@ -5050,12 +3683,7 @@
             <p:ph type="sldNum" sz="quarter" idx="12"/>
           </p:nvPr>
         </p:nvSpPr>
-        <p:spPr>
-          <a:xfrm>
-            <a:off x="10729455" y="2869895"/>
-            <a:ext cx="1154151" cy="1090789"/>
-          </a:xfrm>
-        </p:spPr>
+        <p:spPr/>
         <p:txBody>
           <a:bodyPr/>
           <a:lstStyle/>
@@ -5071,7 +3699,7 @@
     </p:spTree>
     <p:extLst>
       <p:ext uri="{BB962C8B-B14F-4D97-AF65-F5344CB8AC3E}">
-        <p14:creationId xmlns:p14="http://schemas.microsoft.com/office/powerpoint/2010/main" val="3062581448"/>
+        <p14:creationId xmlns:p14="http://schemas.microsoft.com/office/powerpoint/2010/main" val="2578451042"/>
       </p:ext>
     </p:extLst>
   </p:cSld>
@@ -5098,244 +3726,165 @@
           <a:chExt cx="0" cy="0"/>
         </a:xfrm>
       </p:grpSpPr>
-      <p:pic>
-        <p:nvPicPr>
-          <p:cNvPr id="8" name="Picture 7" descr="HD-ShadowLong.png"/>
-          <p:cNvPicPr>
-            <a:picLocks noChangeAspect="1"/>
-          </p:cNvPicPr>
-          <p:nvPr/>
-        </p:nvPicPr>
-        <p:blipFill>
-          <a:blip r:embed="rId2">
-            <a:extLst>
-              <a:ext uri="{28A0092B-C50C-407E-A947-70E740481C1C}">
-                <a14:useLocalDpi xmlns:a14="http://schemas.microsoft.com/office/drawing/2010/main" val="0"/>
-              </a:ext>
-            </a:extLst>
-          </a:blip>
-          <a:stretch>
-            <a:fillRect/>
-          </a:stretch>
-        </p:blipFill>
+      <p:sp>
+        <p:nvSpPr>
+          <p:cNvPr id="2" name="Title 1"/>
+          <p:cNvSpPr>
+            <a:spLocks noGrp="1"/>
+          </p:cNvSpPr>
+          <p:nvPr>
+            <p:ph type="title"/>
+          </p:nvPr>
+        </p:nvSpPr>
+        <p:spPr/>
+        <p:txBody>
+          <a:bodyPr/>
+          <a:lstStyle/>
+          <a:p>
+            <a:r>
+              <a:rPr lang="en-US"/>
+              <a:t>Click to edit Master title style</a:t>
+            </a:r>
+            <a:endParaRPr lang="en-US" dirty="0"/>
+          </a:p>
+        </p:txBody>
+      </p:sp>
+      <p:sp>
+        <p:nvSpPr>
+          <p:cNvPr id="3" name="Content Placeholder 2"/>
+          <p:cNvSpPr>
+            <a:spLocks noGrp="1"/>
+          </p:cNvSpPr>
+          <p:nvPr>
+            <p:ph sz="half" idx="1"/>
+          </p:nvPr>
+        </p:nvSpPr>
         <p:spPr>
           <a:xfrm>
-            <a:off x="1" y="1970240"/>
-            <a:ext cx="10437812" cy="321164"/>
+            <a:off x="1103312" y="2060575"/>
+            <a:ext cx="4396339" cy="4195763"/>
           </a:xfrm>
-          <a:prstGeom prst="rect">
-            <a:avLst/>
-          </a:prstGeom>
         </p:spPr>
-      </p:pic>
-      <p:pic>
-        <p:nvPicPr>
-          <p:cNvPr id="9" name="Picture 8" descr="HD-ShadowShort.png"/>
-          <p:cNvPicPr>
-            <a:picLocks noChangeAspect="1"/>
-          </p:cNvPicPr>
-          <p:nvPr/>
-        </p:nvPicPr>
-        <p:blipFill>
-          <a:blip r:embed="rId3">
-            <a:extLst>
-              <a:ext uri="{28A0092B-C50C-407E-A947-70E740481C1C}">
-                <a14:useLocalDpi xmlns:a14="http://schemas.microsoft.com/office/drawing/2010/main" val="0"/>
-              </a:ext>
-            </a:extLst>
-          </a:blip>
-          <a:stretch>
-            <a:fillRect/>
-          </a:stretch>
-        </p:blipFill>
+        <p:txBody>
+          <a:bodyPr>
+            <a:normAutofit/>
+          </a:bodyPr>
+          <a:lstStyle>
+            <a:lvl1pPr>
+              <a:defRPr sz="1800"/>
+            </a:lvl1pPr>
+            <a:lvl2pPr>
+              <a:defRPr sz="1600"/>
+            </a:lvl2pPr>
+            <a:lvl3pPr>
+              <a:defRPr sz="1400"/>
+            </a:lvl3pPr>
+            <a:lvl4pPr>
+              <a:defRPr sz="1200"/>
+            </a:lvl4pPr>
+            <a:lvl5pPr>
+              <a:defRPr sz="1200"/>
+            </a:lvl5pPr>
+            <a:lvl6pPr>
+              <a:defRPr sz="1200"/>
+            </a:lvl6pPr>
+            <a:lvl7pPr>
+              <a:defRPr sz="1200"/>
+            </a:lvl7pPr>
+            <a:lvl8pPr>
+              <a:defRPr sz="1200"/>
+            </a:lvl8pPr>
+            <a:lvl9pPr>
+              <a:defRPr sz="1200"/>
+            </a:lvl9pPr>
+          </a:lstStyle>
+          <a:p>
+            <a:pPr lvl="0"/>
+            <a:r>
+              <a:rPr lang="en-US"/>
+              <a:t>Click to edit Master text styles</a:t>
+            </a:r>
+          </a:p>
+          <a:p>
+            <a:pPr lvl="1"/>
+            <a:r>
+              <a:rPr lang="en-US"/>
+              <a:t>Second level</a:t>
+            </a:r>
+          </a:p>
+          <a:p>
+            <a:pPr lvl="2"/>
+            <a:r>
+              <a:rPr lang="en-US"/>
+              <a:t>Third level</a:t>
+            </a:r>
+          </a:p>
+          <a:p>
+            <a:pPr lvl="3"/>
+            <a:r>
+              <a:rPr lang="en-US"/>
+              <a:t>Fourth level</a:t>
+            </a:r>
+          </a:p>
+          <a:p>
+            <a:pPr lvl="4"/>
+            <a:r>
+              <a:rPr lang="en-US"/>
+              <a:t>Fifth level</a:t>
+            </a:r>
+            <a:endParaRPr lang="en-US" dirty="0"/>
+          </a:p>
+        </p:txBody>
+      </p:sp>
+      <p:sp>
+        <p:nvSpPr>
+          <p:cNvPr id="4" name="Content Placeholder 3"/>
+          <p:cNvSpPr>
+            <a:spLocks noGrp="1"/>
+          </p:cNvSpPr>
+          <p:nvPr>
+            <p:ph sz="half" idx="2"/>
+          </p:nvPr>
+        </p:nvSpPr>
         <p:spPr>
           <a:xfrm>
-            <a:off x="10585826" y="1971234"/>
-            <a:ext cx="1602997" cy="144270"/>
-          </a:xfrm>
-          <a:prstGeom prst="rect">
-            <a:avLst/>
-          </a:prstGeom>
-        </p:spPr>
-      </p:pic>
-      <p:sp>
-        <p:nvSpPr>
-          <p:cNvPr id="10" name="Rectangle 9"/>
-          <p:cNvSpPr/>
-          <p:nvPr/>
-        </p:nvSpPr>
-        <p:spPr bwMode="ltGray">
-          <a:xfrm>
-            <a:off x="0" y="609600"/>
-            <a:ext cx="10437812" cy="1368198"/>
-          </a:xfrm>
-          <a:prstGeom prst="rect">
-            <a:avLst/>
-          </a:prstGeom>
-          <a:solidFill>
-            <a:schemeClr val="bg1">
-              <a:lumMod val="85000"/>
-              <a:lumOff val="15000"/>
-            </a:schemeClr>
-          </a:solidFill>
-          <a:ln>
-            <a:noFill/>
-          </a:ln>
-        </p:spPr>
-        <p:style>
-          <a:lnRef idx="2">
-            <a:schemeClr val="accent1">
-              <a:shade val="50000"/>
-            </a:schemeClr>
-          </a:lnRef>
-          <a:fillRef idx="1">
-            <a:schemeClr val="accent1"/>
-          </a:fillRef>
-          <a:effectRef idx="0">
-            <a:schemeClr val="accent1"/>
-          </a:effectRef>
-          <a:fontRef idx="minor">
-            <a:schemeClr val="lt1"/>
-          </a:fontRef>
-        </p:style>
-      </p:sp>
-      <p:sp>
-        <p:nvSpPr>
-          <p:cNvPr id="11" name="Rectangle 10"/>
-          <p:cNvSpPr/>
-          <p:nvPr/>
-        </p:nvSpPr>
-        <p:spPr>
-          <a:xfrm>
-            <a:off x="10585827" y="609600"/>
-            <a:ext cx="1602997" cy="1368198"/>
-          </a:xfrm>
-          <a:prstGeom prst="rect">
-            <a:avLst/>
-          </a:prstGeom>
-          <a:solidFill>
-            <a:schemeClr val="accent1"/>
-          </a:solidFill>
-          <a:ln>
-            <a:noFill/>
-          </a:ln>
-        </p:spPr>
-        <p:style>
-          <a:lnRef idx="2">
-            <a:schemeClr val="accent1">
-              <a:shade val="50000"/>
-            </a:schemeClr>
-          </a:lnRef>
-          <a:fillRef idx="1">
-            <a:schemeClr val="accent1"/>
-          </a:fillRef>
-          <a:effectRef idx="0">
-            <a:schemeClr val="accent1"/>
-          </a:effectRef>
-          <a:fontRef idx="minor">
-            <a:schemeClr val="lt1"/>
-          </a:fontRef>
-        </p:style>
-      </p:sp>
-      <p:sp>
-        <p:nvSpPr>
-          <p:cNvPr id="2" name="Title 1"/>
-          <p:cNvSpPr>
-            <a:spLocks noGrp="1"/>
-          </p:cNvSpPr>
-          <p:nvPr>
-            <p:ph type="title"/>
-          </p:nvPr>
-        </p:nvSpPr>
-        <p:spPr/>
-        <p:txBody>
-          <a:bodyPr/>
-          <a:lstStyle/>
-          <a:p>
-            <a:r>
-              <a:rPr lang="en-US"/>
-              <a:t>Click to edit Master title style</a:t>
-            </a:r>
-            <a:endParaRPr lang="en-US" dirty="0"/>
-          </a:p>
-        </p:txBody>
-      </p:sp>
-      <p:sp>
-        <p:nvSpPr>
-          <p:cNvPr id="3" name="Content Placeholder 2"/>
-          <p:cNvSpPr>
-            <a:spLocks noGrp="1"/>
-          </p:cNvSpPr>
-          <p:nvPr>
-            <p:ph sz="half" idx="1"/>
-          </p:nvPr>
-        </p:nvSpPr>
-        <p:spPr>
-          <a:xfrm>
-            <a:off x="680320" y="2336873"/>
-            <a:ext cx="4698358" cy="3599316"/>
+            <a:off x="5654493" y="2056092"/>
+            <a:ext cx="4396341" cy="4200245"/>
           </a:xfrm>
         </p:spPr>
         <p:txBody>
-          <a:bodyPr/>
-          <a:lstStyle/>
-          <a:p>
-            <a:pPr lvl="0"/>
-            <a:r>
-              <a:rPr lang="en-US"/>
-              <a:t>Click to edit Master text styles</a:t>
-            </a:r>
-          </a:p>
-          <a:p>
-            <a:pPr lvl="1"/>
-            <a:r>
-              <a:rPr lang="en-US"/>
-              <a:t>Second level</a:t>
-            </a:r>
-          </a:p>
-          <a:p>
-            <a:pPr lvl="2"/>
-            <a:r>
-              <a:rPr lang="en-US"/>
-              <a:t>Third level</a:t>
-            </a:r>
-          </a:p>
-          <a:p>
-            <a:pPr lvl="3"/>
-            <a:r>
-              <a:rPr lang="en-US"/>
-              <a:t>Fourth level</a:t>
-            </a:r>
-          </a:p>
-          <a:p>
-            <a:pPr lvl="4"/>
-            <a:r>
-              <a:rPr lang="en-US"/>
-              <a:t>Fifth level</a:t>
-            </a:r>
-            <a:endParaRPr lang="en-US" dirty="0"/>
-          </a:p>
-        </p:txBody>
-      </p:sp>
-      <p:sp>
-        <p:nvSpPr>
-          <p:cNvPr id="4" name="Content Placeholder 3"/>
-          <p:cNvSpPr>
-            <a:spLocks noGrp="1"/>
-          </p:cNvSpPr>
-          <p:nvPr>
-            <p:ph sz="half" idx="2"/>
-          </p:nvPr>
-        </p:nvSpPr>
-        <p:spPr>
-          <a:xfrm>
-            <a:off x="5594123" y="2336873"/>
-            <a:ext cx="4700058" cy="3599316"/>
-          </a:xfrm>
-        </p:spPr>
-        <p:txBody>
-          <a:bodyPr/>
-          <a:lstStyle/>
+          <a:bodyPr>
+            <a:normAutofit/>
+          </a:bodyPr>
+          <a:lstStyle>
+            <a:lvl1pPr>
+              <a:defRPr sz="1800"/>
+            </a:lvl1pPr>
+            <a:lvl2pPr>
+              <a:defRPr sz="1600"/>
+            </a:lvl2pPr>
+            <a:lvl3pPr>
+              <a:defRPr sz="1400"/>
+            </a:lvl3pPr>
+            <a:lvl4pPr>
+              <a:defRPr sz="1200"/>
+            </a:lvl4pPr>
+            <a:lvl5pPr>
+              <a:defRPr sz="1200"/>
+            </a:lvl5pPr>
+            <a:lvl6pPr>
+              <a:defRPr sz="1200"/>
+            </a:lvl6pPr>
+            <a:lvl7pPr>
+              <a:defRPr sz="1200"/>
+            </a:lvl7pPr>
+            <a:lvl8pPr>
+              <a:defRPr sz="1200"/>
+            </a:lvl8pPr>
+            <a:lvl9pPr>
+              <a:defRPr sz="1200"/>
+            </a:lvl9pPr>
+          </a:lstStyle>
           <a:p>
             <a:pPr lvl="0"/>
             <a:r>
@@ -5391,7 +3940,7 @@
           <a:p>
             <a:fld id="{62D5F05B-F1CA-41F1-9D15-228D0FEFC4A2}" type="datetimeFigureOut">
               <a:rPr lang="en-US" smtClean="0"/>
-              <a:t>11/4/2025</a:t>
+              <a:t>11/11/2025</a:t>
             </a:fld>
             <a:endParaRPr lang="en-US"/>
           </a:p>
@@ -5442,7 +3991,7 @@
     </p:spTree>
     <p:extLst>
       <p:ext uri="{BB962C8B-B14F-4D97-AF65-F5344CB8AC3E}">
-        <p14:creationId xmlns:p14="http://schemas.microsoft.com/office/powerpoint/2010/main" val="3336370418"/>
+        <p14:creationId xmlns:p14="http://schemas.microsoft.com/office/powerpoint/2010/main" val="3596483213"/>
       </p:ext>
     </p:extLst>
   </p:cSld>
@@ -5469,195 +4018,64 @@
           <a:chExt cx="0" cy="0"/>
         </a:xfrm>
       </p:grpSpPr>
-      <p:pic>
-        <p:nvPicPr>
-          <p:cNvPr id="10" name="Picture 9" descr="HD-ShadowLong.png"/>
-          <p:cNvPicPr>
-            <a:picLocks noChangeAspect="1"/>
-          </p:cNvPicPr>
-          <p:nvPr/>
-        </p:nvPicPr>
-        <p:blipFill>
-          <a:blip r:embed="rId2">
-            <a:extLst>
-              <a:ext uri="{28A0092B-C50C-407E-A947-70E740481C1C}">
-                <a14:useLocalDpi xmlns:a14="http://schemas.microsoft.com/office/drawing/2010/main" val="0"/>
-              </a:ext>
-            </a:extLst>
-          </a:blip>
-          <a:stretch>
-            <a:fillRect/>
-          </a:stretch>
-        </p:blipFill>
+      <p:sp>
+        <p:nvSpPr>
+          <p:cNvPr id="2" name="Title 1"/>
+          <p:cNvSpPr>
+            <a:spLocks noGrp="1"/>
+          </p:cNvSpPr>
+          <p:nvPr>
+            <p:ph type="title"/>
+          </p:nvPr>
+        </p:nvSpPr>
+        <p:spPr/>
+        <p:txBody>
+          <a:bodyPr/>
+          <a:lstStyle>
+            <a:lvl1pPr>
+              <a:defRPr/>
+            </a:lvl1pPr>
+          </a:lstStyle>
+          <a:p>
+            <a:r>
+              <a:rPr lang="en-US"/>
+              <a:t>Click to edit Master title style</a:t>
+            </a:r>
+            <a:endParaRPr lang="en-US" dirty="0"/>
+          </a:p>
+        </p:txBody>
+      </p:sp>
+      <p:sp>
+        <p:nvSpPr>
+          <p:cNvPr id="3" name="Text Placeholder 2"/>
+          <p:cNvSpPr>
+            <a:spLocks noGrp="1"/>
+          </p:cNvSpPr>
+          <p:nvPr>
+            <p:ph type="body" idx="1"/>
+          </p:nvPr>
+        </p:nvSpPr>
         <p:spPr>
           <a:xfrm>
-            <a:off x="1" y="1970240"/>
-            <a:ext cx="10437812" cy="321164"/>
-          </a:xfrm>
-          <a:prstGeom prst="rect">
-            <a:avLst/>
-          </a:prstGeom>
-        </p:spPr>
-      </p:pic>
-      <p:pic>
-        <p:nvPicPr>
-          <p:cNvPr id="11" name="Picture 10" descr="HD-ShadowShort.png"/>
-          <p:cNvPicPr>
-            <a:picLocks noChangeAspect="1"/>
-          </p:cNvPicPr>
-          <p:nvPr/>
-        </p:nvPicPr>
-        <p:blipFill>
-          <a:blip r:embed="rId3">
-            <a:extLst>
-              <a:ext uri="{28A0092B-C50C-407E-A947-70E740481C1C}">
-                <a14:useLocalDpi xmlns:a14="http://schemas.microsoft.com/office/drawing/2010/main" val="0"/>
-              </a:ext>
-            </a:extLst>
-          </a:blip>
-          <a:stretch>
-            <a:fillRect/>
-          </a:stretch>
-        </p:blipFill>
-        <p:spPr>
-          <a:xfrm>
-            <a:off x="10585826" y="1971234"/>
-            <a:ext cx="1602997" cy="144270"/>
-          </a:xfrm>
-          <a:prstGeom prst="rect">
-            <a:avLst/>
-          </a:prstGeom>
-        </p:spPr>
-      </p:pic>
-      <p:sp>
-        <p:nvSpPr>
-          <p:cNvPr id="12" name="Rectangle 11"/>
-          <p:cNvSpPr/>
-          <p:nvPr/>
-        </p:nvSpPr>
-        <p:spPr bwMode="ltGray">
-          <a:xfrm>
-            <a:off x="0" y="609600"/>
-            <a:ext cx="10437812" cy="1368198"/>
-          </a:xfrm>
-          <a:prstGeom prst="rect">
-            <a:avLst/>
-          </a:prstGeom>
-          <a:solidFill>
-            <a:schemeClr val="bg1">
-              <a:lumMod val="85000"/>
-              <a:lumOff val="15000"/>
-            </a:schemeClr>
-          </a:solidFill>
-          <a:ln>
-            <a:noFill/>
-          </a:ln>
-        </p:spPr>
-        <p:style>
-          <a:lnRef idx="2">
-            <a:schemeClr val="accent1">
-              <a:shade val="50000"/>
-            </a:schemeClr>
-          </a:lnRef>
-          <a:fillRef idx="1">
-            <a:schemeClr val="accent1"/>
-          </a:fillRef>
-          <a:effectRef idx="0">
-            <a:schemeClr val="accent1"/>
-          </a:effectRef>
-          <a:fontRef idx="minor">
-            <a:schemeClr val="lt1"/>
-          </a:fontRef>
-        </p:style>
-      </p:sp>
-      <p:sp>
-        <p:nvSpPr>
-          <p:cNvPr id="13" name="Rectangle 12"/>
-          <p:cNvSpPr/>
-          <p:nvPr/>
-        </p:nvSpPr>
-        <p:spPr>
-          <a:xfrm>
-            <a:off x="10585827" y="609600"/>
-            <a:ext cx="1602997" cy="1368198"/>
-          </a:xfrm>
-          <a:prstGeom prst="rect">
-            <a:avLst/>
-          </a:prstGeom>
-          <a:solidFill>
-            <a:schemeClr val="accent1"/>
-          </a:solidFill>
-          <a:ln>
-            <a:noFill/>
-          </a:ln>
-        </p:spPr>
-        <p:style>
-          <a:lnRef idx="2">
-            <a:schemeClr val="accent1">
-              <a:shade val="50000"/>
-            </a:schemeClr>
-          </a:lnRef>
-          <a:fillRef idx="1">
-            <a:schemeClr val="accent1"/>
-          </a:fillRef>
-          <a:effectRef idx="0">
-            <a:schemeClr val="accent1"/>
-          </a:effectRef>
-          <a:fontRef idx="minor">
-            <a:schemeClr val="lt1"/>
-          </a:fontRef>
-        </p:style>
-      </p:sp>
-      <p:sp>
-        <p:nvSpPr>
-          <p:cNvPr id="2" name="Title 1"/>
-          <p:cNvSpPr>
-            <a:spLocks noGrp="1"/>
-          </p:cNvSpPr>
-          <p:nvPr>
-            <p:ph type="title"/>
-          </p:nvPr>
-        </p:nvSpPr>
-        <p:spPr>
-          <a:xfrm>
-            <a:off x="680319" y="753229"/>
-            <a:ext cx="9613863" cy="1080937"/>
+            <a:off x="1103313" y="1905000"/>
+            <a:ext cx="4396338" cy="576262"/>
           </a:xfrm>
         </p:spPr>
         <p:txBody>
-          <a:bodyPr/>
-          <a:lstStyle/>
-          <a:p>
-            <a:r>
-              <a:rPr lang="en-US"/>
-              <a:t>Click to edit Master title style</a:t>
-            </a:r>
-            <a:endParaRPr lang="en-US" dirty="0"/>
-          </a:p>
-        </p:txBody>
-      </p:sp>
-      <p:sp>
-        <p:nvSpPr>
-          <p:cNvPr id="3" name="Text Placeholder 2"/>
-          <p:cNvSpPr>
-            <a:spLocks noGrp="1"/>
-          </p:cNvSpPr>
-          <p:nvPr>
-            <p:ph type="body" idx="1"/>
-          </p:nvPr>
-        </p:nvSpPr>
-        <p:spPr>
-          <a:xfrm>
-            <a:off x="906350" y="2336873"/>
-            <a:ext cx="4472327" cy="693135"/>
-          </a:xfrm>
-        </p:spPr>
-        <p:txBody>
-          <a:bodyPr anchor="b"/>
+          <a:bodyPr anchor="b">
+            <a:noAutofit/>
+          </a:bodyPr>
           <a:lstStyle>
             <a:lvl1pPr marL="0" indent="0">
               <a:buNone/>
-              <a:defRPr sz="2400" b="1"/>
+              <a:defRPr sz="2400" b="0">
+                <a:solidFill>
+                  <a:schemeClr val="bg2">
+                    <a:lumMod val="40000"/>
+                    <a:lumOff val="60000"/>
+                  </a:schemeClr>
+                </a:solidFill>
+              </a:defRPr>
             </a:lvl1pPr>
             <a:lvl2pPr marL="457200" indent="0">
               <a:buNone/>
@@ -5713,13 +4131,43 @@
         </p:nvSpPr>
         <p:spPr>
           <a:xfrm>
-            <a:off x="680322" y="3030008"/>
-            <a:ext cx="4698355" cy="2906179"/>
+            <a:off x="1103312" y="2514600"/>
+            <a:ext cx="4396339" cy="3741738"/>
           </a:xfrm>
         </p:spPr>
         <p:txBody>
-          <a:bodyPr/>
-          <a:lstStyle/>
+          <a:bodyPr>
+            <a:normAutofit/>
+          </a:bodyPr>
+          <a:lstStyle>
+            <a:lvl1pPr>
+              <a:defRPr sz="1800"/>
+            </a:lvl1pPr>
+            <a:lvl2pPr>
+              <a:defRPr sz="1600"/>
+            </a:lvl2pPr>
+            <a:lvl3pPr>
+              <a:defRPr sz="1400"/>
+            </a:lvl3pPr>
+            <a:lvl4pPr>
+              <a:defRPr sz="1200"/>
+            </a:lvl4pPr>
+            <a:lvl5pPr>
+              <a:defRPr sz="1200"/>
+            </a:lvl5pPr>
+            <a:lvl6pPr>
+              <a:defRPr sz="1200"/>
+            </a:lvl6pPr>
+            <a:lvl7pPr>
+              <a:defRPr sz="1200"/>
+            </a:lvl7pPr>
+            <a:lvl8pPr>
+              <a:defRPr sz="1200"/>
+            </a:lvl8pPr>
+            <a:lvl9pPr>
+              <a:defRPr sz="1200"/>
+            </a:lvl9pPr>
+          </a:lstStyle>
           <a:p>
             <a:pPr lvl="0"/>
             <a:r>
@@ -5770,16 +4218,25 @@
         </p:nvSpPr>
         <p:spPr>
           <a:xfrm>
-            <a:off x="5820154" y="2336873"/>
-            <a:ext cx="4474028" cy="692076"/>
+            <a:off x="5654495" y="1905000"/>
+            <a:ext cx="4396339" cy="576262"/>
           </a:xfrm>
         </p:spPr>
         <p:txBody>
-          <a:bodyPr anchor="b"/>
+          <a:bodyPr anchor="b">
+            <a:noAutofit/>
+          </a:bodyPr>
           <a:lstStyle>
             <a:lvl1pPr marL="0" indent="0">
               <a:buNone/>
-              <a:defRPr sz="2400" b="1"/>
+              <a:defRPr sz="2400" b="0">
+                <a:solidFill>
+                  <a:schemeClr val="bg2">
+                    <a:lumMod val="40000"/>
+                    <a:lumOff val="60000"/>
+                  </a:schemeClr>
+                </a:solidFill>
+              </a:defRPr>
             </a:lvl1pPr>
             <a:lvl2pPr marL="457200" indent="0">
               <a:buNone/>
@@ -5835,13 +4292,43 @@
         </p:nvSpPr>
         <p:spPr>
           <a:xfrm>
-            <a:off x="5594123" y="3030008"/>
-            <a:ext cx="4700059" cy="2906179"/>
+            <a:off x="5654495" y="2514600"/>
+            <a:ext cx="4396339" cy="3741738"/>
           </a:xfrm>
         </p:spPr>
         <p:txBody>
-          <a:bodyPr/>
-          <a:lstStyle/>
+          <a:bodyPr>
+            <a:normAutofit/>
+          </a:bodyPr>
+          <a:lstStyle>
+            <a:lvl1pPr>
+              <a:defRPr sz="1800"/>
+            </a:lvl1pPr>
+            <a:lvl2pPr>
+              <a:defRPr sz="1600"/>
+            </a:lvl2pPr>
+            <a:lvl3pPr>
+              <a:defRPr sz="1400"/>
+            </a:lvl3pPr>
+            <a:lvl4pPr>
+              <a:defRPr sz="1200"/>
+            </a:lvl4pPr>
+            <a:lvl5pPr>
+              <a:defRPr sz="1200"/>
+            </a:lvl5pPr>
+            <a:lvl6pPr>
+              <a:defRPr sz="1200"/>
+            </a:lvl6pPr>
+            <a:lvl7pPr>
+              <a:defRPr sz="1200"/>
+            </a:lvl7pPr>
+            <a:lvl8pPr>
+              <a:defRPr sz="1200"/>
+            </a:lvl8pPr>
+            <a:lvl9pPr>
+              <a:defRPr sz="1200"/>
+            </a:lvl9pPr>
+          </a:lstStyle>
           <a:p>
             <a:pPr lvl="0"/>
             <a:r>
@@ -5897,7 +4384,7 @@
           <a:p>
             <a:fld id="{62D5F05B-F1CA-41F1-9D15-228D0FEFC4A2}" type="datetimeFigureOut">
               <a:rPr lang="en-US" smtClean="0"/>
-              <a:t>11/4/2025</a:t>
+              <a:t>11/11/2025</a:t>
             </a:fld>
             <a:endParaRPr lang="en-US"/>
           </a:p>
@@ -5948,7 +4435,7 @@
     </p:spTree>
     <p:extLst>
       <p:ext uri="{BB962C8B-B14F-4D97-AF65-F5344CB8AC3E}">
-        <p14:creationId xmlns:p14="http://schemas.microsoft.com/office/powerpoint/2010/main" val="3191703021"/>
+        <p14:creationId xmlns:p14="http://schemas.microsoft.com/office/powerpoint/2010/main" val="3371090447"/>
       </p:ext>
     </p:extLst>
   </p:cSld>
@@ -5975,145 +4462,6 @@
           <a:chExt cx="0" cy="0"/>
         </a:xfrm>
       </p:grpSpPr>
-      <p:pic>
-        <p:nvPicPr>
-          <p:cNvPr id="6" name="Picture 5" descr="HD-ShadowLong.png"/>
-          <p:cNvPicPr>
-            <a:picLocks noChangeAspect="1"/>
-          </p:cNvPicPr>
-          <p:nvPr/>
-        </p:nvPicPr>
-        <p:blipFill>
-          <a:blip r:embed="rId2">
-            <a:extLst>
-              <a:ext uri="{28A0092B-C50C-407E-A947-70E740481C1C}">
-                <a14:useLocalDpi xmlns:a14="http://schemas.microsoft.com/office/drawing/2010/main" val="0"/>
-              </a:ext>
-            </a:extLst>
-          </a:blip>
-          <a:stretch>
-            <a:fillRect/>
-          </a:stretch>
-        </p:blipFill>
-        <p:spPr>
-          <a:xfrm>
-            <a:off x="1" y="1970240"/>
-            <a:ext cx="10437812" cy="321164"/>
-          </a:xfrm>
-          <a:prstGeom prst="rect">
-            <a:avLst/>
-          </a:prstGeom>
-        </p:spPr>
-      </p:pic>
-      <p:pic>
-        <p:nvPicPr>
-          <p:cNvPr id="7" name="Picture 6" descr="HD-ShadowShort.png"/>
-          <p:cNvPicPr>
-            <a:picLocks noChangeAspect="1"/>
-          </p:cNvPicPr>
-          <p:nvPr/>
-        </p:nvPicPr>
-        <p:blipFill>
-          <a:blip r:embed="rId3">
-            <a:extLst>
-              <a:ext uri="{28A0092B-C50C-407E-A947-70E740481C1C}">
-                <a14:useLocalDpi xmlns:a14="http://schemas.microsoft.com/office/drawing/2010/main" val="0"/>
-              </a:ext>
-            </a:extLst>
-          </a:blip>
-          <a:stretch>
-            <a:fillRect/>
-          </a:stretch>
-        </p:blipFill>
-        <p:spPr>
-          <a:xfrm>
-            <a:off x="10585826" y="1971234"/>
-            <a:ext cx="1602997" cy="144270"/>
-          </a:xfrm>
-          <a:prstGeom prst="rect">
-            <a:avLst/>
-          </a:prstGeom>
-        </p:spPr>
-      </p:pic>
-      <p:sp>
-        <p:nvSpPr>
-          <p:cNvPr id="8" name="Rectangle 7"/>
-          <p:cNvSpPr/>
-          <p:nvPr/>
-        </p:nvSpPr>
-        <p:spPr bwMode="ltGray">
-          <a:xfrm>
-            <a:off x="0" y="609600"/>
-            <a:ext cx="10437812" cy="1368198"/>
-          </a:xfrm>
-          <a:prstGeom prst="rect">
-            <a:avLst/>
-          </a:prstGeom>
-          <a:solidFill>
-            <a:schemeClr val="bg1">
-              <a:lumMod val="85000"/>
-              <a:lumOff val="15000"/>
-            </a:schemeClr>
-          </a:solidFill>
-          <a:ln>
-            <a:noFill/>
-          </a:ln>
-        </p:spPr>
-        <p:style>
-          <a:lnRef idx="2">
-            <a:schemeClr val="accent1">
-              <a:shade val="50000"/>
-            </a:schemeClr>
-          </a:lnRef>
-          <a:fillRef idx="1">
-            <a:schemeClr val="accent1"/>
-          </a:fillRef>
-          <a:effectRef idx="0">
-            <a:schemeClr val="accent1"/>
-          </a:effectRef>
-          <a:fontRef idx="minor">
-            <a:schemeClr val="lt1"/>
-          </a:fontRef>
-        </p:style>
-      </p:sp>
-      <p:sp>
-        <p:nvSpPr>
-          <p:cNvPr id="9" name="Rectangle 8"/>
-          <p:cNvSpPr/>
-          <p:nvPr/>
-        </p:nvSpPr>
-        <p:spPr>
-          <a:xfrm>
-            <a:off x="10585827" y="609600"/>
-            <a:ext cx="1602997" cy="1368198"/>
-          </a:xfrm>
-          <a:prstGeom prst="rect">
-            <a:avLst/>
-          </a:prstGeom>
-          <a:solidFill>
-            <a:schemeClr val="accent1"/>
-          </a:solidFill>
-          <a:ln>
-            <a:noFill/>
-          </a:ln>
-        </p:spPr>
-        <p:style>
-          <a:lnRef idx="2">
-            <a:schemeClr val="accent1">
-              <a:shade val="50000"/>
-            </a:schemeClr>
-          </a:lnRef>
-          <a:fillRef idx="1">
-            <a:schemeClr val="accent1"/>
-          </a:fillRef>
-          <a:effectRef idx="0">
-            <a:schemeClr val="accent1"/>
-          </a:effectRef>
-          <a:fontRef idx="minor">
-            <a:schemeClr val="lt1"/>
-          </a:fontRef>
-        </p:style>
-      </p:sp>
       <p:sp>
         <p:nvSpPr>
           <p:cNvPr id="2" name="Title 1"/>
@@ -6139,7 +4487,7 @@
       </p:sp>
       <p:sp>
         <p:nvSpPr>
-          <p:cNvPr id="3" name="Date Placeholder 2"/>
+          <p:cNvPr id="7" name="Date Placeholder 2"/>
           <p:cNvSpPr>
             <a:spLocks noGrp="1"/>
           </p:cNvSpPr>
@@ -6154,7 +4502,7 @@
           <a:p>
             <a:fld id="{62D5F05B-F1CA-41F1-9D15-228D0FEFC4A2}" type="datetimeFigureOut">
               <a:rPr lang="en-US" smtClean="0"/>
-              <a:t>11/4/2025</a:t>
+              <a:t>11/11/2025</a:t>
             </a:fld>
             <a:endParaRPr lang="en-US"/>
           </a:p>
@@ -6162,7 +4510,7 @@
       </p:sp>
       <p:sp>
         <p:nvSpPr>
-          <p:cNvPr id="4" name="Footer Placeholder 3"/>
+          <p:cNvPr id="5" name="Footer Placeholder 3"/>
           <p:cNvSpPr>
             <a:spLocks noGrp="1"/>
           </p:cNvSpPr>
@@ -6181,7 +4529,7 @@
       </p:sp>
       <p:sp>
         <p:nvSpPr>
-          <p:cNvPr id="5" name="Slide Number Placeholder 4"/>
+          <p:cNvPr id="6" name="Slide Number Placeholder 4"/>
           <p:cNvSpPr>
             <a:spLocks noGrp="1"/>
           </p:cNvSpPr>
@@ -6205,7 +4553,7 @@
     </p:spTree>
     <p:extLst>
       <p:ext uri="{BB962C8B-B14F-4D97-AF65-F5344CB8AC3E}">
-        <p14:creationId xmlns:p14="http://schemas.microsoft.com/office/powerpoint/2010/main" val="1511462060"/>
+        <p14:creationId xmlns:p14="http://schemas.microsoft.com/office/powerpoint/2010/main" val="3211233114"/>
       </p:ext>
     </p:extLst>
   </p:cSld>
@@ -6232,77 +4580,9 @@
           <a:chExt cx="0" cy="0"/>
         </a:xfrm>
       </p:grpSpPr>
-      <p:pic>
-        <p:nvPicPr>
-          <p:cNvPr id="5" name="Picture 4" descr="HD-ShadowShort.png"/>
-          <p:cNvPicPr>
-            <a:picLocks noChangeAspect="1"/>
-          </p:cNvPicPr>
-          <p:nvPr/>
-        </p:nvPicPr>
-        <p:blipFill>
-          <a:blip r:embed="rId2">
-            <a:extLst>
-              <a:ext uri="{28A0092B-C50C-407E-A947-70E740481C1C}">
-                <a14:useLocalDpi xmlns:a14="http://schemas.microsoft.com/office/drawing/2010/main" val="0"/>
-              </a:ext>
-            </a:extLst>
-          </a:blip>
-          <a:stretch>
-            <a:fillRect/>
-          </a:stretch>
-        </p:blipFill>
-        <p:spPr>
-          <a:xfrm>
-            <a:off x="10585826" y="1971234"/>
-            <a:ext cx="1602997" cy="144270"/>
-          </a:xfrm>
-          <a:prstGeom prst="rect">
-            <a:avLst/>
-          </a:prstGeom>
-        </p:spPr>
-      </p:pic>
-      <p:sp>
-        <p:nvSpPr>
-          <p:cNvPr id="6" name="Rectangle 5"/>
-          <p:cNvSpPr/>
-          <p:nvPr/>
-        </p:nvSpPr>
-        <p:spPr>
-          <a:xfrm>
-            <a:off x="10585827" y="609600"/>
-            <a:ext cx="1602997" cy="1368198"/>
-          </a:xfrm>
-          <a:prstGeom prst="rect">
-            <a:avLst/>
-          </a:prstGeom>
-          <a:solidFill>
-            <a:schemeClr val="accent1"/>
-          </a:solidFill>
-          <a:ln>
-            <a:noFill/>
-          </a:ln>
-        </p:spPr>
-        <p:style>
-          <a:lnRef idx="2">
-            <a:schemeClr val="accent1">
-              <a:shade val="50000"/>
-            </a:schemeClr>
-          </a:lnRef>
-          <a:fillRef idx="1">
-            <a:schemeClr val="accent1"/>
-          </a:fillRef>
-          <a:effectRef idx="0">
-            <a:schemeClr val="accent1"/>
-          </a:effectRef>
-          <a:fontRef idx="minor">
-            <a:schemeClr val="lt1"/>
-          </a:fontRef>
-        </p:style>
-      </p:sp>
-      <p:sp>
-        <p:nvSpPr>
-          <p:cNvPr id="2" name="Date Placeholder 1"/>
+      <p:sp>
+        <p:nvSpPr>
+          <p:cNvPr id="7" name="Date Placeholder 1"/>
           <p:cNvSpPr>
             <a:spLocks noGrp="1"/>
           </p:cNvSpPr>
@@ -6317,7 +4597,7 @@
           <a:p>
             <a:fld id="{62D5F05B-F1CA-41F1-9D15-228D0FEFC4A2}" type="datetimeFigureOut">
               <a:rPr lang="en-US" smtClean="0"/>
-              <a:t>11/4/2025</a:t>
+              <a:t>11/11/2025</a:t>
             </a:fld>
             <a:endParaRPr lang="en-US"/>
           </a:p>
@@ -6325,7 +4605,7 @@
       </p:sp>
       <p:sp>
         <p:nvSpPr>
-          <p:cNvPr id="3" name="Footer Placeholder 2"/>
+          <p:cNvPr id="5" name="Footer Placeholder 2"/>
           <p:cNvSpPr>
             <a:spLocks noGrp="1"/>
           </p:cNvSpPr>
@@ -6344,7 +4624,7 @@
       </p:sp>
       <p:sp>
         <p:nvSpPr>
-          <p:cNvPr id="4" name="Slide Number Placeholder 3"/>
+          <p:cNvPr id="6" name="Slide Number Placeholder 3"/>
           <p:cNvSpPr>
             <a:spLocks noGrp="1"/>
           </p:cNvSpPr>
@@ -6368,7 +4648,7 @@
     </p:spTree>
     <p:extLst>
       <p:ext uri="{BB962C8B-B14F-4D97-AF65-F5344CB8AC3E}">
-        <p14:creationId xmlns:p14="http://schemas.microsoft.com/office/powerpoint/2010/main" val="142630594"/>
+        <p14:creationId xmlns:p14="http://schemas.microsoft.com/office/powerpoint/2010/main" val="2911067589"/>
       </p:ext>
     </p:extLst>
   </p:cSld>
@@ -6395,159 +4675,52 @@
           <a:chExt cx="0" cy="0"/>
         </a:xfrm>
       </p:grpSpPr>
-      <p:pic>
-        <p:nvPicPr>
-          <p:cNvPr id="8" name="Picture 7" descr="HD-ShadowLong.png"/>
-          <p:cNvPicPr>
-            <a:picLocks noChangeAspect="1"/>
-          </p:cNvPicPr>
-          <p:nvPr/>
-        </p:nvPicPr>
-        <p:blipFill>
-          <a:blip r:embed="rId2">
-            <a:extLst>
-              <a:ext uri="{28A0092B-C50C-407E-A947-70E740481C1C}">
-                <a14:useLocalDpi xmlns:a14="http://schemas.microsoft.com/office/drawing/2010/main" val="0"/>
-              </a:ext>
-            </a:extLst>
-          </a:blip>
-          <a:stretch>
-            <a:fillRect/>
-          </a:stretch>
-        </p:blipFill>
+      <p:sp>
+        <p:nvSpPr>
+          <p:cNvPr id="2" name="Title 1"/>
+          <p:cNvSpPr>
+            <a:spLocks noGrp="1"/>
+          </p:cNvSpPr>
+          <p:nvPr>
+            <p:ph type="title"/>
+          </p:nvPr>
+        </p:nvSpPr>
         <p:spPr>
           <a:xfrm>
-            <a:off x="1" y="1970240"/>
-            <a:ext cx="10437812" cy="321164"/>
+            <a:off x="1154953" y="1447800"/>
+            <a:ext cx="3401064" cy="1447800"/>
           </a:xfrm>
-          <a:prstGeom prst="rect">
-            <a:avLst/>
-          </a:prstGeom>
         </p:spPr>
-      </p:pic>
-      <p:pic>
-        <p:nvPicPr>
-          <p:cNvPr id="9" name="Picture 8" descr="HD-ShadowShort.png"/>
-          <p:cNvPicPr>
-            <a:picLocks noChangeAspect="1"/>
-          </p:cNvPicPr>
-          <p:nvPr/>
-        </p:nvPicPr>
-        <p:blipFill>
-          <a:blip r:embed="rId3">
-            <a:extLst>
-              <a:ext uri="{28A0092B-C50C-407E-A947-70E740481C1C}">
-                <a14:useLocalDpi xmlns:a14="http://schemas.microsoft.com/office/drawing/2010/main" val="0"/>
-              </a:ext>
-            </a:extLst>
-          </a:blip>
-          <a:stretch>
-            <a:fillRect/>
-          </a:stretch>
-        </p:blipFill>
+        <p:txBody>
+          <a:bodyPr anchor="b"/>
+          <a:lstStyle>
+            <a:lvl1pPr algn="l">
+              <a:defRPr sz="2400" b="0"/>
+            </a:lvl1pPr>
+          </a:lstStyle>
+          <a:p>
+            <a:r>
+              <a:rPr lang="en-US"/>
+              <a:t>Click to edit Master title style</a:t>
+            </a:r>
+            <a:endParaRPr lang="en-US" dirty="0"/>
+          </a:p>
+        </p:txBody>
+      </p:sp>
+      <p:sp>
+        <p:nvSpPr>
+          <p:cNvPr id="3" name="Content Placeholder 2"/>
+          <p:cNvSpPr>
+            <a:spLocks noGrp="1"/>
+          </p:cNvSpPr>
+          <p:nvPr>
+            <p:ph idx="1"/>
+          </p:nvPr>
+        </p:nvSpPr>
         <p:spPr>
           <a:xfrm>
-            <a:off x="10585826" y="1971234"/>
-            <a:ext cx="1602997" cy="144270"/>
-          </a:xfrm>
-          <a:prstGeom prst="rect">
-            <a:avLst/>
-          </a:prstGeom>
-        </p:spPr>
-      </p:pic>
-      <p:sp>
-        <p:nvSpPr>
-          <p:cNvPr id="10" name="Rectangle 9"/>
-          <p:cNvSpPr/>
-          <p:nvPr/>
-        </p:nvSpPr>
-        <p:spPr bwMode="ltGray">
-          <a:xfrm>
-            <a:off x="0" y="609600"/>
-            <a:ext cx="10437812" cy="1368198"/>
-          </a:xfrm>
-          <a:prstGeom prst="rect">
-            <a:avLst/>
-          </a:prstGeom>
-          <a:solidFill>
-            <a:schemeClr val="bg1">
-              <a:lumMod val="85000"/>
-              <a:lumOff val="15000"/>
-            </a:schemeClr>
-          </a:solidFill>
-          <a:ln>
-            <a:noFill/>
-          </a:ln>
-        </p:spPr>
-        <p:style>
-          <a:lnRef idx="2">
-            <a:schemeClr val="accent1">
-              <a:shade val="50000"/>
-            </a:schemeClr>
-          </a:lnRef>
-          <a:fillRef idx="1">
-            <a:schemeClr val="accent1"/>
-          </a:fillRef>
-          <a:effectRef idx="0">
-            <a:schemeClr val="accent1"/>
-          </a:effectRef>
-          <a:fontRef idx="minor">
-            <a:schemeClr val="lt1"/>
-          </a:fontRef>
-        </p:style>
-      </p:sp>
-      <p:sp>
-        <p:nvSpPr>
-          <p:cNvPr id="11" name="Rectangle 10"/>
-          <p:cNvSpPr/>
-          <p:nvPr/>
-        </p:nvSpPr>
-        <p:spPr>
-          <a:xfrm>
-            <a:off x="10585827" y="609600"/>
-            <a:ext cx="1602997" cy="1368198"/>
-          </a:xfrm>
-          <a:prstGeom prst="rect">
-            <a:avLst/>
-          </a:prstGeom>
-          <a:solidFill>
-            <a:schemeClr val="accent1"/>
-          </a:solidFill>
-          <a:ln>
-            <a:noFill/>
-          </a:ln>
-        </p:spPr>
-        <p:style>
-          <a:lnRef idx="2">
-            <a:schemeClr val="accent1">
-              <a:shade val="50000"/>
-            </a:schemeClr>
-          </a:lnRef>
-          <a:fillRef idx="1">
-            <a:schemeClr val="accent1"/>
-          </a:fillRef>
-          <a:effectRef idx="0">
-            <a:schemeClr val="accent1"/>
-          </a:effectRef>
-          <a:fontRef idx="minor">
-            <a:schemeClr val="lt1"/>
-          </a:fontRef>
-        </p:style>
-      </p:sp>
-      <p:sp>
-        <p:nvSpPr>
-          <p:cNvPr id="2" name="Title 1"/>
-          <p:cNvSpPr>
-            <a:spLocks noGrp="1"/>
-          </p:cNvSpPr>
-          <p:nvPr>
-            <p:ph type="title"/>
-          </p:nvPr>
-        </p:nvSpPr>
-        <p:spPr>
-          <a:xfrm>
-            <a:off x="680321" y="753227"/>
-            <a:ext cx="9613859" cy="1080940"/>
+            <a:off x="4784616" y="1447800"/>
+            <a:ext cx="5195997" cy="4572000"/>
           </a:xfrm>
         </p:spPr>
         <p:txBody>
@@ -6556,13 +4729,66 @@
           </a:bodyPr>
           <a:lstStyle>
             <a:lvl1pPr>
-              <a:defRPr sz="3600"/>
+              <a:defRPr sz="2000"/>
             </a:lvl1pPr>
+            <a:lvl2pPr>
+              <a:defRPr sz="1800"/>
+            </a:lvl2pPr>
+            <a:lvl3pPr>
+              <a:defRPr sz="1600"/>
+            </a:lvl3pPr>
+            <a:lvl4pPr>
+              <a:defRPr sz="1400"/>
+            </a:lvl4pPr>
+            <a:lvl5pPr>
+              <a:defRPr sz="1400"/>
+            </a:lvl5pPr>
+            <a:lvl6pPr>
+              <a:defRPr sz="1400"/>
+            </a:lvl6pPr>
+            <a:lvl7pPr>
+              <a:defRPr sz="1400"/>
+            </a:lvl7pPr>
+            <a:lvl8pPr>
+              <a:defRPr sz="1400"/>
+            </a:lvl8pPr>
+            <a:lvl9pPr>
+              <a:defRPr sz="1400"/>
+            </a:lvl9pPr>
           </a:lstStyle>
           <a:p>
-            <a:r>
-              <a:rPr lang="en-US"/>
-              <a:t>Click to edit Master title style</a:t>
+            <a:pPr lvl="0"/>
+            <a:r>
+              <a:rPr lang="en-US"/>
+              <a:t>Click to edit Master text styles</a:t>
+            </a:r>
+          </a:p>
+          <a:p>
+            <a:pPr lvl="1"/>
+            <a:r>
+              <a:rPr lang="en-US"/>
+              <a:t>Second level</a:t>
+            </a:r>
+          </a:p>
+          <a:p>
+            <a:pPr lvl="2"/>
+            <a:r>
+              <a:rPr lang="en-US"/>
+              <a:t>Third level</a:t>
+            </a:r>
+          </a:p>
+          <a:p>
+            <a:pPr lvl="3"/>
+            <a:r>
+              <a:rPr lang="en-US"/>
+              <a:t>Fourth level</a:t>
+            </a:r>
+          </a:p>
+          <a:p>
+            <a:pPr lvl="4"/>
+            <a:r>
+              <a:rPr lang="en-US"/>
+              <a:t>Fifth level</a:t>
             </a:r>
             <a:endParaRPr lang="en-US" dirty="0"/>
           </a:p>
@@ -6570,115 +4796,58 @@
       </p:sp>
       <p:sp>
         <p:nvSpPr>
-          <p:cNvPr id="3" name="Content Placeholder 2"/>
-          <p:cNvSpPr>
-            <a:spLocks noGrp="1"/>
-          </p:cNvSpPr>
-          <p:nvPr>
-            <p:ph idx="1"/>
+          <p:cNvPr id="4" name="Text Placeholder 3"/>
+          <p:cNvSpPr>
+            <a:spLocks noGrp="1"/>
+          </p:cNvSpPr>
+          <p:nvPr>
+            <p:ph type="body" sz="half" idx="2"/>
           </p:nvPr>
         </p:nvSpPr>
         <p:spPr>
           <a:xfrm>
-            <a:off x="4685846" y="2336873"/>
-            <a:ext cx="5608336" cy="3599313"/>
+            <a:off x="1154953" y="3129280"/>
+            <a:ext cx="3401063" cy="2895599"/>
           </a:xfrm>
         </p:spPr>
         <p:txBody>
           <a:bodyPr/>
-          <a:lstStyle/>
-          <a:p>
-            <a:pPr lvl="0"/>
-            <a:r>
-              <a:rPr lang="en-US"/>
-              <a:t>Click to edit Master text styles</a:t>
-            </a:r>
-          </a:p>
-          <a:p>
-            <a:pPr lvl="1"/>
-            <a:r>
-              <a:rPr lang="en-US"/>
-              <a:t>Second level</a:t>
-            </a:r>
-          </a:p>
-          <a:p>
-            <a:pPr lvl="2"/>
-            <a:r>
-              <a:rPr lang="en-US"/>
-              <a:t>Third level</a:t>
-            </a:r>
-          </a:p>
-          <a:p>
-            <a:pPr lvl="3"/>
-            <a:r>
-              <a:rPr lang="en-US"/>
-              <a:t>Fourth level</a:t>
-            </a:r>
-          </a:p>
-          <a:p>
-            <a:pPr lvl="4"/>
-            <a:r>
-              <a:rPr lang="en-US"/>
-              <a:t>Fifth level</a:t>
-            </a:r>
-            <a:endParaRPr lang="en-US" dirty="0"/>
-          </a:p>
-        </p:txBody>
-      </p:sp>
-      <p:sp>
-        <p:nvSpPr>
-          <p:cNvPr id="4" name="Text Placeholder 3"/>
-          <p:cNvSpPr>
-            <a:spLocks noGrp="1"/>
-          </p:cNvSpPr>
-          <p:nvPr>
-            <p:ph type="body" sz="half" idx="2"/>
-          </p:nvPr>
-        </p:nvSpPr>
-        <p:spPr>
-          <a:xfrm>
-            <a:off x="680322" y="2336872"/>
-            <a:ext cx="3790078" cy="3599317"/>
-          </a:xfrm>
-        </p:spPr>
-        <p:txBody>
-          <a:bodyPr anchor="ctr"/>
           <a:lstStyle>
             <a:lvl1pPr marL="0" indent="0">
               <a:buNone/>
-              <a:defRPr sz="1600"/>
+              <a:defRPr sz="1400"/>
             </a:lvl1pPr>
             <a:lvl2pPr marL="457200" indent="0">
               <a:buNone/>
-              <a:defRPr sz="1400"/>
+              <a:defRPr sz="1200"/>
             </a:lvl2pPr>
             <a:lvl3pPr marL="914400" indent="0">
               <a:buNone/>
-              <a:defRPr sz="1200"/>
+              <a:defRPr sz="1000"/>
             </a:lvl3pPr>
             <a:lvl4pPr marL="1371600" indent="0">
               <a:buNone/>
-              <a:defRPr sz="1000"/>
+              <a:defRPr sz="900"/>
             </a:lvl4pPr>
             <a:lvl5pPr marL="1828800" indent="0">
               <a:buNone/>
-              <a:defRPr sz="1000"/>
+              <a:defRPr sz="900"/>
             </a:lvl5pPr>
             <a:lvl6pPr marL="2286000" indent="0">
               <a:buNone/>
-              <a:defRPr sz="1000"/>
+              <a:defRPr sz="900"/>
             </a:lvl6pPr>
             <a:lvl7pPr marL="2743200" indent="0">
               <a:buNone/>
-              <a:defRPr sz="1000"/>
+              <a:defRPr sz="900"/>
             </a:lvl7pPr>
             <a:lvl8pPr marL="3200400" indent="0">
               <a:buNone/>
-              <a:defRPr sz="1000"/>
+              <a:defRPr sz="900"/>
             </a:lvl8pPr>
             <a:lvl9pPr marL="3657600" indent="0">
               <a:buNone/>
-              <a:defRPr sz="1000"/>
+              <a:defRPr sz="900"/>
             </a:lvl9pPr>
           </a:lstStyle>
           <a:p>
@@ -6692,7 +4861,7 @@
       </p:sp>
       <p:sp>
         <p:nvSpPr>
-          <p:cNvPr id="5" name="Date Placeholder 4"/>
+          <p:cNvPr id="7" name="Date Placeholder 4"/>
           <p:cNvSpPr>
             <a:spLocks noGrp="1"/>
           </p:cNvSpPr>
@@ -6707,7 +4876,7 @@
           <a:p>
             <a:fld id="{62D5F05B-F1CA-41F1-9D15-228D0FEFC4A2}" type="datetimeFigureOut">
               <a:rPr lang="en-US" smtClean="0"/>
-              <a:t>11/4/2025</a:t>
+              <a:t>11/11/2025</a:t>
             </a:fld>
             <a:endParaRPr lang="en-US"/>
           </a:p>
@@ -6715,7 +4884,7 @@
       </p:sp>
       <p:sp>
         <p:nvSpPr>
-          <p:cNvPr id="6" name="Footer Placeholder 5"/>
+          <p:cNvPr id="5" name="Footer Placeholder 5"/>
           <p:cNvSpPr>
             <a:spLocks noGrp="1"/>
           </p:cNvSpPr>
@@ -6734,7 +4903,7 @@
       </p:sp>
       <p:sp>
         <p:nvSpPr>
-          <p:cNvPr id="7" name="Slide Number Placeholder 6"/>
+          <p:cNvPr id="6" name="Slide Number Placeholder 6"/>
           <p:cNvSpPr>
             <a:spLocks noGrp="1"/>
           </p:cNvSpPr>
@@ -6758,7 +4927,7 @@
     </p:spTree>
     <p:extLst>
       <p:ext uri="{BB962C8B-B14F-4D97-AF65-F5344CB8AC3E}">
-        <p14:creationId xmlns:p14="http://schemas.microsoft.com/office/powerpoint/2010/main" val="2031078826"/>
+        <p14:creationId xmlns:p14="http://schemas.microsoft.com/office/powerpoint/2010/main" val="1757478324"/>
       </p:ext>
     </p:extLst>
   </p:cSld>
@@ -6785,168 +4954,29 @@
           <a:chExt cx="0" cy="0"/>
         </a:xfrm>
       </p:grpSpPr>
-      <p:pic>
-        <p:nvPicPr>
-          <p:cNvPr id="8" name="Picture 7" descr="HD-ShadowLong.png"/>
-          <p:cNvPicPr>
-            <a:picLocks noChangeAspect="1"/>
-          </p:cNvPicPr>
-          <p:nvPr/>
-        </p:nvPicPr>
-        <p:blipFill>
-          <a:blip r:embed="rId2">
-            <a:extLst>
-              <a:ext uri="{28A0092B-C50C-407E-A947-70E740481C1C}">
-                <a14:useLocalDpi xmlns:a14="http://schemas.microsoft.com/office/drawing/2010/main" val="0"/>
-              </a:ext>
-            </a:extLst>
-          </a:blip>
-          <a:stretch>
-            <a:fillRect/>
-          </a:stretch>
-        </p:blipFill>
+      <p:sp>
+        <p:nvSpPr>
+          <p:cNvPr id="2" name="Title 1"/>
+          <p:cNvSpPr>
+            <a:spLocks noGrp="1"/>
+          </p:cNvSpPr>
+          <p:nvPr>
+            <p:ph type="title"/>
+          </p:nvPr>
+        </p:nvSpPr>
         <p:spPr>
           <a:xfrm>
-            <a:off x="1" y="1970240"/>
-            <a:ext cx="10437812" cy="321164"/>
-          </a:xfrm>
-          <a:prstGeom prst="rect">
-            <a:avLst/>
-          </a:prstGeom>
-        </p:spPr>
-      </p:pic>
-      <p:pic>
-        <p:nvPicPr>
-          <p:cNvPr id="9" name="Picture 8" descr="HD-ShadowShort.png"/>
-          <p:cNvPicPr>
-            <a:picLocks noChangeAspect="1"/>
-          </p:cNvPicPr>
-          <p:nvPr/>
-        </p:nvPicPr>
-        <p:blipFill>
-          <a:blip r:embed="rId3">
-            <a:extLst>
-              <a:ext uri="{28A0092B-C50C-407E-A947-70E740481C1C}">
-                <a14:useLocalDpi xmlns:a14="http://schemas.microsoft.com/office/drawing/2010/main" val="0"/>
-              </a:ext>
-            </a:extLst>
-          </a:blip>
-          <a:stretch>
-            <a:fillRect/>
-          </a:stretch>
-        </p:blipFill>
-        <p:spPr>
-          <a:xfrm>
-            <a:off x="10585826" y="1971234"/>
-            <a:ext cx="1602997" cy="144270"/>
-          </a:xfrm>
-          <a:prstGeom prst="rect">
-            <a:avLst/>
-          </a:prstGeom>
-        </p:spPr>
-      </p:pic>
-      <p:sp>
-        <p:nvSpPr>
-          <p:cNvPr id="10" name="Rectangle 9"/>
-          <p:cNvSpPr/>
-          <p:nvPr/>
-        </p:nvSpPr>
-        <p:spPr bwMode="ltGray">
-          <a:xfrm>
-            <a:off x="0" y="609600"/>
-            <a:ext cx="10437812" cy="1368198"/>
-          </a:xfrm>
-          <a:prstGeom prst="rect">
-            <a:avLst/>
-          </a:prstGeom>
-          <a:solidFill>
-            <a:schemeClr val="bg1">
-              <a:lumMod val="85000"/>
-              <a:lumOff val="15000"/>
-            </a:schemeClr>
-          </a:solidFill>
-          <a:ln>
-            <a:noFill/>
-          </a:ln>
-        </p:spPr>
-        <p:style>
-          <a:lnRef idx="2">
-            <a:schemeClr val="accent1">
-              <a:shade val="50000"/>
-            </a:schemeClr>
-          </a:lnRef>
-          <a:fillRef idx="1">
-            <a:schemeClr val="accent1"/>
-          </a:fillRef>
-          <a:effectRef idx="0">
-            <a:schemeClr val="accent1"/>
-          </a:effectRef>
-          <a:fontRef idx="minor">
-            <a:schemeClr val="lt1"/>
-          </a:fontRef>
-        </p:style>
-      </p:sp>
-      <p:sp>
-        <p:nvSpPr>
-          <p:cNvPr id="11" name="Rectangle 10"/>
-          <p:cNvSpPr/>
-          <p:nvPr/>
-        </p:nvSpPr>
-        <p:spPr>
-          <a:xfrm>
-            <a:off x="10585827" y="609600"/>
-            <a:ext cx="1602997" cy="1368198"/>
-          </a:xfrm>
-          <a:prstGeom prst="rect">
-            <a:avLst/>
-          </a:prstGeom>
-          <a:solidFill>
-            <a:schemeClr val="accent1"/>
-          </a:solidFill>
-          <a:ln>
-            <a:noFill/>
-          </a:ln>
-        </p:spPr>
-        <p:style>
-          <a:lnRef idx="2">
-            <a:schemeClr val="accent1">
-              <a:shade val="50000"/>
-            </a:schemeClr>
-          </a:lnRef>
-          <a:fillRef idx="1">
-            <a:schemeClr val="accent1"/>
-          </a:fillRef>
-          <a:effectRef idx="0">
-            <a:schemeClr val="accent1"/>
-          </a:effectRef>
-          <a:fontRef idx="minor">
-            <a:schemeClr val="lt1"/>
-          </a:fontRef>
-        </p:style>
-      </p:sp>
-      <p:sp>
-        <p:nvSpPr>
-          <p:cNvPr id="2" name="Title 1"/>
-          <p:cNvSpPr>
-            <a:spLocks noGrp="1"/>
-          </p:cNvSpPr>
-          <p:nvPr>
-            <p:ph type="title"/>
-          </p:nvPr>
-        </p:nvSpPr>
-        <p:spPr>
-          <a:xfrm>
-            <a:off x="680323" y="753228"/>
-            <a:ext cx="9613857" cy="1080938"/>
+            <a:off x="1153907" y="1854192"/>
+            <a:ext cx="5092906" cy="1574808"/>
           </a:xfrm>
         </p:spPr>
         <p:txBody>
-          <a:bodyPr anchor="ctr">
+          <a:bodyPr anchor="b">
             <a:normAutofit/>
           </a:bodyPr>
           <a:lstStyle>
-            <a:lvl1pPr>
-              <a:defRPr sz="3600"/>
+            <a:lvl1pPr algn="l">
+              <a:defRPr sz="3600" b="0"/>
             </a:lvl1pPr>
           </a:lstStyle>
           <a:p>
@@ -6970,127 +5000,132 @@
         </p:nvSpPr>
         <p:spPr>
           <a:xfrm>
-            <a:off x="4868333" y="2336874"/>
-            <a:ext cx="5425849" cy="3599312"/>
+            <a:off x="6949546" y="1143000"/>
+            <a:ext cx="3200400" cy="4572000"/>
           </a:xfrm>
-          <a:noFill/>
-          <a:ln>
-            <a:noFill/>
-          </a:ln>
+          <a:prstGeom prst="roundRect">
+            <a:avLst>
+              <a:gd name="adj" fmla="val 1858"/>
+            </a:avLst>
+          </a:prstGeom>
           <a:effectLst>
-            <a:outerShdw blurRad="76200" dist="63500" dir="5040000" algn="tl" rotWithShape="0">
+            <a:outerShdw blurRad="50800" dist="50800" dir="5400000" algn="tl" rotWithShape="0">
               <a:srgbClr val="000000">
-                <a:alpha val="41000"/>
+                <a:alpha val="43000"/>
               </a:srgbClr>
             </a:outerShdw>
           </a:effectLst>
         </p:spPr>
         <p:txBody>
-          <a:bodyPr anchor="t"/>
+          <a:bodyPr anchor="t">
+            <a:normAutofit/>
+          </a:bodyPr>
           <a:lstStyle>
-            <a:lvl1pPr marL="0" indent="0">
-              <a:buNone/>
-              <a:defRPr sz="3200"/>
-            </a:lvl1pPr>
-            <a:lvl2pPr marL="457200" indent="0">
-              <a:buNone/>
-              <a:defRPr sz="2800"/>
-            </a:lvl2pPr>
-            <a:lvl3pPr marL="914400" indent="0">
-              <a:buNone/>
-              <a:defRPr sz="2400"/>
-            </a:lvl3pPr>
-            <a:lvl4pPr marL="1371600" indent="0">
-              <a:buNone/>
-              <a:defRPr sz="2000"/>
-            </a:lvl4pPr>
-            <a:lvl5pPr marL="1828800" indent="0">
-              <a:buNone/>
-              <a:defRPr sz="2000"/>
-            </a:lvl5pPr>
-            <a:lvl6pPr marL="2286000" indent="0">
-              <a:buNone/>
-              <a:defRPr sz="2000"/>
-            </a:lvl6pPr>
-            <a:lvl7pPr marL="2743200" indent="0">
-              <a:buNone/>
-              <a:defRPr sz="2000"/>
-            </a:lvl7pPr>
-            <a:lvl8pPr marL="3200400" indent="0">
-              <a:buNone/>
-              <a:defRPr sz="2000"/>
-            </a:lvl8pPr>
-            <a:lvl9pPr marL="3657600" indent="0">
-              <a:buNone/>
-              <a:defRPr sz="2000"/>
-            </a:lvl9pPr>
-          </a:lstStyle>
-          <a:p>
-            <a:r>
-              <a:rPr lang="en-US"/>
-              <a:t>Click icon to add picture</a:t>
-            </a:r>
-            <a:endParaRPr lang="en-US" dirty="0"/>
-          </a:p>
-        </p:txBody>
-      </p:sp>
-      <p:sp>
-        <p:nvSpPr>
-          <p:cNvPr id="4" name="Text Placeholder 3"/>
-          <p:cNvSpPr>
-            <a:spLocks noGrp="1"/>
-          </p:cNvSpPr>
-          <p:nvPr>
-            <p:ph type="body" sz="half" idx="2"/>
-          </p:nvPr>
-        </p:nvSpPr>
-        <p:spPr>
-          <a:xfrm>
-            <a:off x="680323" y="2336873"/>
-            <a:ext cx="3876256" cy="3599315"/>
-          </a:xfrm>
-        </p:spPr>
-        <p:txBody>
-          <a:bodyPr anchor="ctr"/>
-          <a:lstStyle>
-            <a:lvl1pPr marL="0" indent="0">
+            <a:lvl1pPr marL="0" indent="0" algn="ctr">
               <a:buNone/>
               <a:defRPr sz="1600"/>
             </a:lvl1pPr>
             <a:lvl2pPr marL="457200" indent="0">
               <a:buNone/>
-              <a:defRPr sz="1400"/>
+              <a:defRPr sz="1600"/>
             </a:lvl2pPr>
             <a:lvl3pPr marL="914400" indent="0">
               <a:buNone/>
-              <a:defRPr sz="1200"/>
+              <a:defRPr sz="1600"/>
             </a:lvl3pPr>
             <a:lvl4pPr marL="1371600" indent="0">
               <a:buNone/>
-              <a:defRPr sz="1000"/>
+              <a:defRPr sz="1600"/>
             </a:lvl4pPr>
             <a:lvl5pPr marL="1828800" indent="0">
               <a:buNone/>
-              <a:defRPr sz="1000"/>
+              <a:defRPr sz="1600"/>
             </a:lvl5pPr>
             <a:lvl6pPr marL="2286000" indent="0">
               <a:buNone/>
-              <a:defRPr sz="1000"/>
+              <a:defRPr sz="1600"/>
             </a:lvl6pPr>
             <a:lvl7pPr marL="2743200" indent="0">
               <a:buNone/>
-              <a:defRPr sz="1000"/>
+              <a:defRPr sz="1600"/>
             </a:lvl7pPr>
             <a:lvl8pPr marL="3200400" indent="0">
               <a:buNone/>
-              <a:defRPr sz="1000"/>
+              <a:defRPr sz="1600"/>
             </a:lvl8pPr>
             <a:lvl9pPr marL="3657600" indent="0">
               <a:buNone/>
-              <a:defRPr sz="1000"/>
+              <a:defRPr sz="1600"/>
             </a:lvl9pPr>
           </a:lstStyle>
           <a:p>
+            <a:r>
+              <a:rPr lang="en-US"/>
+              <a:t>Click icon to add picture</a:t>
+            </a:r>
+            <a:endParaRPr lang="en-US" dirty="0"/>
+          </a:p>
+        </p:txBody>
+      </p:sp>
+      <p:sp>
+        <p:nvSpPr>
+          <p:cNvPr id="4" name="Text Placeholder 3"/>
+          <p:cNvSpPr>
+            <a:spLocks noGrp="1"/>
+          </p:cNvSpPr>
+          <p:nvPr>
+            <p:ph type="body" sz="half" idx="2"/>
+          </p:nvPr>
+        </p:nvSpPr>
+        <p:spPr>
+          <a:xfrm>
+            <a:off x="1154954" y="3657600"/>
+            <a:ext cx="5084979" cy="1371600"/>
+          </a:xfrm>
+        </p:spPr>
+        <p:txBody>
+          <a:bodyPr>
+            <a:normAutofit/>
+          </a:bodyPr>
+          <a:lstStyle>
+            <a:lvl1pPr marL="0" indent="0">
+              <a:buNone/>
+              <a:defRPr sz="1400"/>
+            </a:lvl1pPr>
+            <a:lvl2pPr marL="457200" indent="0">
+              <a:buNone/>
+              <a:defRPr sz="1200"/>
+            </a:lvl2pPr>
+            <a:lvl3pPr marL="914400" indent="0">
+              <a:buNone/>
+              <a:defRPr sz="1000"/>
+            </a:lvl3pPr>
+            <a:lvl4pPr marL="1371600" indent="0">
+              <a:buNone/>
+              <a:defRPr sz="900"/>
+            </a:lvl4pPr>
+            <a:lvl5pPr marL="1828800" indent="0">
+              <a:buNone/>
+              <a:defRPr sz="900"/>
+            </a:lvl5pPr>
+            <a:lvl6pPr marL="2286000" indent="0">
+              <a:buNone/>
+              <a:defRPr sz="900"/>
+            </a:lvl6pPr>
+            <a:lvl7pPr marL="2743200" indent="0">
+              <a:buNone/>
+              <a:defRPr sz="900"/>
+            </a:lvl7pPr>
+            <a:lvl8pPr marL="3200400" indent="0">
+              <a:buNone/>
+              <a:defRPr sz="900"/>
+            </a:lvl8pPr>
+            <a:lvl9pPr marL="3657600" indent="0">
+              <a:buNone/>
+              <a:defRPr sz="900"/>
+            </a:lvl9pPr>
+          </a:lstStyle>
+          <a:p>
             <a:pPr lvl="0"/>
             <a:r>
               <a:rPr lang="en-US"/>
@@ -7116,7 +5151,7 @@
           <a:p>
             <a:fld id="{62D5F05B-F1CA-41F1-9D15-228D0FEFC4A2}" type="datetimeFigureOut">
               <a:rPr lang="en-US" smtClean="0"/>
-              <a:t>11/4/2025</a:t>
+              <a:t>11/11/2025</a:t>
             </a:fld>
             <a:endParaRPr lang="en-US"/>
           </a:p>
@@ -7167,7 +5202,7 @@
     </p:spTree>
     <p:extLst>
       <p:ext uri="{BB962C8B-B14F-4D97-AF65-F5344CB8AC3E}">
-        <p14:creationId xmlns:p14="http://schemas.microsoft.com/office/powerpoint/2010/main" val="745452422"/>
+        <p14:creationId xmlns:p14="http://schemas.microsoft.com/office/powerpoint/2010/main" val="1740507600"/>
       </p:ext>
     </p:extLst>
   </p:cSld>
@@ -7201,154 +5236,418 @@
       </p:grpSpPr>
       <p:pic>
         <p:nvPicPr>
-          <p:cNvPr id="7" name="Picture 6" descr="hashOverlay-FullResolve.png"/>
+          <p:cNvPr id="8" name="Picture 7"/>
           <p:cNvPicPr>
             <a:picLocks noChangeAspect="1"/>
           </p:cNvPicPr>
           <p:nvPr/>
         </p:nvPicPr>
-        <p:blipFill>
+        <p:blipFill rotWithShape="1">
           <a:blip r:embed="rId19">
-            <a:alphaModFix amt="10000"/>
             <a:extLst>
               <a:ext uri="{28A0092B-C50C-407E-A947-70E740481C1C}">
                 <a14:useLocalDpi xmlns:a14="http://schemas.microsoft.com/office/drawing/2010/main" val="0"/>
               </a:ext>
             </a:extLst>
           </a:blip>
-          <a:stretch>
-            <a:fillRect/>
-          </a:stretch>
+          <a:srcRect l="3613"/>
+          <a:stretch/>
         </p:blipFill>
         <p:spPr>
           <a:xfrm>
-            <a:off x="0" y="0"/>
-            <a:ext cx="12192000" cy="6858000"/>
+            <a:off x="0" y="2669685"/>
+            <a:ext cx="4037012" cy="4188315"/>
           </a:xfrm>
           <a:prstGeom prst="rect">
             <a:avLst/>
           </a:prstGeom>
         </p:spPr>
       </p:pic>
-      <p:sp>
-        <p:nvSpPr>
-          <p:cNvPr id="2" name="Title Placeholder 1"/>
-          <p:cNvSpPr>
-            <a:spLocks noGrp="1"/>
-          </p:cNvSpPr>
-          <p:nvPr>
-            <p:ph type="title"/>
-          </p:nvPr>
-        </p:nvSpPr>
+      <p:pic>
+        <p:nvPicPr>
+          <p:cNvPr id="7" name="Picture 6"/>
+          <p:cNvPicPr>
+            <a:picLocks noChangeAspect="1"/>
+          </p:cNvPicPr>
+          <p:nvPr/>
+        </p:nvPicPr>
+        <p:blipFill rotWithShape="1">
+          <a:blip r:embed="rId20">
+            <a:extLst>
+              <a:ext uri="{28A0092B-C50C-407E-A947-70E740481C1C}">
+                <a14:useLocalDpi xmlns:a14="http://schemas.microsoft.com/office/drawing/2010/main" val="0"/>
+              </a:ext>
+            </a:extLst>
+          </a:blip>
+          <a:srcRect l="35640"/>
+          <a:stretch/>
+        </p:blipFill>
         <p:spPr>
           <a:xfrm>
-            <a:off x="680321" y="753228"/>
-            <a:ext cx="9613861" cy="1080938"/>
+            <a:off x="0" y="2892347"/>
+            <a:ext cx="1522412" cy="2365453"/>
           </a:xfrm>
           <a:prstGeom prst="rect">
             <a:avLst/>
           </a:prstGeom>
         </p:spPr>
-        <p:txBody>
-          <a:bodyPr vert="horz" lIns="91440" tIns="45720" rIns="91440" bIns="45720" rtlCol="0" anchor="ctr">
-            <a:normAutofit/>
-          </a:bodyPr>
-          <a:lstStyle/>
-          <a:p>
-            <a:r>
-              <a:rPr lang="en-US"/>
-              <a:t>Click to edit Master title style</a:t>
-            </a:r>
-            <a:endParaRPr lang="en-US" dirty="0"/>
-          </a:p>
-        </p:txBody>
-      </p:sp>
-      <p:sp>
-        <p:nvSpPr>
-          <p:cNvPr id="3" name="Text Placeholder 2"/>
-          <p:cNvSpPr>
-            <a:spLocks noGrp="1"/>
-          </p:cNvSpPr>
-          <p:nvPr>
-            <p:ph type="body" idx="1"/>
-          </p:nvPr>
+      </p:pic>
+      <p:sp>
+        <p:nvSpPr>
+          <p:cNvPr id="16" name="Oval 15"/>
+          <p:cNvSpPr/>
+          <p:nvPr/>
         </p:nvSpPr>
         <p:spPr>
           <a:xfrm>
-            <a:off x="680321" y="2336873"/>
-            <a:ext cx="9613861" cy="3599316"/>
+            <a:off x="8609012" y="1676400"/>
+            <a:ext cx="2819400" cy="2819400"/>
+          </a:xfrm>
+          <a:prstGeom prst="ellipse">
+            <a:avLst/>
+          </a:prstGeom>
+          <a:gradFill flip="none" rotWithShape="1">
+            <a:gsLst>
+              <a:gs pos="0">
+                <a:schemeClr val="bg2">
+                  <a:lumMod val="60000"/>
+                  <a:lumOff val="40000"/>
+                  <a:alpha val="7000"/>
+                </a:schemeClr>
+              </a:gs>
+              <a:gs pos="69000">
+                <a:schemeClr val="bg2">
+                  <a:lumMod val="60000"/>
+                  <a:lumOff val="40000"/>
+                  <a:alpha val="0"/>
+                </a:schemeClr>
+              </a:gs>
+              <a:gs pos="36000">
+                <a:schemeClr val="bg2">
+                  <a:lumMod val="60000"/>
+                  <a:lumOff val="40000"/>
+                  <a:alpha val="6000"/>
+                </a:schemeClr>
+              </a:gs>
+            </a:gsLst>
+            <a:path path="circle">
+              <a:fillToRect l="50000" t="50000" r="50000" b="50000"/>
+            </a:path>
+            <a:tileRect/>
+          </a:gradFill>
+          <a:ln>
+            <a:noFill/>
+          </a:ln>
+          <a:effectLst/>
+        </p:spPr>
+        <p:style>
+          <a:lnRef idx="1">
+            <a:schemeClr val="accent1"/>
+          </a:lnRef>
+          <a:fillRef idx="3">
+            <a:schemeClr val="accent1"/>
+          </a:fillRef>
+          <a:effectRef idx="2">
+            <a:schemeClr val="accent1"/>
+          </a:effectRef>
+          <a:fontRef idx="minor">
+            <a:schemeClr val="lt1"/>
+          </a:fontRef>
+        </p:style>
+      </p:sp>
+      <p:pic>
+        <p:nvPicPr>
+          <p:cNvPr id="9" name="Picture 8"/>
+          <p:cNvPicPr>
+            <a:picLocks noChangeAspect="1"/>
+          </p:cNvPicPr>
+          <p:nvPr/>
+        </p:nvPicPr>
+        <p:blipFill rotWithShape="1">
+          <a:blip r:embed="rId21">
+            <a:extLst>
+              <a:ext uri="{28A0092B-C50C-407E-A947-70E740481C1C}">
+                <a14:useLocalDpi xmlns:a14="http://schemas.microsoft.com/office/drawing/2010/main" val="0"/>
+              </a:ext>
+            </a:extLst>
+          </a:blip>
+          <a:srcRect t="28813"/>
+          <a:stretch/>
+        </p:blipFill>
+        <p:spPr>
+          <a:xfrm>
+            <a:off x="7999412" y="0"/>
+            <a:ext cx="1603387" cy="1141407"/>
           </a:xfrm>
           <a:prstGeom prst="rect">
             <a:avLst/>
           </a:prstGeom>
         </p:spPr>
-        <p:txBody>
-          <a:bodyPr vert="horz" lIns="91440" tIns="45720" rIns="91440" bIns="45720" rtlCol="0">
-            <a:normAutofit/>
-          </a:bodyPr>
-          <a:lstStyle/>
-          <a:p>
-            <a:pPr lvl="0"/>
-            <a:r>
-              <a:rPr lang="en-US"/>
-              <a:t>Click to edit Master text styles</a:t>
-            </a:r>
-          </a:p>
-          <a:p>
-            <a:pPr lvl="1"/>
-            <a:r>
-              <a:rPr lang="en-US"/>
-              <a:t>Second level</a:t>
-            </a:r>
-          </a:p>
-          <a:p>
-            <a:pPr lvl="2"/>
-            <a:r>
-              <a:rPr lang="en-US"/>
-              <a:t>Third level</a:t>
-            </a:r>
-          </a:p>
-          <a:p>
-            <a:pPr lvl="3"/>
-            <a:r>
-              <a:rPr lang="en-US"/>
-              <a:t>Fourth level</a:t>
-            </a:r>
-          </a:p>
-          <a:p>
-            <a:pPr lvl="4"/>
-            <a:r>
-              <a:rPr lang="en-US"/>
-              <a:t>Fifth level</a:t>
-            </a:r>
-            <a:endParaRPr lang="en-US" dirty="0"/>
-          </a:p>
-        </p:txBody>
-      </p:sp>
-      <p:sp>
-        <p:nvSpPr>
-          <p:cNvPr id="4" name="Date Placeholder 3"/>
-          <p:cNvSpPr>
-            <a:spLocks noGrp="1"/>
-          </p:cNvSpPr>
-          <p:nvPr>
-            <p:ph type="dt" sz="half" idx="2"/>
-          </p:nvPr>
-        </p:nvSpPr>
+      </p:pic>
+      <p:pic>
+        <p:nvPicPr>
+          <p:cNvPr id="10" name="Picture 9"/>
+          <p:cNvPicPr>
+            <a:picLocks noChangeAspect="1"/>
+          </p:cNvPicPr>
+          <p:nvPr/>
+        </p:nvPicPr>
+        <p:blipFill rotWithShape="1">
+          <a:blip r:embed="rId22">
+            <a:extLst>
+              <a:ext uri="{28A0092B-C50C-407E-A947-70E740481C1C}">
+                <a14:useLocalDpi xmlns:a14="http://schemas.microsoft.com/office/drawing/2010/main" val="0"/>
+              </a:ext>
+            </a:extLst>
+          </a:blip>
+          <a:srcRect b="23320"/>
+          <a:stretch/>
+        </p:blipFill>
         <p:spPr>
           <a:xfrm>
-            <a:off x="7550981" y="5936187"/>
-            <a:ext cx="2743200" cy="365125"/>
+            <a:off x="8605878" y="6096000"/>
+            <a:ext cx="993734" cy="762000"/>
           </a:xfrm>
           <a:prstGeom prst="rect">
             <a:avLst/>
           </a:prstGeom>
         </p:spPr>
-        <p:txBody>
-          <a:bodyPr vert="horz" lIns="91440" tIns="45720" rIns="91440" bIns="45720" rtlCol="0" anchor="ctr"/>
+      </p:pic>
+      <p:sp>
+        <p:nvSpPr>
+          <p:cNvPr id="14" name="Rectangle 13"/>
+          <p:cNvSpPr/>
+          <p:nvPr/>
+        </p:nvSpPr>
+        <p:spPr>
+          <a:xfrm>
+            <a:off x="10437812" y="0"/>
+            <a:ext cx="685800" cy="1143000"/>
+          </a:xfrm>
+          <a:prstGeom prst="rect">
+            <a:avLst/>
+          </a:prstGeom>
+          <a:solidFill>
+            <a:schemeClr val="accent1"/>
+          </a:solidFill>
+          <a:ln>
+            <a:noFill/>
+          </a:ln>
+        </p:spPr>
+        <p:style>
+          <a:lnRef idx="1">
+            <a:schemeClr val="accent1"/>
+          </a:lnRef>
+          <a:fillRef idx="3">
+            <a:schemeClr val="accent1"/>
+          </a:fillRef>
+          <a:effectRef idx="2">
+            <a:schemeClr val="accent1"/>
+          </a:effectRef>
+          <a:fontRef idx="minor">
+            <a:schemeClr val="lt1"/>
+          </a:fontRef>
+        </p:style>
+      </p:sp>
+      <p:sp>
+        <p:nvSpPr>
+          <p:cNvPr id="2" name="Title Placeholder 1"/>
+          <p:cNvSpPr>
+            <a:spLocks noGrp="1"/>
+          </p:cNvSpPr>
+          <p:nvPr>
+            <p:ph type="title"/>
+          </p:nvPr>
+        </p:nvSpPr>
+        <p:spPr>
+          <a:xfrm>
+            <a:off x="646111" y="452718"/>
+            <a:ext cx="9404723" cy="1400530"/>
+          </a:xfrm>
+          <a:prstGeom prst="rect">
+            <a:avLst/>
+          </a:prstGeom>
+        </p:spPr>
+        <p:txBody>
+          <a:bodyPr vert="horz" lIns="91440" tIns="45720" rIns="91440" bIns="45720" rtlCol="0" anchor="t">
+            <a:noAutofit/>
+          </a:bodyPr>
+          <a:lstStyle/>
+          <a:p>
+            <a:r>
+              <a:rPr lang="en-US"/>
+              <a:t>Click to edit Master title style</a:t>
+            </a:r>
+            <a:endParaRPr lang="en-US" dirty="0"/>
+          </a:p>
+        </p:txBody>
+      </p:sp>
+      <p:sp>
+        <p:nvSpPr>
+          <p:cNvPr id="3" name="Text Placeholder 2"/>
+          <p:cNvSpPr>
+            <a:spLocks noGrp="1"/>
+          </p:cNvSpPr>
+          <p:nvPr>
+            <p:ph type="body" idx="1"/>
+          </p:nvPr>
+        </p:nvSpPr>
+        <p:spPr>
+          <a:xfrm>
+            <a:off x="1103312" y="2052918"/>
+            <a:ext cx="8946541" cy="4195481"/>
+          </a:xfrm>
+          <a:prstGeom prst="rect">
+            <a:avLst/>
+          </a:prstGeom>
+        </p:spPr>
+        <p:txBody>
+          <a:bodyPr vert="horz" lIns="91440" tIns="45720" rIns="91440" bIns="45720" rtlCol="0">
+            <a:normAutofit/>
+          </a:bodyPr>
+          <a:lstStyle/>
+          <a:p>
+            <a:pPr lvl="0"/>
+            <a:r>
+              <a:rPr lang="en-US"/>
+              <a:t>Click to edit Master text styles</a:t>
+            </a:r>
+          </a:p>
+          <a:p>
+            <a:pPr lvl="1"/>
+            <a:r>
+              <a:rPr lang="en-US"/>
+              <a:t>Second level</a:t>
+            </a:r>
+          </a:p>
+          <a:p>
+            <a:pPr lvl="2"/>
+            <a:r>
+              <a:rPr lang="en-US"/>
+              <a:t>Third level</a:t>
+            </a:r>
+          </a:p>
+          <a:p>
+            <a:pPr lvl="3"/>
+            <a:r>
+              <a:rPr lang="en-US"/>
+              <a:t>Fourth level</a:t>
+            </a:r>
+          </a:p>
+          <a:p>
+            <a:pPr lvl="4"/>
+            <a:r>
+              <a:rPr lang="en-US"/>
+              <a:t>Fifth level</a:t>
+            </a:r>
+            <a:endParaRPr lang="en-US" dirty="0"/>
+          </a:p>
+        </p:txBody>
+      </p:sp>
+      <p:sp>
+        <p:nvSpPr>
+          <p:cNvPr id="4" name="Date Placeholder 3"/>
+          <p:cNvSpPr>
+            <a:spLocks noGrp="1"/>
+          </p:cNvSpPr>
+          <p:nvPr>
+            <p:ph type="dt" sz="half" idx="2"/>
+          </p:nvPr>
+        </p:nvSpPr>
+        <p:spPr>
+          <a:xfrm rot="5400000">
+            <a:off x="10155639" y="1790701"/>
+            <a:ext cx="990599" cy="304799"/>
+          </a:xfrm>
+          <a:prstGeom prst="rect">
+            <a:avLst/>
+          </a:prstGeom>
+        </p:spPr>
+        <p:txBody>
+          <a:bodyPr vert="horz" lIns="91440" tIns="45720" rIns="91440" bIns="45720" rtlCol="0" anchor="t"/>
           <a:lstStyle>
-            <a:lvl1pPr algn="r">
-              <a:defRPr sz="1050">
+            <a:lvl1pPr algn="l">
+              <a:defRPr sz="1100" b="0" i="0">
+                <a:solidFill>
+                  <a:schemeClr val="tx1">
+                    <a:tint val="75000"/>
+                    <a:alpha val="60000"/>
+                  </a:schemeClr>
+                </a:solidFill>
+              </a:defRPr>
+            </a:lvl1pPr>
+          </a:lstStyle>
+          <a:p>
+            <a:fld id="{62D5F05B-F1CA-41F1-9D15-228D0FEFC4A2}" type="datetimeFigureOut">
+              <a:rPr lang="en-US" smtClean="0"/>
+              <a:t>11/11/2025</a:t>
+            </a:fld>
+            <a:endParaRPr lang="en-US"/>
+          </a:p>
+        </p:txBody>
+      </p:sp>
+      <p:sp>
+        <p:nvSpPr>
+          <p:cNvPr id="5" name="Footer Placeholder 4"/>
+          <p:cNvSpPr>
+            <a:spLocks noGrp="1"/>
+          </p:cNvSpPr>
+          <p:nvPr>
+            <p:ph type="ftr" sz="quarter" idx="3"/>
+          </p:nvPr>
+        </p:nvSpPr>
+        <p:spPr>
+          <a:xfrm rot="5400000">
+            <a:off x="8951573" y="3225297"/>
+            <a:ext cx="3859795" cy="304801"/>
+          </a:xfrm>
+          <a:prstGeom prst="rect">
+            <a:avLst/>
+          </a:prstGeom>
+        </p:spPr>
+        <p:txBody>
+          <a:bodyPr vert="horz" lIns="91440" tIns="45720" rIns="91440" bIns="45720" rtlCol="0" anchor="b"/>
+          <a:lstStyle>
+            <a:lvl1pPr algn="l">
+              <a:defRPr sz="1100" b="0" i="0">
+                <a:solidFill>
+                  <a:schemeClr val="tx1">
+                    <a:tint val="75000"/>
+                    <a:alpha val="60000"/>
+                  </a:schemeClr>
+                </a:solidFill>
+              </a:defRPr>
+            </a:lvl1pPr>
+          </a:lstStyle>
+          <a:p>
+            <a:endParaRPr lang="en-US"/>
+          </a:p>
+        </p:txBody>
+      </p:sp>
+      <p:sp>
+        <p:nvSpPr>
+          <p:cNvPr id="6" name="Slide Number Placeholder 5"/>
+          <p:cNvSpPr>
+            <a:spLocks noGrp="1"/>
+          </p:cNvSpPr>
+          <p:nvPr>
+            <p:ph type="sldNum" sz="quarter" idx="4"/>
+          </p:nvPr>
+        </p:nvSpPr>
+        <p:spPr bwMode="gray">
+          <a:xfrm>
+            <a:off x="10352540" y="295729"/>
+            <a:ext cx="838199" cy="767687"/>
+          </a:xfrm>
+          <a:prstGeom prst="rect">
+            <a:avLst/>
+          </a:prstGeom>
+        </p:spPr>
+        <p:txBody>
+          <a:bodyPr vert="horz" lIns="91440" tIns="45720" rIns="91440" bIns="45720" rtlCol="0" anchor="b"/>
+          <a:lstStyle>
+            <a:lvl1pPr algn="ctr">
+              <a:defRPr sz="2800" b="0" i="0">
                 <a:solidFill>
                   <a:schemeClr val="tx1">
                     <a:tint val="75000"/>
@@ -7358,84 +5657,6 @@
             </a:lvl1pPr>
           </a:lstStyle>
           <a:p>
-            <a:fld id="{62D5F05B-F1CA-41F1-9D15-228D0FEFC4A2}" type="datetimeFigureOut">
-              <a:rPr lang="en-US" smtClean="0"/>
-              <a:t>11/4/2025</a:t>
-            </a:fld>
-            <a:endParaRPr lang="en-US"/>
-          </a:p>
-        </p:txBody>
-      </p:sp>
-      <p:sp>
-        <p:nvSpPr>
-          <p:cNvPr id="5" name="Footer Placeholder 4"/>
-          <p:cNvSpPr>
-            <a:spLocks noGrp="1"/>
-          </p:cNvSpPr>
-          <p:nvPr>
-            <p:ph type="ftr" sz="quarter" idx="3"/>
-          </p:nvPr>
-        </p:nvSpPr>
-        <p:spPr>
-          <a:xfrm>
-            <a:off x="680321" y="5936188"/>
-            <a:ext cx="6870660" cy="365125"/>
-          </a:xfrm>
-          <a:prstGeom prst="rect">
-            <a:avLst/>
-          </a:prstGeom>
-        </p:spPr>
-        <p:txBody>
-          <a:bodyPr vert="horz" lIns="91440" tIns="45720" rIns="91440" bIns="45720" rtlCol="0" anchor="ctr"/>
-          <a:lstStyle>
-            <a:lvl1pPr algn="l">
-              <a:defRPr sz="1050">
-                <a:solidFill>
-                  <a:schemeClr val="tx1">
-                    <a:tint val="75000"/>
-                  </a:schemeClr>
-                </a:solidFill>
-              </a:defRPr>
-            </a:lvl1pPr>
-          </a:lstStyle>
-          <a:p>
-            <a:endParaRPr lang="en-US"/>
-          </a:p>
-        </p:txBody>
-      </p:sp>
-      <p:sp>
-        <p:nvSpPr>
-          <p:cNvPr id="6" name="Slide Number Placeholder 5"/>
-          <p:cNvSpPr>
-            <a:spLocks noGrp="1"/>
-          </p:cNvSpPr>
-          <p:nvPr>
-            <p:ph type="sldNum" sz="quarter" idx="4"/>
-          </p:nvPr>
-        </p:nvSpPr>
-        <p:spPr>
-          <a:xfrm>
-            <a:off x="10729455" y="753227"/>
-            <a:ext cx="1154151" cy="1090789"/>
-          </a:xfrm>
-          <a:prstGeom prst="rect">
-            <a:avLst/>
-          </a:prstGeom>
-        </p:spPr>
-        <p:txBody>
-          <a:bodyPr vert="horz" lIns="91440" tIns="45720" rIns="91440" bIns="45720" rtlCol="0" anchor="ctr"/>
-          <a:lstStyle>
-            <a:lvl1pPr algn="l">
-              <a:defRPr sz="3600">
-                <a:solidFill>
-                  <a:schemeClr val="tx1">
-                    <a:tint val="75000"/>
-                  </a:schemeClr>
-                </a:solidFill>
-              </a:defRPr>
-            </a:lvl1pPr>
-          </a:lstStyle>
-          <a:p>
             <a:fld id="{9D8583BA-196A-4CCB-B8E2-286CC463FAC2}" type="slidenum">
               <a:rPr lang="en-US" smtClean="0"/>
               <a:t>‹#›</a:t>
@@ -7447,41 +5668,121 @@
     </p:spTree>
     <p:extLst>
       <p:ext uri="{BB962C8B-B14F-4D97-AF65-F5344CB8AC3E}">
-        <p14:creationId xmlns:p14="http://schemas.microsoft.com/office/powerpoint/2010/main" val="2559823362"/>
+        <p14:creationId xmlns:p14="http://schemas.microsoft.com/office/powerpoint/2010/main" val="219709112"/>
       </p:ext>
     </p:extLst>
   </p:cSld>
   <p:clrMap bg1="dk1" tx1="lt1" bg2="dk2" tx2="lt2" accent1="accent1" accent2="accent2" accent3="accent3" accent4="accent4" accent5="accent5" accent6="accent6" hlink="hlink" folHlink="folHlink"/>
   <p:sldLayoutIdLst>
-    <p:sldLayoutId id="2147483661" r:id="rId1"/>
-    <p:sldLayoutId id="2147483662" r:id="rId2"/>
-    <p:sldLayoutId id="2147483663" r:id="rId3"/>
-    <p:sldLayoutId id="2147483664" r:id="rId4"/>
-    <p:sldLayoutId id="2147483665" r:id="rId5"/>
-    <p:sldLayoutId id="2147483666" r:id="rId6"/>
-    <p:sldLayoutId id="2147483667" r:id="rId7"/>
-    <p:sldLayoutId id="2147483668" r:id="rId8"/>
-    <p:sldLayoutId id="2147483669" r:id="rId9"/>
-    <p:sldLayoutId id="2147483670" r:id="rId10"/>
-    <p:sldLayoutId id="2147483671" r:id="rId11"/>
-    <p:sldLayoutId id="2147483672" r:id="rId12"/>
-    <p:sldLayoutId id="2147483673" r:id="rId13"/>
-    <p:sldLayoutId id="2147483674" r:id="rId14"/>
-    <p:sldLayoutId id="2147483675" r:id="rId15"/>
-    <p:sldLayoutId id="2147483676" r:id="rId16"/>
-    <p:sldLayoutId id="2147483677" r:id="rId17"/>
+    <p:sldLayoutId id="2147483679" r:id="rId1"/>
+    <p:sldLayoutId id="2147483680" r:id="rId2"/>
+    <p:sldLayoutId id="2147483681" r:id="rId3"/>
+    <p:sldLayoutId id="2147483682" r:id="rId4"/>
+    <p:sldLayoutId id="2147483683" r:id="rId5"/>
+    <p:sldLayoutId id="2147483684" r:id="rId6"/>
+    <p:sldLayoutId id="2147483685" r:id="rId7"/>
+    <p:sldLayoutId id="2147483686" r:id="rId8"/>
+    <p:sldLayoutId id="2147483687" r:id="rId9"/>
+    <p:sldLayoutId id="2147483688" r:id="rId10"/>
+    <p:sldLayoutId id="2147483689" r:id="rId11"/>
+    <p:sldLayoutId id="2147483690" r:id="rId12"/>
+    <p:sldLayoutId id="2147483691" r:id="rId13"/>
+    <p:sldLayoutId id="2147483692" r:id="rId14"/>
+    <p:sldLayoutId id="2147483693" r:id="rId15"/>
+    <p:sldLayoutId id="2147483694" r:id="rId16"/>
+    <p:sldLayoutId id="2147483695" r:id="rId17"/>
   </p:sldLayoutIdLst>
   <p:txStyles>
     <p:titleStyle>
-      <a:lvl1pPr algn="l" defTabSz="914400" rtl="0" eaLnBrk="1" latinLnBrk="0" hangingPunct="1">
-        <a:lnSpc>
-          <a:spcPct val="90000"/>
-        </a:lnSpc>
+      <a:lvl1pPr algn="l" defTabSz="457200" rtl="0" eaLnBrk="1" latinLnBrk="0" hangingPunct="1">
         <a:spcBef>
           <a:spcPct val="0"/>
         </a:spcBef>
         <a:buNone/>
-        <a:defRPr sz="3600" kern="1200">
+        <a:defRPr sz="4200" b="0" i="0" kern="1200">
+          <a:solidFill>
+            <a:schemeClr val="tx2"/>
+          </a:solidFill>
+          <a:latin typeface="+mj-lt"/>
+          <a:ea typeface="+mj-ea"/>
+          <a:cs typeface="+mj-cs"/>
+        </a:defRPr>
+      </a:lvl1pPr>
+      <a:lvl2pPr eaLnBrk="1" hangingPunct="1">
+        <a:defRPr>
+          <a:solidFill>
+            <a:schemeClr val="tx2"/>
+          </a:solidFill>
+        </a:defRPr>
+      </a:lvl2pPr>
+      <a:lvl3pPr eaLnBrk="1" hangingPunct="1">
+        <a:defRPr>
+          <a:solidFill>
+            <a:schemeClr val="tx2"/>
+          </a:solidFill>
+        </a:defRPr>
+      </a:lvl3pPr>
+      <a:lvl4pPr eaLnBrk="1" hangingPunct="1">
+        <a:defRPr>
+          <a:solidFill>
+            <a:schemeClr val="tx2"/>
+          </a:solidFill>
+        </a:defRPr>
+      </a:lvl4pPr>
+      <a:lvl5pPr eaLnBrk="1" hangingPunct="1">
+        <a:defRPr>
+          <a:solidFill>
+            <a:schemeClr val="tx2"/>
+          </a:solidFill>
+        </a:defRPr>
+      </a:lvl5pPr>
+      <a:lvl6pPr eaLnBrk="1" hangingPunct="1">
+        <a:defRPr>
+          <a:solidFill>
+            <a:schemeClr val="tx2"/>
+          </a:solidFill>
+        </a:defRPr>
+      </a:lvl6pPr>
+      <a:lvl7pPr eaLnBrk="1" hangingPunct="1">
+        <a:defRPr>
+          <a:solidFill>
+            <a:schemeClr val="tx2"/>
+          </a:solidFill>
+        </a:defRPr>
+      </a:lvl7pPr>
+      <a:lvl8pPr eaLnBrk="1" hangingPunct="1">
+        <a:defRPr>
+          <a:solidFill>
+            <a:schemeClr val="tx2"/>
+          </a:solidFill>
+        </a:defRPr>
+      </a:lvl8pPr>
+      <a:lvl9pPr eaLnBrk="1" hangingPunct="1">
+        <a:defRPr>
+          <a:solidFill>
+            <a:schemeClr val="tx2"/>
+          </a:solidFill>
+        </a:defRPr>
+      </a:lvl9pPr>
+    </p:titleStyle>
+    <p:bodyStyle>
+      <a:lvl1pPr marL="342900" indent="-342900" algn="l" defTabSz="457200" rtl="0" eaLnBrk="1" latinLnBrk="0" hangingPunct="1">
+        <a:spcBef>
+          <a:spcPts val="1000"/>
+        </a:spcBef>
+        <a:spcAft>
+          <a:spcPts val="0"/>
+        </a:spcAft>
+        <a:buClr>
+          <a:schemeClr val="bg2">
+            <a:lumMod val="40000"/>
+            <a:lumOff val="60000"/>
+          </a:schemeClr>
+        </a:buClr>
+        <a:buSzPct val="80000"/>
+        <a:buFont typeface="Wingdings 3" charset="2"/>
+        <a:buChar char=""/>
+        <a:defRPr sz="2000" b="0" i="0" kern="1200">
           <a:solidFill>
             <a:schemeClr val="tx1"/>
           </a:solidFill>
@@ -7490,18 +5791,213 @@
           <a:cs typeface="+mj-cs"/>
         </a:defRPr>
       </a:lvl1pPr>
-    </p:titleStyle>
-    <p:bodyStyle>
-      <a:lvl1pPr marL="228600" indent="-228600" algn="l" defTabSz="914400" rtl="0" eaLnBrk="1" latinLnBrk="0" hangingPunct="1">
-        <a:lnSpc>
-          <a:spcPct val="90000"/>
-        </a:lnSpc>
+      <a:lvl2pPr marL="742950" indent="-285750" algn="l" defTabSz="457200" rtl="0" eaLnBrk="1" latinLnBrk="0" hangingPunct="1">
         <a:spcBef>
           <a:spcPts val="1000"/>
         </a:spcBef>
-        <a:buFont typeface="Arial" panose="020B0604020202020204" pitchFamily="34" charset="0"/>
-        <a:buChar char="•"/>
-        <a:defRPr sz="2400" kern="1200">
+        <a:spcAft>
+          <a:spcPts val="0"/>
+        </a:spcAft>
+        <a:buClr>
+          <a:schemeClr val="bg2">
+            <a:lumMod val="40000"/>
+            <a:lumOff val="60000"/>
+          </a:schemeClr>
+        </a:buClr>
+        <a:buSzPct val="80000"/>
+        <a:buFont typeface="Wingdings 3" charset="2"/>
+        <a:buChar char=""/>
+        <a:defRPr sz="1800" b="0" i="0" kern="1200">
+          <a:solidFill>
+            <a:schemeClr val="tx1"/>
+          </a:solidFill>
+          <a:latin typeface="+mj-lt"/>
+          <a:ea typeface="+mj-ea"/>
+          <a:cs typeface="+mj-cs"/>
+        </a:defRPr>
+      </a:lvl2pPr>
+      <a:lvl3pPr marL="1143000" indent="-228600" algn="l" defTabSz="457200" rtl="0" eaLnBrk="1" latinLnBrk="0" hangingPunct="1">
+        <a:spcBef>
+          <a:spcPts val="1000"/>
+        </a:spcBef>
+        <a:spcAft>
+          <a:spcPts val="0"/>
+        </a:spcAft>
+        <a:buClr>
+          <a:schemeClr val="bg2">
+            <a:lumMod val="40000"/>
+            <a:lumOff val="60000"/>
+          </a:schemeClr>
+        </a:buClr>
+        <a:buSzPct val="80000"/>
+        <a:buFont typeface="Wingdings 3" charset="2"/>
+        <a:buChar char=""/>
+        <a:defRPr sz="1600" b="0" i="0" kern="1200">
+          <a:solidFill>
+            <a:schemeClr val="tx1"/>
+          </a:solidFill>
+          <a:latin typeface="+mj-lt"/>
+          <a:ea typeface="+mj-ea"/>
+          <a:cs typeface="+mj-cs"/>
+        </a:defRPr>
+      </a:lvl3pPr>
+      <a:lvl4pPr marL="1600200" indent="-228600" algn="l" defTabSz="457200" rtl="0" eaLnBrk="1" latinLnBrk="0" hangingPunct="1">
+        <a:spcBef>
+          <a:spcPts val="1000"/>
+        </a:spcBef>
+        <a:spcAft>
+          <a:spcPts val="0"/>
+        </a:spcAft>
+        <a:buClr>
+          <a:schemeClr val="bg2">
+            <a:lumMod val="40000"/>
+            <a:lumOff val="60000"/>
+          </a:schemeClr>
+        </a:buClr>
+        <a:buSzPct val="80000"/>
+        <a:buFont typeface="Wingdings 3" charset="2"/>
+        <a:buChar char=""/>
+        <a:defRPr sz="1400" b="0" i="0" kern="1200">
+          <a:solidFill>
+            <a:schemeClr val="tx1"/>
+          </a:solidFill>
+          <a:latin typeface="+mj-lt"/>
+          <a:ea typeface="+mj-ea"/>
+          <a:cs typeface="+mj-cs"/>
+        </a:defRPr>
+      </a:lvl4pPr>
+      <a:lvl5pPr marL="2057400" indent="-228600" algn="l" defTabSz="457200" rtl="0" eaLnBrk="1" latinLnBrk="0" hangingPunct="1">
+        <a:spcBef>
+          <a:spcPts val="1000"/>
+        </a:spcBef>
+        <a:spcAft>
+          <a:spcPts val="0"/>
+        </a:spcAft>
+        <a:buClr>
+          <a:schemeClr val="bg2">
+            <a:lumMod val="40000"/>
+            <a:lumOff val="60000"/>
+          </a:schemeClr>
+        </a:buClr>
+        <a:buSzPct val="80000"/>
+        <a:buFont typeface="Wingdings 3" charset="2"/>
+        <a:buChar char=""/>
+        <a:defRPr sz="1400" b="0" i="0" kern="1200">
+          <a:solidFill>
+            <a:schemeClr val="tx1"/>
+          </a:solidFill>
+          <a:latin typeface="+mj-lt"/>
+          <a:ea typeface="+mj-ea"/>
+          <a:cs typeface="+mj-cs"/>
+        </a:defRPr>
+      </a:lvl5pPr>
+      <a:lvl6pPr marL="2506000" indent="-228600" algn="l" defTabSz="457200" rtl="0" eaLnBrk="1" latinLnBrk="0" hangingPunct="1">
+        <a:spcBef>
+          <a:spcPts val="1000"/>
+        </a:spcBef>
+        <a:spcAft>
+          <a:spcPts val="0"/>
+        </a:spcAft>
+        <a:buClr>
+          <a:schemeClr val="bg2">
+            <a:lumMod val="40000"/>
+            <a:lumOff val="60000"/>
+          </a:schemeClr>
+        </a:buClr>
+        <a:buSzPct val="80000"/>
+        <a:buFont typeface="Wingdings 3" charset="2"/>
+        <a:buChar char=""/>
+        <a:defRPr sz="1400" b="0" i="0" kern="1200">
+          <a:solidFill>
+            <a:schemeClr val="tx1"/>
+          </a:solidFill>
+          <a:latin typeface="+mj-lt"/>
+          <a:ea typeface="+mj-ea"/>
+          <a:cs typeface="+mj-cs"/>
+        </a:defRPr>
+      </a:lvl6pPr>
+      <a:lvl7pPr marL="2971800" indent="-228600" algn="l" defTabSz="457200" rtl="0" eaLnBrk="1" latinLnBrk="0" hangingPunct="1">
+        <a:spcBef>
+          <a:spcPts val="1000"/>
+        </a:spcBef>
+        <a:spcAft>
+          <a:spcPts val="0"/>
+        </a:spcAft>
+        <a:buClr>
+          <a:schemeClr val="bg2">
+            <a:lumMod val="40000"/>
+            <a:lumOff val="60000"/>
+          </a:schemeClr>
+        </a:buClr>
+        <a:buSzPct val="80000"/>
+        <a:buFont typeface="Wingdings 3" charset="2"/>
+        <a:buChar char=""/>
+        <a:defRPr sz="1400" b="0" i="0" kern="1200">
+          <a:solidFill>
+            <a:schemeClr val="tx1"/>
+          </a:solidFill>
+          <a:latin typeface="+mj-lt"/>
+          <a:ea typeface="+mj-ea"/>
+          <a:cs typeface="+mj-cs"/>
+        </a:defRPr>
+      </a:lvl7pPr>
+      <a:lvl8pPr marL="3429000" indent="-228600" algn="l" defTabSz="457200" rtl="0" eaLnBrk="1" latinLnBrk="0" hangingPunct="1">
+        <a:spcBef>
+          <a:spcPts val="1000"/>
+        </a:spcBef>
+        <a:spcAft>
+          <a:spcPts val="0"/>
+        </a:spcAft>
+        <a:buClr>
+          <a:schemeClr val="bg2">
+            <a:lumMod val="40000"/>
+            <a:lumOff val="60000"/>
+          </a:schemeClr>
+        </a:buClr>
+        <a:buSzPct val="80000"/>
+        <a:buFont typeface="Wingdings 3" charset="2"/>
+        <a:buChar char=""/>
+        <a:defRPr sz="1400" b="0" i="0" kern="1200">
+          <a:solidFill>
+            <a:schemeClr val="tx1"/>
+          </a:solidFill>
+          <a:latin typeface="+mj-lt"/>
+          <a:ea typeface="+mj-ea"/>
+          <a:cs typeface="+mj-cs"/>
+        </a:defRPr>
+      </a:lvl8pPr>
+      <a:lvl9pPr marL="3886200" indent="-228600" algn="l" defTabSz="457200" rtl="0" eaLnBrk="1" latinLnBrk="0" hangingPunct="1">
+        <a:spcBef>
+          <a:spcPts val="1000"/>
+        </a:spcBef>
+        <a:spcAft>
+          <a:spcPts val="0"/>
+        </a:spcAft>
+        <a:buClr>
+          <a:schemeClr val="bg2">
+            <a:lumMod val="40000"/>
+            <a:lumOff val="60000"/>
+          </a:schemeClr>
+        </a:buClr>
+        <a:buSzPct val="80000"/>
+        <a:buFont typeface="Wingdings 3" charset="2"/>
+        <a:buChar char=""/>
+        <a:defRPr sz="1400" b="0" i="0" kern="1200">
+          <a:solidFill>
+            <a:schemeClr val="tx1"/>
+          </a:solidFill>
+          <a:latin typeface="+mj-lt"/>
+          <a:ea typeface="+mj-ea"/>
+          <a:cs typeface="+mj-cs"/>
+        </a:defRPr>
+      </a:lvl9pPr>
+    </p:bodyStyle>
+    <p:otherStyle>
+      <a:defPPr>
+        <a:defRPr lang="en-US"/>
+      </a:defPPr>
+      <a:lvl1pPr marL="0" algn="l" defTabSz="457200" rtl="0" eaLnBrk="1" latinLnBrk="0" hangingPunct="1">
+        <a:defRPr sz="1800" kern="1200">
           <a:solidFill>
             <a:schemeClr val="tx1"/>
           </a:solidFill>
@@ -7510,16 +6006,8 @@
           <a:cs typeface="+mn-cs"/>
         </a:defRPr>
       </a:lvl1pPr>
-      <a:lvl2pPr marL="685800" indent="-228600" algn="l" defTabSz="914400" rtl="0" eaLnBrk="1" latinLnBrk="0" hangingPunct="1">
-        <a:lnSpc>
-          <a:spcPct val="90000"/>
-        </a:lnSpc>
-        <a:spcBef>
-          <a:spcPts val="500"/>
-        </a:spcBef>
-        <a:buFont typeface="Arial" panose="020B0604020202020204" pitchFamily="34" charset="0"/>
-        <a:buChar char="•"/>
-        <a:defRPr sz="2000" kern="1200">
+      <a:lvl2pPr marL="457200" algn="l" defTabSz="457200" rtl="0" eaLnBrk="1" latinLnBrk="0" hangingPunct="1">
+        <a:defRPr sz="1800" kern="1200">
           <a:solidFill>
             <a:schemeClr val="tx1"/>
           </a:solidFill>
@@ -7528,15 +6016,7 @@
           <a:cs typeface="+mn-cs"/>
         </a:defRPr>
       </a:lvl2pPr>
-      <a:lvl3pPr marL="1143000" indent="-228600" algn="l" defTabSz="914400" rtl="0" eaLnBrk="1" latinLnBrk="0" hangingPunct="1">
-        <a:lnSpc>
-          <a:spcPct val="90000"/>
-        </a:lnSpc>
-        <a:spcBef>
-          <a:spcPts val="500"/>
-        </a:spcBef>
-        <a:buFont typeface="Arial" panose="020B0604020202020204" pitchFamily="34" charset="0"/>
-        <a:buChar char="•"/>
+      <a:lvl3pPr marL="914400" algn="l" defTabSz="457200" rtl="0" eaLnBrk="1" latinLnBrk="0" hangingPunct="1">
         <a:defRPr sz="1800" kern="1200">
           <a:solidFill>
             <a:schemeClr val="tx1"/>
@@ -7546,150 +6026,7 @@
           <a:cs typeface="+mn-cs"/>
         </a:defRPr>
       </a:lvl3pPr>
-      <a:lvl4pPr marL="1600200" indent="-228600" algn="l" defTabSz="914400" rtl="0" eaLnBrk="1" latinLnBrk="0" hangingPunct="1">
-        <a:lnSpc>
-          <a:spcPct val="90000"/>
-        </a:lnSpc>
-        <a:spcBef>
-          <a:spcPts val="500"/>
-        </a:spcBef>
-        <a:buFont typeface="Arial" panose="020B0604020202020204" pitchFamily="34" charset="0"/>
-        <a:buChar char="•"/>
-        <a:defRPr sz="1600" kern="1200">
-          <a:solidFill>
-            <a:schemeClr val="tx1"/>
-          </a:solidFill>
-          <a:latin typeface="+mn-lt"/>
-          <a:ea typeface="+mn-ea"/>
-          <a:cs typeface="+mn-cs"/>
-        </a:defRPr>
-      </a:lvl4pPr>
-      <a:lvl5pPr marL="2057400" indent="-228600" algn="l" defTabSz="914400" rtl="0" eaLnBrk="1" latinLnBrk="0" hangingPunct="1">
-        <a:lnSpc>
-          <a:spcPct val="90000"/>
-        </a:lnSpc>
-        <a:spcBef>
-          <a:spcPts val="500"/>
-        </a:spcBef>
-        <a:buFont typeface="Arial" panose="020B0604020202020204" pitchFamily="34" charset="0"/>
-        <a:buChar char="•"/>
-        <a:defRPr sz="1600" kern="1200">
-          <a:solidFill>
-            <a:schemeClr val="tx1"/>
-          </a:solidFill>
-          <a:latin typeface="+mn-lt"/>
-          <a:ea typeface="+mn-ea"/>
-          <a:cs typeface="+mn-cs"/>
-        </a:defRPr>
-      </a:lvl5pPr>
-      <a:lvl6pPr marL="2514600" indent="-228600" algn="l" defTabSz="914400" rtl="0" eaLnBrk="1" latinLnBrk="0" hangingPunct="1">
-        <a:lnSpc>
-          <a:spcPct val="90000"/>
-        </a:lnSpc>
-        <a:spcBef>
-          <a:spcPts val="500"/>
-        </a:spcBef>
-        <a:buFont typeface="Arial" panose="020B0604020202020204" pitchFamily="34" charset="0"/>
-        <a:buChar char="•"/>
-        <a:defRPr sz="1400" kern="1200">
-          <a:solidFill>
-            <a:schemeClr val="tx1"/>
-          </a:solidFill>
-          <a:latin typeface="+mn-lt"/>
-          <a:ea typeface="+mn-ea"/>
-          <a:cs typeface="+mn-cs"/>
-        </a:defRPr>
-      </a:lvl6pPr>
-      <a:lvl7pPr marL="2971800" indent="-228600" algn="l" defTabSz="914400" rtl="0" eaLnBrk="1" latinLnBrk="0" hangingPunct="1">
-        <a:lnSpc>
-          <a:spcPct val="90000"/>
-        </a:lnSpc>
-        <a:spcBef>
-          <a:spcPts val="500"/>
-        </a:spcBef>
-        <a:buFont typeface="Arial" panose="020B0604020202020204" pitchFamily="34" charset="0"/>
-        <a:buChar char="•"/>
-        <a:defRPr sz="1400" kern="1200">
-          <a:solidFill>
-            <a:schemeClr val="tx1"/>
-          </a:solidFill>
-          <a:latin typeface="+mn-lt"/>
-          <a:ea typeface="+mn-ea"/>
-          <a:cs typeface="+mn-cs"/>
-        </a:defRPr>
-      </a:lvl7pPr>
-      <a:lvl8pPr marL="3429000" indent="-228600" algn="l" defTabSz="914400" rtl="0" eaLnBrk="1" latinLnBrk="0" hangingPunct="1">
-        <a:lnSpc>
-          <a:spcPct val="90000"/>
-        </a:lnSpc>
-        <a:spcBef>
-          <a:spcPts val="500"/>
-        </a:spcBef>
-        <a:buFont typeface="Arial" panose="020B0604020202020204" pitchFamily="34" charset="0"/>
-        <a:buChar char="•"/>
-        <a:defRPr sz="1400" kern="1200">
-          <a:solidFill>
-            <a:schemeClr val="tx1"/>
-          </a:solidFill>
-          <a:latin typeface="+mn-lt"/>
-          <a:ea typeface="+mn-ea"/>
-          <a:cs typeface="+mn-cs"/>
-        </a:defRPr>
-      </a:lvl8pPr>
-      <a:lvl9pPr marL="3886200" indent="-228600" algn="l" defTabSz="914400" rtl="0" eaLnBrk="1" latinLnBrk="0" hangingPunct="1">
-        <a:lnSpc>
-          <a:spcPct val="90000"/>
-        </a:lnSpc>
-        <a:spcBef>
-          <a:spcPts val="500"/>
-        </a:spcBef>
-        <a:buFont typeface="Arial" panose="020B0604020202020204" pitchFamily="34" charset="0"/>
-        <a:buChar char="•"/>
-        <a:defRPr sz="1400" kern="1200">
-          <a:solidFill>
-            <a:schemeClr val="tx1"/>
-          </a:solidFill>
-          <a:latin typeface="+mn-lt"/>
-          <a:ea typeface="+mn-ea"/>
-          <a:cs typeface="+mn-cs"/>
-        </a:defRPr>
-      </a:lvl9pPr>
-    </p:bodyStyle>
-    <p:otherStyle>
-      <a:defPPr>
-        <a:defRPr lang="en-US"/>
-      </a:defPPr>
-      <a:lvl1pPr marL="0" algn="l" defTabSz="914400" rtl="0" eaLnBrk="1" latinLnBrk="0" hangingPunct="1">
-        <a:defRPr sz="1800" kern="1200">
-          <a:solidFill>
-            <a:schemeClr val="tx1"/>
-          </a:solidFill>
-          <a:latin typeface="+mn-lt"/>
-          <a:ea typeface="+mn-ea"/>
-          <a:cs typeface="+mn-cs"/>
-        </a:defRPr>
-      </a:lvl1pPr>
-      <a:lvl2pPr marL="457200" algn="l" defTabSz="914400" rtl="0" eaLnBrk="1" latinLnBrk="0" hangingPunct="1">
-        <a:defRPr sz="1800" kern="1200">
-          <a:solidFill>
-            <a:schemeClr val="tx1"/>
-          </a:solidFill>
-          <a:latin typeface="+mn-lt"/>
-          <a:ea typeface="+mn-ea"/>
-          <a:cs typeface="+mn-cs"/>
-        </a:defRPr>
-      </a:lvl2pPr>
-      <a:lvl3pPr marL="914400" algn="l" defTabSz="914400" rtl="0" eaLnBrk="1" latinLnBrk="0" hangingPunct="1">
-        <a:defRPr sz="1800" kern="1200">
-          <a:solidFill>
-            <a:schemeClr val="tx1"/>
-          </a:solidFill>
-          <a:latin typeface="+mn-lt"/>
-          <a:ea typeface="+mn-ea"/>
-          <a:cs typeface="+mn-cs"/>
-        </a:defRPr>
-      </a:lvl3pPr>
-      <a:lvl4pPr marL="1371600" algn="l" defTabSz="914400" rtl="0" eaLnBrk="1" latinLnBrk="0" hangingPunct="1">
+      <a:lvl4pPr marL="1371600" algn="l" defTabSz="457200" rtl="0" eaLnBrk="1" latinLnBrk="0" hangingPunct="1">
         <a:defRPr sz="1800" kern="1200">
           <a:solidFill>
             <a:schemeClr val="tx1"/>
@@ -7699,7 +6036,7 @@
           <a:cs typeface="+mn-cs"/>
         </a:defRPr>
       </a:lvl4pPr>
-      <a:lvl5pPr marL="1828800" algn="l" defTabSz="914400" rtl="0" eaLnBrk="1" latinLnBrk="0" hangingPunct="1">
+      <a:lvl5pPr marL="1828800" algn="l" defTabSz="457200" rtl="0" eaLnBrk="1" latinLnBrk="0" hangingPunct="1">
         <a:defRPr sz="1800" kern="1200">
           <a:solidFill>
             <a:schemeClr val="tx1"/>
@@ -7709,7 +6046,7 @@
           <a:cs typeface="+mn-cs"/>
         </a:defRPr>
       </a:lvl5pPr>
-      <a:lvl6pPr marL="2286000" algn="l" defTabSz="914400" rtl="0" eaLnBrk="1" latinLnBrk="0" hangingPunct="1">
+      <a:lvl6pPr marL="2286000" algn="l" defTabSz="457200" rtl="0" eaLnBrk="1" latinLnBrk="0" hangingPunct="1">
         <a:defRPr sz="1800" kern="1200">
           <a:solidFill>
             <a:schemeClr val="tx1"/>
@@ -7719,7 +6056,7 @@
           <a:cs typeface="+mn-cs"/>
         </a:defRPr>
       </a:lvl6pPr>
-      <a:lvl7pPr marL="2743200" algn="l" defTabSz="914400" rtl="0" eaLnBrk="1" latinLnBrk="0" hangingPunct="1">
+      <a:lvl7pPr marL="2743200" algn="l" defTabSz="457200" rtl="0" eaLnBrk="1" latinLnBrk="0" hangingPunct="1">
         <a:defRPr sz="1800" kern="1200">
           <a:solidFill>
             <a:schemeClr val="tx1"/>
@@ -7729,7 +6066,7 @@
           <a:cs typeface="+mn-cs"/>
         </a:defRPr>
       </a:lvl7pPr>
-      <a:lvl8pPr marL="3200400" algn="l" defTabSz="914400" rtl="0" eaLnBrk="1" latinLnBrk="0" hangingPunct="1">
+      <a:lvl8pPr marL="3200400" algn="l" defTabSz="457200" rtl="0" eaLnBrk="1" latinLnBrk="0" hangingPunct="1">
         <a:defRPr sz="1800" kern="1200">
           <a:solidFill>
             <a:schemeClr val="tx1"/>
@@ -7739,7 +6076,7 @@
           <a:cs typeface="+mn-cs"/>
         </a:defRPr>
       </a:lvl8pPr>
-      <a:lvl9pPr marL="3657600" algn="l" defTabSz="914400" rtl="0" eaLnBrk="1" latinLnBrk="0" hangingPunct="1">
+      <a:lvl9pPr marL="3657600" algn="l" defTabSz="457200" rtl="0" eaLnBrk="1" latinLnBrk="0" hangingPunct="1">
         <a:defRPr sz="1800" kern="1200">
           <a:solidFill>
             <a:schemeClr val="tx1"/>
@@ -7789,7 +6126,7 @@
         </p:nvSpPr>
         <p:spPr>
           <a:xfrm>
-            <a:off x="59634" y="2742465"/>
+            <a:off x="371060" y="2742465"/>
             <a:ext cx="8824456" cy="1373070"/>
           </a:xfrm>
         </p:spPr>
@@ -7842,6 +6179,86 @@
     <p:extLst>
       <p:ext uri="{BB962C8B-B14F-4D97-AF65-F5344CB8AC3E}">
         <p14:creationId xmlns:p14="http://schemas.microsoft.com/office/powerpoint/2010/main" val="2448034382"/>
+      </p:ext>
+    </p:extLst>
+  </p:cSld>
+  <p:clrMapOvr>
+    <a:masterClrMapping/>
+  </p:clrMapOvr>
+</p:sld>
+</file>
+
+<file path=ppt/slides/slide10.xml><?xml version="1.0" encoding="utf-8"?>
+<p:sld xmlns:a="http://schemas.openxmlformats.org/drawingml/2006/main" xmlns:r="http://schemas.openxmlformats.org/officeDocument/2006/relationships" xmlns:p="http://schemas.openxmlformats.org/presentationml/2006/main">
+  <p:cSld>
+    <p:spTree>
+      <p:nvGrpSpPr>
+        <p:cNvPr id="1" name=""/>
+        <p:cNvGrpSpPr/>
+        <p:nvPr/>
+      </p:nvGrpSpPr>
+      <p:grpSpPr>
+        <a:xfrm>
+          <a:off x="0" y="0"/>
+          <a:ext cx="0" cy="0"/>
+          <a:chOff x="0" y="0"/>
+          <a:chExt cx="0" cy="0"/>
+        </a:xfrm>
+      </p:grpSpPr>
+      <p:sp>
+        <p:nvSpPr>
+          <p:cNvPr id="2" name="Title 1">
+            <a:extLst>
+              <a:ext uri="{FF2B5EF4-FFF2-40B4-BE49-F238E27FC236}">
+                <a16:creationId xmlns:a16="http://schemas.microsoft.com/office/drawing/2014/main" id="{98CC0FC4-37E1-FB54-A9BD-E5FCFED5CDE6}"/>
+              </a:ext>
+            </a:extLst>
+          </p:cNvPr>
+          <p:cNvSpPr>
+            <a:spLocks noGrp="1"/>
+          </p:cNvSpPr>
+          <p:nvPr>
+            <p:ph type="title"/>
+          </p:nvPr>
+        </p:nvSpPr>
+        <p:spPr/>
+        <p:txBody>
+          <a:bodyPr/>
+          <a:lstStyle/>
+          <a:p>
+            <a:endParaRPr lang="en-US"/>
+          </a:p>
+        </p:txBody>
+      </p:sp>
+      <p:sp>
+        <p:nvSpPr>
+          <p:cNvPr id="3" name="Content Placeholder 2">
+            <a:extLst>
+              <a:ext uri="{FF2B5EF4-FFF2-40B4-BE49-F238E27FC236}">
+                <a16:creationId xmlns:a16="http://schemas.microsoft.com/office/drawing/2014/main" id="{F9414019-70BC-0C7E-6447-5955B71A1B33}"/>
+              </a:ext>
+            </a:extLst>
+          </p:cNvPr>
+          <p:cNvSpPr>
+            <a:spLocks noGrp="1"/>
+          </p:cNvSpPr>
+          <p:nvPr>
+            <p:ph idx="1"/>
+          </p:nvPr>
+        </p:nvSpPr>
+        <p:spPr/>
+        <p:txBody>
+          <a:bodyPr/>
+          <a:lstStyle/>
+          <a:p>
+            <a:endParaRPr lang="en-US"/>
+          </a:p>
+        </p:txBody>
+      </p:sp>
+    </p:spTree>
+    <p:extLst>
+      <p:ext uri="{BB962C8B-B14F-4D97-AF65-F5344CB8AC3E}">
+        <p14:creationId xmlns:p14="http://schemas.microsoft.com/office/powerpoint/2010/main" val="4029036773"/>
       </p:ext>
     </p:extLst>
   </p:cSld>
@@ -7931,10 +6348,570 @@
 </p:sld>
 </file>
 
+<file path=ppt/slides/slide3.xml><?xml version="1.0" encoding="utf-8"?>
+<p:sld xmlns:a="http://schemas.openxmlformats.org/drawingml/2006/main" xmlns:r="http://schemas.openxmlformats.org/officeDocument/2006/relationships" xmlns:p="http://schemas.openxmlformats.org/presentationml/2006/main">
+  <p:cSld>
+    <p:spTree>
+      <p:nvGrpSpPr>
+        <p:cNvPr id="1" name=""/>
+        <p:cNvGrpSpPr/>
+        <p:nvPr/>
+      </p:nvGrpSpPr>
+      <p:grpSpPr>
+        <a:xfrm>
+          <a:off x="0" y="0"/>
+          <a:ext cx="0" cy="0"/>
+          <a:chOff x="0" y="0"/>
+          <a:chExt cx="0" cy="0"/>
+        </a:xfrm>
+      </p:grpSpPr>
+      <p:sp>
+        <p:nvSpPr>
+          <p:cNvPr id="2" name="Title 1">
+            <a:extLst>
+              <a:ext uri="{FF2B5EF4-FFF2-40B4-BE49-F238E27FC236}">
+                <a16:creationId xmlns:a16="http://schemas.microsoft.com/office/drawing/2014/main" id="{1485D805-20E0-8C11-702F-8EAA37B56B2E}"/>
+              </a:ext>
+            </a:extLst>
+          </p:cNvPr>
+          <p:cNvSpPr>
+            <a:spLocks noGrp="1"/>
+          </p:cNvSpPr>
+          <p:nvPr>
+            <p:ph type="title"/>
+          </p:nvPr>
+        </p:nvSpPr>
+        <p:spPr/>
+        <p:txBody>
+          <a:bodyPr/>
+          <a:lstStyle/>
+          <a:p>
+            <a:endParaRPr lang="en-US"/>
+          </a:p>
+        </p:txBody>
+      </p:sp>
+      <p:sp>
+        <p:nvSpPr>
+          <p:cNvPr id="3" name="Content Placeholder 2">
+            <a:extLst>
+              <a:ext uri="{FF2B5EF4-FFF2-40B4-BE49-F238E27FC236}">
+                <a16:creationId xmlns:a16="http://schemas.microsoft.com/office/drawing/2014/main" id="{8E64A81C-7C24-2D91-1605-4E3A2EFCC2AD}"/>
+              </a:ext>
+            </a:extLst>
+          </p:cNvPr>
+          <p:cNvSpPr>
+            <a:spLocks noGrp="1"/>
+          </p:cNvSpPr>
+          <p:nvPr>
+            <p:ph idx="1"/>
+          </p:nvPr>
+        </p:nvSpPr>
+        <p:spPr/>
+        <p:txBody>
+          <a:bodyPr/>
+          <a:lstStyle/>
+          <a:p>
+            <a:endParaRPr lang="en-US"/>
+          </a:p>
+        </p:txBody>
+      </p:sp>
+    </p:spTree>
+    <p:extLst>
+      <p:ext uri="{BB962C8B-B14F-4D97-AF65-F5344CB8AC3E}">
+        <p14:creationId xmlns:p14="http://schemas.microsoft.com/office/powerpoint/2010/main" val="2812330748"/>
+      </p:ext>
+    </p:extLst>
+  </p:cSld>
+  <p:clrMapOvr>
+    <a:masterClrMapping/>
+  </p:clrMapOvr>
+</p:sld>
+</file>
+
+<file path=ppt/slides/slide4.xml><?xml version="1.0" encoding="utf-8"?>
+<p:sld xmlns:a="http://schemas.openxmlformats.org/drawingml/2006/main" xmlns:r="http://schemas.openxmlformats.org/officeDocument/2006/relationships" xmlns:p="http://schemas.openxmlformats.org/presentationml/2006/main">
+  <p:cSld>
+    <p:spTree>
+      <p:nvGrpSpPr>
+        <p:cNvPr id="1" name=""/>
+        <p:cNvGrpSpPr/>
+        <p:nvPr/>
+      </p:nvGrpSpPr>
+      <p:grpSpPr>
+        <a:xfrm>
+          <a:off x="0" y="0"/>
+          <a:ext cx="0" cy="0"/>
+          <a:chOff x="0" y="0"/>
+          <a:chExt cx="0" cy="0"/>
+        </a:xfrm>
+      </p:grpSpPr>
+      <p:sp>
+        <p:nvSpPr>
+          <p:cNvPr id="2" name="Title 1">
+            <a:extLst>
+              <a:ext uri="{FF2B5EF4-FFF2-40B4-BE49-F238E27FC236}">
+                <a16:creationId xmlns:a16="http://schemas.microsoft.com/office/drawing/2014/main" id="{A7FEC01E-1AE5-AB52-A97E-03233B157A5F}"/>
+              </a:ext>
+            </a:extLst>
+          </p:cNvPr>
+          <p:cNvSpPr>
+            <a:spLocks noGrp="1"/>
+          </p:cNvSpPr>
+          <p:nvPr>
+            <p:ph type="title"/>
+          </p:nvPr>
+        </p:nvSpPr>
+        <p:spPr/>
+        <p:txBody>
+          <a:bodyPr/>
+          <a:lstStyle/>
+          <a:p>
+            <a:endParaRPr lang="en-US"/>
+          </a:p>
+        </p:txBody>
+      </p:sp>
+      <p:sp>
+        <p:nvSpPr>
+          <p:cNvPr id="3" name="Content Placeholder 2">
+            <a:extLst>
+              <a:ext uri="{FF2B5EF4-FFF2-40B4-BE49-F238E27FC236}">
+                <a16:creationId xmlns:a16="http://schemas.microsoft.com/office/drawing/2014/main" id="{2D83C092-3EEA-CCFC-A460-B9207524F557}"/>
+              </a:ext>
+            </a:extLst>
+          </p:cNvPr>
+          <p:cNvSpPr>
+            <a:spLocks noGrp="1"/>
+          </p:cNvSpPr>
+          <p:nvPr>
+            <p:ph idx="1"/>
+          </p:nvPr>
+        </p:nvSpPr>
+        <p:spPr/>
+        <p:txBody>
+          <a:bodyPr/>
+          <a:lstStyle/>
+          <a:p>
+            <a:endParaRPr lang="en-US"/>
+          </a:p>
+        </p:txBody>
+      </p:sp>
+    </p:spTree>
+    <p:extLst>
+      <p:ext uri="{BB962C8B-B14F-4D97-AF65-F5344CB8AC3E}">
+        <p14:creationId xmlns:p14="http://schemas.microsoft.com/office/powerpoint/2010/main" val="79897398"/>
+      </p:ext>
+    </p:extLst>
+  </p:cSld>
+  <p:clrMapOvr>
+    <a:masterClrMapping/>
+  </p:clrMapOvr>
+</p:sld>
+</file>
+
+<file path=ppt/slides/slide5.xml><?xml version="1.0" encoding="utf-8"?>
+<p:sld xmlns:a="http://schemas.openxmlformats.org/drawingml/2006/main" xmlns:r="http://schemas.openxmlformats.org/officeDocument/2006/relationships" xmlns:p="http://schemas.openxmlformats.org/presentationml/2006/main">
+  <p:cSld>
+    <p:spTree>
+      <p:nvGrpSpPr>
+        <p:cNvPr id="1" name=""/>
+        <p:cNvGrpSpPr/>
+        <p:nvPr/>
+      </p:nvGrpSpPr>
+      <p:grpSpPr>
+        <a:xfrm>
+          <a:off x="0" y="0"/>
+          <a:ext cx="0" cy="0"/>
+          <a:chOff x="0" y="0"/>
+          <a:chExt cx="0" cy="0"/>
+        </a:xfrm>
+      </p:grpSpPr>
+      <p:sp>
+        <p:nvSpPr>
+          <p:cNvPr id="2" name="Title 1">
+            <a:extLst>
+              <a:ext uri="{FF2B5EF4-FFF2-40B4-BE49-F238E27FC236}">
+                <a16:creationId xmlns:a16="http://schemas.microsoft.com/office/drawing/2014/main" id="{230AF23A-85FA-AE25-D003-DBD69363FFB0}"/>
+              </a:ext>
+            </a:extLst>
+          </p:cNvPr>
+          <p:cNvSpPr>
+            <a:spLocks noGrp="1"/>
+          </p:cNvSpPr>
+          <p:nvPr>
+            <p:ph type="title"/>
+          </p:nvPr>
+        </p:nvSpPr>
+        <p:spPr/>
+        <p:txBody>
+          <a:bodyPr/>
+          <a:lstStyle/>
+          <a:p>
+            <a:endParaRPr lang="en-US"/>
+          </a:p>
+        </p:txBody>
+      </p:sp>
+      <p:sp>
+        <p:nvSpPr>
+          <p:cNvPr id="3" name="Content Placeholder 2">
+            <a:extLst>
+              <a:ext uri="{FF2B5EF4-FFF2-40B4-BE49-F238E27FC236}">
+                <a16:creationId xmlns:a16="http://schemas.microsoft.com/office/drawing/2014/main" id="{533B4645-8B0C-1110-2DDE-A2EA8F86556D}"/>
+              </a:ext>
+            </a:extLst>
+          </p:cNvPr>
+          <p:cNvSpPr>
+            <a:spLocks noGrp="1"/>
+          </p:cNvSpPr>
+          <p:nvPr>
+            <p:ph idx="1"/>
+          </p:nvPr>
+        </p:nvSpPr>
+        <p:spPr/>
+        <p:txBody>
+          <a:bodyPr/>
+          <a:lstStyle/>
+          <a:p>
+            <a:endParaRPr lang="en-US"/>
+          </a:p>
+        </p:txBody>
+      </p:sp>
+    </p:spTree>
+    <p:extLst>
+      <p:ext uri="{BB962C8B-B14F-4D97-AF65-F5344CB8AC3E}">
+        <p14:creationId xmlns:p14="http://schemas.microsoft.com/office/powerpoint/2010/main" val="311697414"/>
+      </p:ext>
+    </p:extLst>
+  </p:cSld>
+  <p:clrMapOvr>
+    <a:masterClrMapping/>
+  </p:clrMapOvr>
+</p:sld>
+</file>
+
+<file path=ppt/slides/slide6.xml><?xml version="1.0" encoding="utf-8"?>
+<p:sld xmlns:a="http://schemas.openxmlformats.org/drawingml/2006/main" xmlns:r="http://schemas.openxmlformats.org/officeDocument/2006/relationships" xmlns:p="http://schemas.openxmlformats.org/presentationml/2006/main">
+  <p:cSld>
+    <p:spTree>
+      <p:nvGrpSpPr>
+        <p:cNvPr id="1" name=""/>
+        <p:cNvGrpSpPr/>
+        <p:nvPr/>
+      </p:nvGrpSpPr>
+      <p:grpSpPr>
+        <a:xfrm>
+          <a:off x="0" y="0"/>
+          <a:ext cx="0" cy="0"/>
+          <a:chOff x="0" y="0"/>
+          <a:chExt cx="0" cy="0"/>
+        </a:xfrm>
+      </p:grpSpPr>
+      <p:sp>
+        <p:nvSpPr>
+          <p:cNvPr id="2" name="Title 1">
+            <a:extLst>
+              <a:ext uri="{FF2B5EF4-FFF2-40B4-BE49-F238E27FC236}">
+                <a16:creationId xmlns:a16="http://schemas.microsoft.com/office/drawing/2014/main" id="{B81F6638-B1C7-87F6-A2BA-8DE3C86A0E64}"/>
+              </a:ext>
+            </a:extLst>
+          </p:cNvPr>
+          <p:cNvSpPr>
+            <a:spLocks noGrp="1"/>
+          </p:cNvSpPr>
+          <p:nvPr>
+            <p:ph type="title"/>
+          </p:nvPr>
+        </p:nvSpPr>
+        <p:spPr/>
+        <p:txBody>
+          <a:bodyPr/>
+          <a:lstStyle/>
+          <a:p>
+            <a:endParaRPr lang="en-US"/>
+          </a:p>
+        </p:txBody>
+      </p:sp>
+      <p:sp>
+        <p:nvSpPr>
+          <p:cNvPr id="3" name="Content Placeholder 2">
+            <a:extLst>
+              <a:ext uri="{FF2B5EF4-FFF2-40B4-BE49-F238E27FC236}">
+                <a16:creationId xmlns:a16="http://schemas.microsoft.com/office/drawing/2014/main" id="{3FF139AA-D11B-A47F-43B4-874B0E827923}"/>
+              </a:ext>
+            </a:extLst>
+          </p:cNvPr>
+          <p:cNvSpPr>
+            <a:spLocks noGrp="1"/>
+          </p:cNvSpPr>
+          <p:nvPr>
+            <p:ph idx="1"/>
+          </p:nvPr>
+        </p:nvSpPr>
+        <p:spPr/>
+        <p:txBody>
+          <a:bodyPr/>
+          <a:lstStyle/>
+          <a:p>
+            <a:endParaRPr lang="en-US"/>
+          </a:p>
+        </p:txBody>
+      </p:sp>
+    </p:spTree>
+    <p:extLst>
+      <p:ext uri="{BB962C8B-B14F-4D97-AF65-F5344CB8AC3E}">
+        <p14:creationId xmlns:p14="http://schemas.microsoft.com/office/powerpoint/2010/main" val="4130892091"/>
+      </p:ext>
+    </p:extLst>
+  </p:cSld>
+  <p:clrMapOvr>
+    <a:masterClrMapping/>
+  </p:clrMapOvr>
+</p:sld>
+</file>
+
+<file path=ppt/slides/slide7.xml><?xml version="1.0" encoding="utf-8"?>
+<p:sld xmlns:a="http://schemas.openxmlformats.org/drawingml/2006/main" xmlns:r="http://schemas.openxmlformats.org/officeDocument/2006/relationships" xmlns:p="http://schemas.openxmlformats.org/presentationml/2006/main">
+  <p:cSld>
+    <p:spTree>
+      <p:nvGrpSpPr>
+        <p:cNvPr id="1" name=""/>
+        <p:cNvGrpSpPr/>
+        <p:nvPr/>
+      </p:nvGrpSpPr>
+      <p:grpSpPr>
+        <a:xfrm>
+          <a:off x="0" y="0"/>
+          <a:ext cx="0" cy="0"/>
+          <a:chOff x="0" y="0"/>
+          <a:chExt cx="0" cy="0"/>
+        </a:xfrm>
+      </p:grpSpPr>
+      <p:sp>
+        <p:nvSpPr>
+          <p:cNvPr id="2" name="Title 1">
+            <a:extLst>
+              <a:ext uri="{FF2B5EF4-FFF2-40B4-BE49-F238E27FC236}">
+                <a16:creationId xmlns:a16="http://schemas.microsoft.com/office/drawing/2014/main" id="{5F48CF64-A513-14A1-5C36-065B07D865CE}"/>
+              </a:ext>
+            </a:extLst>
+          </p:cNvPr>
+          <p:cNvSpPr>
+            <a:spLocks noGrp="1"/>
+          </p:cNvSpPr>
+          <p:nvPr>
+            <p:ph type="title"/>
+          </p:nvPr>
+        </p:nvSpPr>
+        <p:spPr/>
+        <p:txBody>
+          <a:bodyPr/>
+          <a:lstStyle/>
+          <a:p>
+            <a:endParaRPr lang="en-US"/>
+          </a:p>
+        </p:txBody>
+      </p:sp>
+      <p:sp>
+        <p:nvSpPr>
+          <p:cNvPr id="3" name="Content Placeholder 2">
+            <a:extLst>
+              <a:ext uri="{FF2B5EF4-FFF2-40B4-BE49-F238E27FC236}">
+                <a16:creationId xmlns:a16="http://schemas.microsoft.com/office/drawing/2014/main" id="{685A739E-C182-E757-1295-456F9114F31B}"/>
+              </a:ext>
+            </a:extLst>
+          </p:cNvPr>
+          <p:cNvSpPr>
+            <a:spLocks noGrp="1"/>
+          </p:cNvSpPr>
+          <p:nvPr>
+            <p:ph idx="1"/>
+          </p:nvPr>
+        </p:nvSpPr>
+        <p:spPr/>
+        <p:txBody>
+          <a:bodyPr/>
+          <a:lstStyle/>
+          <a:p>
+            <a:endParaRPr lang="en-US"/>
+          </a:p>
+        </p:txBody>
+      </p:sp>
+    </p:spTree>
+    <p:extLst>
+      <p:ext uri="{BB962C8B-B14F-4D97-AF65-F5344CB8AC3E}">
+        <p14:creationId xmlns:p14="http://schemas.microsoft.com/office/powerpoint/2010/main" val="1081002331"/>
+      </p:ext>
+    </p:extLst>
+  </p:cSld>
+  <p:clrMapOvr>
+    <a:masterClrMapping/>
+  </p:clrMapOvr>
+</p:sld>
+</file>
+
+<file path=ppt/slides/slide8.xml><?xml version="1.0" encoding="utf-8"?>
+<p:sld xmlns:a="http://schemas.openxmlformats.org/drawingml/2006/main" xmlns:r="http://schemas.openxmlformats.org/officeDocument/2006/relationships" xmlns:p="http://schemas.openxmlformats.org/presentationml/2006/main">
+  <p:cSld>
+    <p:spTree>
+      <p:nvGrpSpPr>
+        <p:cNvPr id="1" name=""/>
+        <p:cNvGrpSpPr/>
+        <p:nvPr/>
+      </p:nvGrpSpPr>
+      <p:grpSpPr>
+        <a:xfrm>
+          <a:off x="0" y="0"/>
+          <a:ext cx="0" cy="0"/>
+          <a:chOff x="0" y="0"/>
+          <a:chExt cx="0" cy="0"/>
+        </a:xfrm>
+      </p:grpSpPr>
+      <p:sp>
+        <p:nvSpPr>
+          <p:cNvPr id="2" name="Title 1">
+            <a:extLst>
+              <a:ext uri="{FF2B5EF4-FFF2-40B4-BE49-F238E27FC236}">
+                <a16:creationId xmlns:a16="http://schemas.microsoft.com/office/drawing/2014/main" id="{DE7371D7-02C5-E318-5B5D-9959656A1B7B}"/>
+              </a:ext>
+            </a:extLst>
+          </p:cNvPr>
+          <p:cNvSpPr>
+            <a:spLocks noGrp="1"/>
+          </p:cNvSpPr>
+          <p:nvPr>
+            <p:ph type="title"/>
+          </p:nvPr>
+        </p:nvSpPr>
+        <p:spPr/>
+        <p:txBody>
+          <a:bodyPr/>
+          <a:lstStyle/>
+          <a:p>
+            <a:endParaRPr lang="en-US"/>
+          </a:p>
+        </p:txBody>
+      </p:sp>
+      <p:sp>
+        <p:nvSpPr>
+          <p:cNvPr id="3" name="Content Placeholder 2">
+            <a:extLst>
+              <a:ext uri="{FF2B5EF4-FFF2-40B4-BE49-F238E27FC236}">
+                <a16:creationId xmlns:a16="http://schemas.microsoft.com/office/drawing/2014/main" id="{16895E8C-C5F5-2B12-2921-2FCE452A607D}"/>
+              </a:ext>
+            </a:extLst>
+          </p:cNvPr>
+          <p:cNvSpPr>
+            <a:spLocks noGrp="1"/>
+          </p:cNvSpPr>
+          <p:nvPr>
+            <p:ph idx="1"/>
+          </p:nvPr>
+        </p:nvSpPr>
+        <p:spPr/>
+        <p:txBody>
+          <a:bodyPr/>
+          <a:lstStyle/>
+          <a:p>
+            <a:endParaRPr lang="en-US"/>
+          </a:p>
+        </p:txBody>
+      </p:sp>
+    </p:spTree>
+    <p:extLst>
+      <p:ext uri="{BB962C8B-B14F-4D97-AF65-F5344CB8AC3E}">
+        <p14:creationId xmlns:p14="http://schemas.microsoft.com/office/powerpoint/2010/main" val="1262970754"/>
+      </p:ext>
+    </p:extLst>
+  </p:cSld>
+  <p:clrMapOvr>
+    <a:masterClrMapping/>
+  </p:clrMapOvr>
+</p:sld>
+</file>
+
+<file path=ppt/slides/slide9.xml><?xml version="1.0" encoding="utf-8"?>
+<p:sld xmlns:a="http://schemas.openxmlformats.org/drawingml/2006/main" xmlns:r="http://schemas.openxmlformats.org/officeDocument/2006/relationships" xmlns:p="http://schemas.openxmlformats.org/presentationml/2006/main">
+  <p:cSld>
+    <p:spTree>
+      <p:nvGrpSpPr>
+        <p:cNvPr id="1" name=""/>
+        <p:cNvGrpSpPr/>
+        <p:nvPr/>
+      </p:nvGrpSpPr>
+      <p:grpSpPr>
+        <a:xfrm>
+          <a:off x="0" y="0"/>
+          <a:ext cx="0" cy="0"/>
+          <a:chOff x="0" y="0"/>
+          <a:chExt cx="0" cy="0"/>
+        </a:xfrm>
+      </p:grpSpPr>
+      <p:sp>
+        <p:nvSpPr>
+          <p:cNvPr id="2" name="Title 1">
+            <a:extLst>
+              <a:ext uri="{FF2B5EF4-FFF2-40B4-BE49-F238E27FC236}">
+                <a16:creationId xmlns:a16="http://schemas.microsoft.com/office/drawing/2014/main" id="{C0E8622E-B148-C4C9-1CC2-4F828089BD27}"/>
+              </a:ext>
+            </a:extLst>
+          </p:cNvPr>
+          <p:cNvSpPr>
+            <a:spLocks noGrp="1"/>
+          </p:cNvSpPr>
+          <p:nvPr>
+            <p:ph type="title"/>
+          </p:nvPr>
+        </p:nvSpPr>
+        <p:spPr/>
+        <p:txBody>
+          <a:bodyPr/>
+          <a:lstStyle/>
+          <a:p>
+            <a:endParaRPr lang="en-US"/>
+          </a:p>
+        </p:txBody>
+      </p:sp>
+      <p:sp>
+        <p:nvSpPr>
+          <p:cNvPr id="3" name="Content Placeholder 2">
+            <a:extLst>
+              <a:ext uri="{FF2B5EF4-FFF2-40B4-BE49-F238E27FC236}">
+                <a16:creationId xmlns:a16="http://schemas.microsoft.com/office/drawing/2014/main" id="{70F2D522-E2D2-B253-80AC-A9ECB4DC1AD7}"/>
+              </a:ext>
+            </a:extLst>
+          </p:cNvPr>
+          <p:cNvSpPr>
+            <a:spLocks noGrp="1"/>
+          </p:cNvSpPr>
+          <p:nvPr>
+            <p:ph idx="1"/>
+          </p:nvPr>
+        </p:nvSpPr>
+        <p:spPr/>
+        <p:txBody>
+          <a:bodyPr/>
+          <a:lstStyle/>
+          <a:p>
+            <a:endParaRPr lang="en-US"/>
+          </a:p>
+        </p:txBody>
+      </p:sp>
+    </p:spTree>
+    <p:extLst>
+      <p:ext uri="{BB962C8B-B14F-4D97-AF65-F5344CB8AC3E}">
+        <p14:creationId xmlns:p14="http://schemas.microsoft.com/office/powerpoint/2010/main" val="291561777"/>
+      </p:ext>
+    </p:extLst>
+  </p:cSld>
+  <p:clrMapOvr>
+    <a:masterClrMapping/>
+  </p:clrMapOvr>
+</p:sld>
+</file>
+
 <file path=ppt/theme/theme1.xml><?xml version="1.0" encoding="utf-8"?>
-<a:theme xmlns:a="http://schemas.openxmlformats.org/drawingml/2006/main" name="Berlin">
+<a:theme xmlns:a="http://schemas.openxmlformats.org/drawingml/2006/main" name="Ion">
   <a:themeElements>
-    <a:clrScheme name="Berlin">
+    <a:clrScheme name="Ion">
       <a:dk1>
         <a:sysClr val="windowText" lastClr="000000"/>
       </a:dk1>
@@ -7942,42 +6919,42 @@
         <a:sysClr val="window" lastClr="FFFFFF"/>
       </a:lt1>
       <a:dk2>
-        <a:srgbClr val="9D360E"/>
+        <a:srgbClr val="1E5155"/>
       </a:dk2>
       <a:lt2>
-        <a:srgbClr val="E7E6E6"/>
+        <a:srgbClr val="EBEBEB"/>
       </a:lt2>
       <a:accent1>
-        <a:srgbClr val="F09415"/>
+        <a:srgbClr val="B01513"/>
       </a:accent1>
       <a:accent2>
-        <a:srgbClr val="C1B56B"/>
+        <a:srgbClr val="EA6312"/>
       </a:accent2>
       <a:accent3>
-        <a:srgbClr val="4BAF73"/>
+        <a:srgbClr val="E6B729"/>
       </a:accent3>
       <a:accent4>
-        <a:srgbClr val="5AA6C0"/>
+        <a:srgbClr val="6AAC90"/>
       </a:accent4>
       <a:accent5>
-        <a:srgbClr val="D17DF9"/>
+        <a:srgbClr val="54849A"/>
       </a:accent5>
       <a:accent6>
-        <a:srgbClr val="FA7E5C"/>
+        <a:srgbClr val="9E5E9B"/>
       </a:accent6>
       <a:hlink>
-        <a:srgbClr val="FFAE3E"/>
+        <a:srgbClr val="58C1BA"/>
       </a:hlink>
       <a:folHlink>
-        <a:srgbClr val="FCC77E"/>
+        <a:srgbClr val="9DFFCB"/>
       </a:folHlink>
     </a:clrScheme>
-    <a:fontScheme name="Berlin">
+    <a:fontScheme name="Ion">
       <a:majorFont>
-        <a:latin typeface="Trebuchet MS" panose="020B0603020202020204"/>
+        <a:latin typeface="Century Gothic" panose="020B0502020202020204"/>
         <a:ea typeface=""/>
         <a:cs typeface=""/>
-        <a:font script="Jpan" typeface="ＭＳ Ｐゴシック"/>
+        <a:font script="Jpan" typeface="メイリオ"/>
         <a:font script="Hang" typeface="맑은 고딕"/>
         <a:font script="Hans" typeface="宋体"/>
         <a:font script="Hant" typeface="新細明體"/>
@@ -8009,10 +6986,10 @@
         <a:font script="Geor" typeface="Sylfaen"/>
       </a:majorFont>
       <a:minorFont>
-        <a:latin typeface="Trebuchet MS" panose="020B0603020202020204"/>
+        <a:latin typeface="Century Gothic" panose="020B0502020202020204"/>
         <a:ea typeface=""/>
         <a:cs typeface=""/>
-        <a:font script="Jpan" typeface="ＭＳ Ｐゴシック"/>
+        <a:font script="Jpan" typeface="メイリオ"/>
         <a:font script="Hang" typeface="맑은 고딕"/>
         <a:font script="Hans" typeface="宋体"/>
         <a:font script="Hant" typeface="新細明體"/>
@@ -8044,7 +7021,7 @@
         <a:font script="Geor" typeface="Sylfaen"/>
       </a:minorFont>
     </a:fontScheme>
-    <a:fmtScheme name="Berlin">
+    <a:fmtScheme name="Ion">
       <a:fillStyleLst>
         <a:solidFill>
           <a:schemeClr val="phClr"/>
@@ -8053,16 +7030,15 @@
           <a:gsLst>
             <a:gs pos="0">
               <a:schemeClr val="phClr">
-                <a:tint val="60000"/>
-                <a:satMod val="100000"/>
-                <a:lumMod val="110000"/>
+                <a:tint val="64000"/>
+                <a:lumMod val="118000"/>
               </a:schemeClr>
             </a:gs>
             <a:gs pos="100000">
               <a:schemeClr val="phClr">
-                <a:tint val="70000"/>
-                <a:satMod val="100000"/>
-                <a:lumMod val="100000"/>
+                <a:tint val="92000"/>
+                <a:alpha val="100000"/>
+                <a:lumMod val="110000"/>
               </a:schemeClr>
             </a:gs>
           </a:gsLst>
@@ -8072,23 +7048,14 @@
           <a:gsLst>
             <a:gs pos="0">
               <a:schemeClr val="phClr">
-                <a:tint val="94000"/>
-                <a:satMod val="103000"/>
-                <a:lumMod val="102000"/>
-              </a:schemeClr>
-            </a:gs>
-            <a:gs pos="50000">
-              <a:schemeClr val="phClr">
-                <a:shade val="100000"/>
-                <a:satMod val="110000"/>
-                <a:lumMod val="100000"/>
+                <a:tint val="98000"/>
+                <a:lumMod val="114000"/>
               </a:schemeClr>
             </a:gs>
             <a:gs pos="100000">
               <a:schemeClr val="phClr">
-                <a:shade val="78000"/>
-                <a:satMod val="120000"/>
-                <a:lumMod val="99000"/>
+                <a:shade val="90000"/>
+                <a:lumMod val="84000"/>
               </a:schemeClr>
             </a:gs>
           </a:gsLst>
@@ -8096,19 +7063,19 @@
         </a:gradFill>
       </a:fillStyleLst>
       <a:lnStyleLst>
-        <a:ln w="9525" cap="flat" cmpd="sng" algn="ctr">
+        <a:ln w="9525" cap="rnd" cmpd="sng" algn="ctr">
           <a:solidFill>
             <a:schemeClr val="phClr"/>
           </a:solidFill>
           <a:prstDash val="solid"/>
         </a:ln>
-        <a:ln w="12700" cap="flat" cmpd="sng" algn="ctr">
+        <a:ln w="19050" cap="rnd" cmpd="sng" algn="ctr">
           <a:solidFill>
             <a:schemeClr val="phClr"/>
           </a:solidFill>
           <a:prstDash val="solid"/>
         </a:ln>
-        <a:ln w="19050" cap="flat" cmpd="sng" algn="ctr">
+        <a:ln w="28575" cap="rnd" cmpd="sng" algn="ctr">
           <a:solidFill>
             <a:schemeClr val="phClr"/>
           </a:solidFill>
@@ -8120,58 +7087,80 @@
           <a:effectLst/>
         </a:effectStyle>
         <a:effectStyle>
-          <a:effectLst/>
+          <a:effectLst>
+            <a:outerShdw blurRad="38100" dist="25400" dir="5400000" rotWithShape="0">
+              <a:srgbClr val="000000">
+                <a:alpha val="45000"/>
+              </a:srgbClr>
+            </a:outerShdw>
+          </a:effectLst>
         </a:effectStyle>
         <a:effectStyle>
           <a:effectLst>
-            <a:outerShdw blurRad="57150" dist="19050" dir="5400000" algn="ctr" rotWithShape="0">
+            <a:outerShdw blurRad="63500" dist="38100" dir="5400000" rotWithShape="0">
               <a:srgbClr val="000000">
-                <a:alpha val="63000"/>
+                <a:alpha val="60000"/>
               </a:srgbClr>
             </a:outerShdw>
           </a:effectLst>
+          <a:scene3d>
+            <a:camera prst="orthographicFront">
+              <a:rot lat="0" lon="0" rev="0"/>
+            </a:camera>
+            <a:lightRig rig="threePt" dir="tl"/>
+          </a:scene3d>
+          <a:sp3d prstMaterial="plastic">
+            <a:bevelT w="0" h="0"/>
+          </a:sp3d>
         </a:effectStyle>
       </a:effectStyleLst>
       <a:bgFillStyleLst>
         <a:solidFill>
           <a:schemeClr val="phClr"/>
         </a:solidFill>
-        <a:solidFill>
-          <a:schemeClr val="phClr">
-            <a:tint val="95000"/>
-            <a:satMod val="170000"/>
-          </a:schemeClr>
-        </a:solidFill>
         <a:gradFill rotWithShape="1">
           <a:gsLst>
             <a:gs pos="0">
               <a:schemeClr val="phClr">
-                <a:tint val="96000"/>
-                <a:shade val="100000"/>
-                <a:hueMod val="270000"/>
-                <a:satMod val="200000"/>
-                <a:lumMod val="128000"/>
-              </a:schemeClr>
-            </a:gs>
-            <a:gs pos="50000">
-              <a:schemeClr val="phClr">
-                <a:shade val="100000"/>
-                <a:hueMod val="100000"/>
-                <a:satMod val="110000"/>
-                <a:lumMod val="130000"/>
+                <a:tint val="97000"/>
+                <a:hueMod val="88000"/>
+                <a:satMod val="130000"/>
+                <a:lumMod val="124000"/>
               </a:schemeClr>
             </a:gs>
             <a:gs pos="100000">
               <a:schemeClr val="phClr">
-                <a:shade val="78000"/>
-                <a:hueMod val="44000"/>
-                <a:satMod val="200000"/>
-                <a:lumMod val="69000"/>
+                <a:tint val="96000"/>
+                <a:shade val="88000"/>
+                <a:hueMod val="108000"/>
+                <a:satMod val="164000"/>
+                <a:lumMod val="76000"/>
               </a:schemeClr>
             </a:gs>
           </a:gsLst>
-          <a:lin ang="2520000" scaled="0"/>
+          <a:path path="circle">
+            <a:fillToRect l="45000" t="65000" r="125000" b="100000"/>
+          </a:path>
         </a:gradFill>
+        <a:blipFill rotWithShape="1">
+          <a:blip xmlns:r="http://schemas.openxmlformats.org/officeDocument/2006/relationships" r:embed="rId1">
+            <a:duotone>
+              <a:schemeClr val="phClr">
+                <a:shade val="69000"/>
+                <a:hueMod val="108000"/>
+                <a:satMod val="164000"/>
+                <a:lumMod val="74000"/>
+              </a:schemeClr>
+              <a:schemeClr val="phClr">
+                <a:tint val="96000"/>
+                <a:hueMod val="88000"/>
+                <a:satMod val="140000"/>
+                <a:lumMod val="132000"/>
+              </a:schemeClr>
+            </a:duotone>
+          </a:blip>
+          <a:stretch/>
+        </a:blipFill>
       </a:bgFillStyleLst>
     </a:fmtScheme>
   </a:themeElements>
@@ -8179,28 +7168,13 @@
   <a:extraClrSchemeLst/>
   <a:extLst>
     <a:ext uri="{05A4C25C-085E-4340-85A3-A5531E510DB2}">
-      <thm15:themeFamily xmlns:thm15="http://schemas.microsoft.com/office/thememl/2012/main" name="Berlin" id="{7B5DBA9E-B069-418E-9360-A61BDD0615A4}" vid="{C0CBE056-4EF4-4D92-969E-947779DA7AAA}"/>
+      <thm15:themeFamily xmlns:thm15="http://schemas.microsoft.com/office/thememl/2012/main" name="Ion" id="{B8441ADB-2E43-4AF7-B97A-BD870242C6A8}" vid="{292E63A9-BB86-4E3D-B92A-7223C6510D2E}"/>
     </a:ext>
   </a:extLst>
 </a:theme>
 </file>
 
 <file path=customXml/item1.xml><?xml version="1.0" encoding="utf-8"?>
-<p:properties xmlns:p="http://schemas.microsoft.com/office/2006/metadata/properties" xmlns:xsi="http://www.w3.org/2001/XMLSchema-instance" xmlns:pc="http://schemas.microsoft.com/office/infopath/2007/PartnerControls">
-  <documentManagement/>
-</p:properties>
-</file>
-
-<file path=customXml/item2.xml><?xml version="1.0" encoding="utf-8"?>
-<?mso-contentType ?>
-<FormTemplates xmlns="http://schemas.microsoft.com/sharepoint/v3/contenttype/forms">
-  <Display>DocumentLibraryForm</Display>
-  <Edit>DocumentLibraryForm</Edit>
-  <New>DocumentLibraryForm</New>
-</FormTemplates>
-</file>
-
-<file path=customXml/item3.xml><?xml version="1.0" encoding="utf-8"?>
 <ct:contentTypeSchema xmlns:ct="http://schemas.microsoft.com/office/2006/metadata/contentType" xmlns:ma="http://schemas.microsoft.com/office/2006/metadata/properties/metaAttributes" ct:_="" ma:_="" ma:contentTypeName="Document" ma:contentTypeID="0x010100A7AB926AED31D64099D8A5FB6470B6ED" ma:contentTypeVersion="9" ma:contentTypeDescription="Create a new document." ma:contentTypeScope="" ma:versionID="2dccdbaecd6835a0e5f39c113336db48">
   <xsd:schema xmlns:xsd="http://www.w3.org/2001/XMLSchema" xmlns:xs="http://www.w3.org/2001/XMLSchema" xmlns:p="http://schemas.microsoft.com/office/2006/metadata/properties" xmlns:ns3="00c3624e-ea26-46a9-84ef-099230a2cce3" targetNamespace="http://schemas.microsoft.com/office/2006/metadata/properties" ma:root="true" ma:fieldsID="1ed0714cfd85b5fd5aa94e0cd9970225" ns3:_="">
     <xsd:import namespace="00c3624e-ea26-46a9-84ef-099230a2cce3"/>
@@ -8376,31 +7350,22 @@
 </ct:contentTypeSchema>
 </file>
 
-<file path=customXml/itemProps1.xml><?xml version="1.0" encoding="utf-8"?>
-<ds:datastoreItem xmlns:ds="http://schemas.openxmlformats.org/officeDocument/2006/customXml" ds:itemID="{CACDE179-76C8-405C-98B1-BA6E751B78DD}">
-  <ds:schemaRefs>
-    <ds:schemaRef ds:uri="http://schemas.microsoft.com/office/2006/documentManagement/types"/>
-    <ds:schemaRef ds:uri="http://purl.org/dc/terms/"/>
-    <ds:schemaRef ds:uri="http://purl.org/dc/dcmitype/"/>
-    <ds:schemaRef ds:uri="http://schemas.microsoft.com/office/infopath/2007/PartnerControls"/>
-    <ds:schemaRef ds:uri="http://schemas.openxmlformats.org/package/2006/metadata/core-properties"/>
-    <ds:schemaRef ds:uri="00c3624e-ea26-46a9-84ef-099230a2cce3"/>
-    <ds:schemaRef ds:uri="http://schemas.microsoft.com/office/2006/metadata/properties"/>
-    <ds:schemaRef ds:uri="http://www.w3.org/XML/1998/namespace"/>
-    <ds:schemaRef ds:uri="http://purl.org/dc/elements/1.1/"/>
-  </ds:schemaRefs>
-</ds:datastoreItem>
+<file path=customXml/item2.xml><?xml version="1.0" encoding="utf-8"?>
+<?mso-contentType ?>
+<FormTemplates xmlns="http://schemas.microsoft.com/sharepoint/v3/contenttype/forms">
+  <Display>DocumentLibraryForm</Display>
+  <Edit>DocumentLibraryForm</Edit>
+  <New>DocumentLibraryForm</New>
+</FormTemplates>
 </file>
 
-<file path=customXml/itemProps2.xml><?xml version="1.0" encoding="utf-8"?>
-<ds:datastoreItem xmlns:ds="http://schemas.openxmlformats.org/officeDocument/2006/customXml" ds:itemID="{FCDC0719-03AC-4375-899F-EC245CD4688D}">
-  <ds:schemaRefs>
-    <ds:schemaRef ds:uri="http://schemas.microsoft.com/sharepoint/v3/contenttype/forms"/>
-  </ds:schemaRefs>
-</ds:datastoreItem>
+<file path=customXml/item3.xml><?xml version="1.0" encoding="utf-8"?>
+<p:properties xmlns:p="http://schemas.microsoft.com/office/2006/metadata/properties" xmlns:xsi="http://www.w3.org/2001/XMLSchema-instance" xmlns:pc="http://schemas.microsoft.com/office/infopath/2007/PartnerControls">
+  <documentManagement/>
+</p:properties>
 </file>
 
-<file path=customXml/itemProps3.xml><?xml version="1.0" encoding="utf-8"?>
+<file path=customXml/itemProps1.xml><?xml version="1.0" encoding="utf-8"?>
 <ds:datastoreItem xmlns:ds="http://schemas.openxmlformats.org/officeDocument/2006/customXml" ds:itemID="{E9A18C25-DF69-49C9-A179-A457BD833C48}">
   <ds:schemaRefs>
     <ds:schemaRef ds:uri="http://schemas.microsoft.com/office/2006/metadata/contentType"/>
@@ -8416,4 +7381,28 @@
     <ds:schemaRef ds:uri="http://schemas.microsoft.com/internal/obd"/>
   </ds:schemaRefs>
 </ds:datastoreItem>
+</file>
+
+<file path=customXml/itemProps2.xml><?xml version="1.0" encoding="utf-8"?>
+<ds:datastoreItem xmlns:ds="http://schemas.openxmlformats.org/officeDocument/2006/customXml" ds:itemID="{FCDC0719-03AC-4375-899F-EC245CD4688D}">
+  <ds:schemaRefs>
+    <ds:schemaRef ds:uri="http://schemas.microsoft.com/sharepoint/v3/contenttype/forms"/>
+  </ds:schemaRefs>
+</ds:datastoreItem>
+</file>
+
+<file path=customXml/itemProps3.xml><?xml version="1.0" encoding="utf-8"?>
+<ds:datastoreItem xmlns:ds="http://schemas.openxmlformats.org/officeDocument/2006/customXml" ds:itemID="{CACDE179-76C8-405C-98B1-BA6E751B78DD}">
+  <ds:schemaRefs>
+    <ds:schemaRef ds:uri="http://schemas.microsoft.com/office/2006/documentManagement/types"/>
+    <ds:schemaRef ds:uri="http://purl.org/dc/terms/"/>
+    <ds:schemaRef ds:uri="http://purl.org/dc/dcmitype/"/>
+    <ds:schemaRef ds:uri="http://schemas.microsoft.com/office/infopath/2007/PartnerControls"/>
+    <ds:schemaRef ds:uri="http://schemas.openxmlformats.org/package/2006/metadata/core-properties"/>
+    <ds:schemaRef ds:uri="00c3624e-ea26-46a9-84ef-099230a2cce3"/>
+    <ds:schemaRef ds:uri="http://schemas.microsoft.com/office/2006/metadata/properties"/>
+    <ds:schemaRef ds:uri="http://www.w3.org/XML/1998/namespace"/>
+    <ds:schemaRef ds:uri="http://purl.org/dc/elements/1.1/"/>
+  </ds:schemaRefs>
+</ds:datastoreItem>
 </file>